--- a/교통용량분석_중간발표.pptx
+++ b/교통용량분석_중간발표.pptx
@@ -112,24 +112,24 @@
   <p:extLst>
     <p:ext uri="{521415D9-36F7-43E2-AB2F-B90AF26B5E84}">
       <p14:sectionLst xmlns:p14="http://schemas.microsoft.com/office/powerpoint/2010/main">
-        <p14:section name="개요" id="{5ee05c8b-c636-fd85-0e08-7ce9752db37f}">
+        <p14:section name="개요" id="{bed9d4c9-2abe-9e8e-f8f4-90bf5bfd6fc2}">
           <p14:sldIdLst>
             <p14:sldId id="256"/>
           </p14:sldIdLst>
         </p14:section>
-        <p14:section name="고속도로 기본구간" id="{bda30823-4f7f-d929-e014-0731ec9967c8}">
+        <p14:section name="고속도로 기본구간" id="{054f55d0-b62b-952a-3cc0-d3727fa3cc29}">
           <p14:sldIdLst>
             <p14:sldId id="257"/>
             <p14:sldId id="258"/>
           </p14:sldIdLst>
         </p14:section>
-        <p14:section name="신호교차로" id="{4ea04d25-514d-1d48-2ca9-a8f7ffe5238b}">
+        <p14:section name="신호교차로" id="{2a46f457-edb7-1940-2e05-30c306889d5b}">
           <p14:sldIdLst>
             <p14:sldId id="259"/>
             <p14:sldId id="260"/>
           </p14:sldIdLst>
         </p14:section>
-        <p14:section name="향후 계획" id="{5c0b2bb3-7079-bcf2-fa3f-90b4239e9aae}">
+        <p14:section name="향후 계획" id="{df711e8a-c274-2992-6485-e0c530ab990a}">
           <p14:sldIdLst>
             <p14:sldId id="261"/>
           </p14:sldIdLst>
@@ -169,7 +169,7 @@
                 </a:solidFill>
                 <a:latin typeface="+mn-lt"/>
               </a:rPr>
-              <a:t>오후 첨두 1시간 진입방향별 교통량 (대)</a:t>
+              <a:t>오후 첨두 1시간 접근로별 진입 교통량 (대)</a:t>
             </a:r>
           </a:p>
         </c:rich>
@@ -280,16 +280,16 @@
                 <c:ptCount val="4"/>
                 <c:lvl>
                   <c:pt idx="0">
-                    <c:v>서쪽에서 진입</c:v>
+                    <c:v>서측 (서쪽에서 진입)</c:v>
                   </c:pt>
                   <c:pt idx="1">
-                    <c:v>동쪽에서 진입</c:v>
+                    <c:v>동측 (동쪽에서 진입)</c:v>
                   </c:pt>
                   <c:pt idx="2">
-                    <c:v>남쪽에서 진입</c:v>
+                    <c:v>남측 (남쪽에서 진입)</c:v>
                   </c:pt>
                   <c:pt idx="3">
-                    <c:v>북쪽에서 진입</c:v>
+                    <c:v>북측 (북쪽에서 진입)</c:v>
                   </c:pt>
                 </c:lvl>
               </c:multiLvlStrCache>
@@ -372,7 +372,7 @@
           <a:lstStyle/>
           <a:p>
             <a:pPr>
-              <a:defRPr sz="1200" b="0" i="0" u="none" strike="noStrike">
+              <a:defRPr sz="1100" b="0" i="0" u="none" strike="noStrike">
                 <a:solidFill>
                   <a:srgbClr val="1A1F36"/>
                 </a:solidFill>
@@ -848,7 +848,7 @@
           <a:p>
             <a:r>
               <a:rPr lang="en-US" dirty="0"/>
-              <a:t>발표 개요: 고속도로 기본구간(수도권제1순환고속도로 성남TG→송파IC 방향)과 신호교차로(태릉입구역 교차로)를 대상으로 선정했고, 이번 중간발표는 대상 선정과 자료 확보·예비 검토 단계까지를 다룹니다. 최종 용량·서비스수준 결과는 아직 없습니다.</a:t>
+              <a:t>고속도로 기본구간(수도권제1순환고속도로 성남TG→송파IC 방향)과 신호교차로(태릉입구역 교차로)를 대상으로 선정했습니다. 이번 중간발표에서는 대상 선정, 자료 확보 현황, 현장조사 계획을 다루며, 최종 용량·서비스수준 결과는 아직 없습니다.</a:t>
             </a:r>
             <a:endParaRPr lang="en-US" dirty="0"/>
           </a:p>
@@ -936,7 +936,7 @@
           <a:p>
             <a:r>
               <a:rPr lang="en-US" dirty="0"/>
-              <a:t>성남TG→송파IC 방향 중 편도 4차로가 유지되는 구간을 선택했습니다. 접속부에서 각 400m 떨어진 지점을 잠정 경계로 두었으나, 이것만으로 접속부 영향이 완전히 제거됐다고 보지는 않습니다. 전체 구간 길이는 아직 확정하지 않았습니다.</a:t>
+              <a:t>성남TG→송파IC 방향 중 편도 4차로가 유지되는 구간을 선택했습니다. 지도의 출발 지점이 시작점, 도착 지점이 종료점입니다. 접속부 기준점에서 각 400m 떨어진 지점을 잠정 경계로 두었으나, 이것만으로 접속부 영향이 완전히 제거됐다고 보지는 않습니다.</a:t>
             </a:r>
             <a:endParaRPr lang="en-US" dirty="0"/>
           </a:p>
@@ -1024,7 +1024,7 @@
           <a:p>
             <a:r>
               <a:rPr lang="en-US" dirty="0"/>
-              <a:t>대표 분석지점은 00700, 비교 지점은 00800입니다. 두 지점의 5일간 하루 교통량 차이는 약 1.9~3.7%로 흐름이 유사했습니다. 차로폭·측방여유폭·종단경사·중차량 구성비와 정확한 VDS 설치 위치는 아직 확보·확인되지 않았습니다.</a:t>
+              <a:t>대표 분석지점은 00700, 비교 지점은 00800입니다. 두 지점의 5일간 하루 교통량 차이는 약 1.9~3.7%입니다. 00800은 집계 차로 범위가 확인되지 않아 비교용으로만 쓰고 교통량을 합산하지 않습니다. 차로폭·측방여유폭·종단경사·중차량 구성비는 오른쪽 경로로 보완할 계획입니다.</a:t>
             </a:r>
             <a:endParaRPr lang="en-US" dirty="0"/>
           </a:p>
@@ -1112,7 +1112,7 @@
           <a:p>
             <a:r>
               <a:rPr lang="en-US" dirty="0"/>
-              <a:t>태릉입구역 교차로는 스마트교차로 교통량 자료를 얻을 수 있고 현장 접근이 가능해 선정했습니다. 차로 구성은 지도·거리뷰로 잠정 확인한 것으로 현장조사에서 대조할 예정입니다.</a:t>
+              <a:t>접근로는 교차로 기준 도로의 위치로 부르고, 괄호 안에 차량이 들어오는 방향을 적었습니다. 예를 들어 동측 접근로는 동쪽에서 진입해 서쪽으로 진행하는 차량입니다. 차로 구성은 지도·거리뷰로 잠정 확인했으며, 버스전용차로와 유턴 조건이 차로군 구성에 주는 영향은 현장에서 확인합니다.</a:t>
             </a:r>
             <a:endParaRPr lang="en-US" dirty="0"/>
           </a:p>
@@ -1200,7 +1200,7 @@
           <a:p>
             <a:r>
               <a:rPr lang="en-US" dirty="0"/>
-              <a:t>2026년 9월 29일 하루 자료로, 회전별 5분 교통량을 연속 12개씩 합산해 첨두 1시간을 찾았습니다. 오후 17:20~18:20이 6,169대로 오전보다 많았고, 방향별로는 서쪽 진입이 1,992대로 가장 많았습니다. 한 날짜 결과이므로 일반적인 첨두시간으로 확정하지는 않습니다.</a:t>
+              <a:t>회전별 5분 교통량을 합산한 뒤, 검토 시간범위 안에서 연속 12개 구간의 합계가 가장 큰 1시간을 첨두시간으로 골랐습니다. 오후 17:20~18:20이 6,169대로 오전보다 많았고, 접근로별로는 서측이 1,992대로 가장 많았습니다. 네 접근로 합계는 6,169대로 전체 진입 교통량과 일치합니다. 한 날짜 결과이므로 일반적인 첨두시간으로 확정하지는 않으며, 서비스수준은 회전별 교통량과 신호시간을 연결해 차로군별로 분석할 예정입니다.</a:t>
             </a:r>
             <a:endParaRPr lang="en-US" dirty="0"/>
           </a:p>
@@ -1288,7 +1288,7 @@
           <a:p>
             <a:r>
               <a:rPr lang="en-US" dirty="0"/>
-              <a:t>교차로 현장조사는 평일 아침 또는 주말 중 가능한 시간에 진행할 예정이며 구체적 일정은 미정입니다. 신호는 3~5주기 반복 관측합니다. 고속도로는 공개자료와 기관 문의로 도로 조건, 중차량 구성비, VDS 설치정보를 보완합니다. 이후 자료 대조와 시간대 일치를 거쳐 용량·서비스수준 분석을 진행합니다.</a:t>
+              <a:t>현장조사는 10월 말로 예정되어 있습니다. 5장에서 확인한 오후 첨두와 시간대를 맞추기 위해 평일 오후 첨두를 포함해 관측하는 것이 원칙이고, 다른 시간대에 관측한 신호시간은 운영계획이 같은지 확인한 뒤에만 적용합니다. 신호는 3~5주기 예비 관측 후 변동이나 누락이 있으면 추가 관측합니다.</a:t>
             </a:r>
             <a:endParaRPr lang="en-US" dirty="0"/>
           </a:p>
@@ -2637,7 +2637,7 @@
                   <a:schemeClr val="accent5"/>
                 </a:solidFill>
               </a:rPr>
-              <a:t>중간발표 범위: ①~②  /  이후 진행: ③~④</a:t>
+              <a:t>중간발표: 대상 선정·자료 확보 현황·현장조사 계획  /  이후 진행: ③~④</a:t>
             </a:r>
             <a:endParaRPr lang="en-US" sz="1200" dirty="0"/>
           </a:p>
@@ -2702,8 +2702,8 @@
             <a:tbl>
               <a:tblPr/>
               <a:tblGrid>
-                <a:gridCol w="1234440"/>
-                <a:gridCol w="2724912"/>
+                <a:gridCol w="1005840"/>
+                <a:gridCol w="2953512"/>
               </a:tblGrid>
               <a:tr h="438912">
                 <a:tc>
@@ -2715,17 +2715,17 @@
                         <a:buNone/>
                       </a:pPr>
                       <a:r>
-                        <a:rPr lang="en-US" sz="1300" b="1" dirty="0">
+                        <a:rPr lang="en-US" sz="1200" b="1" dirty="0">
                           <a:solidFill>
                             <a:schemeClr val="bg1"/>
                           </a:solidFill>
                         </a:rPr>
                         <a:t>이름</a:t>
                       </a:r>
-                      <a:endParaRPr lang="en-US" sz="1300" dirty="0"/>
+                      <a:endParaRPr lang="en-US" sz="1200" dirty="0"/>
                     </a:p>
                   </a:txBody>
-                  <a:tcPr marL="91440" marR="91440" marT="45720" marB="45720" anchor="ctr">
+                  <a:tcPr marL="109728" marR="73152" marT="27432" marB="27432" anchor="ctr">
                     <a:lnL w="9525" cap="flat" cmpd="sng" algn="ctr">
                       <a:solidFill>
                         <a:srgbClr val="8FB3EA"/>
@@ -2776,17 +2776,17 @@
                         <a:buNone/>
                       </a:pPr>
                       <a:r>
-                        <a:rPr lang="en-US" sz="1300" b="1" dirty="0">
+                        <a:rPr lang="en-US" sz="1200" b="1" dirty="0">
                           <a:solidFill>
                             <a:schemeClr val="bg1"/>
                           </a:solidFill>
                         </a:rPr>
                         <a:t>담당 업무</a:t>
                       </a:r>
-                      <a:endParaRPr lang="en-US" sz="1300" dirty="0"/>
+                      <a:endParaRPr lang="en-US" sz="1200" dirty="0"/>
                     </a:p>
                   </a:txBody>
-                  <a:tcPr marL="91440" marR="91440" marT="45720" marB="45720" anchor="ctr">
+                  <a:tcPr marL="109728" marR="73152" marT="27432" marB="27432" anchor="ctr">
                     <a:lnL w="9525" cap="flat" cmpd="sng" algn="ctr">
                       <a:solidFill>
                         <a:srgbClr val="8FB3EA"/>
@@ -2829,19 +2829,27 @@
                   </a:tcPr>
                 </a:tc>
               </a:tr>
-              <a:tr h="438912">
+              <a:tr h="658368">
                 <a:tc>
                   <a:txBody>
                     <a:bodyPr/>
                     <a:lstStyle/>
                     <a:p>
-                      <a:pPr indent="0" marL="0">
+                      <a:pPr algn="ctr" indent="0" marL="0">
                         <a:buNone/>
                       </a:pPr>
-                      <a:endParaRPr lang="en-US" sz="1300" dirty="0"/>
+                      <a:r>
+                        <a:rPr lang="en-US" sz="1200" dirty="0">
+                          <a:solidFill>
+                            <a:schemeClr val="tx1"/>
+                          </a:solidFill>
+                        </a:rPr>
+                        <a:t>전현규</a:t>
+                      </a:r>
+                      <a:endParaRPr lang="en-US" sz="1200" dirty="0"/>
                     </a:p>
                   </a:txBody>
-                  <a:tcPr marL="91440" marR="91440" marT="45720" marB="45720" anchor="ctr">
+                  <a:tcPr marL="109728" marR="73152" marT="27432" marB="27432" anchor="ctr">
                     <a:lnL w="9525" cap="flat" cmpd="sng" algn="ctr">
                       <a:solidFill>
                         <a:srgbClr val="8FB3EA"/>
@@ -2888,10 +2896,18 @@
                       <a:pPr indent="0" marL="0">
                         <a:buNone/>
                       </a:pPr>
-                      <a:endParaRPr lang="en-US" sz="1300" dirty="0"/>
+                      <a:r>
+                        <a:rPr lang="en-US" sz="1200" dirty="0">
+                          <a:solidFill>
+                            <a:schemeClr val="tx1"/>
+                          </a:solidFill>
+                        </a:rPr>
+                        <a:t>발표, 고속도로 자료 정리, 현장 신호 조사</a:t>
+                      </a:r>
+                      <a:endParaRPr lang="en-US" sz="1200" dirty="0"/>
                     </a:p>
                   </a:txBody>
-                  <a:tcPr marL="91440" marR="91440" marT="45720" marB="45720" anchor="ctr">
+                  <a:tcPr marL="109728" marR="73152" marT="27432" marB="27432" anchor="ctr">
                     <a:lnL w="9525" cap="flat" cmpd="sng" algn="ctr">
                       <a:solidFill>
                         <a:srgbClr val="8FB3EA"/>
@@ -2931,19 +2947,27 @@
                   </a:tcPr>
                 </a:tc>
               </a:tr>
-              <a:tr h="438912">
+              <a:tr h="658368">
                 <a:tc>
                   <a:txBody>
                     <a:bodyPr/>
                     <a:lstStyle/>
                     <a:p>
-                      <a:pPr indent="0" marL="0">
+                      <a:pPr algn="ctr" indent="0" marL="0">
                         <a:buNone/>
                       </a:pPr>
-                      <a:endParaRPr lang="en-US" sz="1300" dirty="0"/>
+                      <a:r>
+                        <a:rPr lang="en-US" sz="1200" dirty="0">
+                          <a:solidFill>
+                            <a:schemeClr val="tx1"/>
+                          </a:solidFill>
+                        </a:rPr>
+                        <a:t>송동석</a:t>
+                      </a:r>
+                      <a:endParaRPr lang="en-US" sz="1200" dirty="0"/>
                     </a:p>
                   </a:txBody>
-                  <a:tcPr marL="91440" marR="91440" marT="45720" marB="45720" anchor="ctr">
+                  <a:tcPr marL="109728" marR="73152" marT="27432" marB="27432" anchor="ctr">
                     <a:lnL w="9525" cap="flat" cmpd="sng" algn="ctr">
                       <a:solidFill>
                         <a:srgbClr val="8FB3EA"/>
@@ -2990,214 +3014,18 @@
                       <a:pPr indent="0" marL="0">
                         <a:buNone/>
                       </a:pPr>
-                      <a:endParaRPr lang="en-US" sz="1300" dirty="0"/>
+                      <a:r>
+                        <a:rPr lang="en-US" sz="1200" dirty="0">
+                          <a:solidFill>
+                            <a:schemeClr val="tx1"/>
+                          </a:solidFill>
+                        </a:rPr>
+                        <a:t>발표, 교차로 교통량 분석, 결과 취합</a:t>
+                      </a:r>
+                      <a:endParaRPr lang="en-US" sz="1200" dirty="0"/>
                     </a:p>
                   </a:txBody>
-                  <a:tcPr marL="91440" marR="91440" marT="45720" marB="45720" anchor="ctr">
-                    <a:lnL w="9525" cap="flat" cmpd="sng" algn="ctr">
-                      <a:solidFill>
-                        <a:srgbClr val="8FB3EA"/>
-                      </a:solidFill>
-                      <a:prstDash val="solid"/>
-                      <a:round/>
-                      <a:headEnd type="none" w="med" len="med"/>
-                      <a:tailEnd type="none" w="med" len="med"/>
-                    </a:lnL>
-                    <a:lnR w="9525" cap="flat" cmpd="sng" algn="ctr">
-                      <a:solidFill>
-                        <a:srgbClr val="8FB3EA"/>
-                      </a:solidFill>
-                      <a:prstDash val="solid"/>
-                      <a:round/>
-                      <a:headEnd type="none" w="med" len="med"/>
-                      <a:tailEnd type="none" w="med" len="med"/>
-                    </a:lnR>
-                    <a:lnT w="9525" cap="flat" cmpd="sng" algn="ctr">
-                      <a:solidFill>
-                        <a:srgbClr val="8FB3EA"/>
-                      </a:solidFill>
-                      <a:prstDash val="solid"/>
-                      <a:round/>
-                      <a:headEnd type="none" w="med" len="med"/>
-                      <a:tailEnd type="none" w="med" len="med"/>
-                    </a:lnT>
-                    <a:lnB w="9525" cap="flat" cmpd="sng" algn="ctr">
-                      <a:solidFill>
-                        <a:srgbClr val="8FB3EA"/>
-                      </a:solidFill>
-                      <a:prstDash val="solid"/>
-                      <a:round/>
-                      <a:headEnd type="none" w="med" len="med"/>
-                      <a:tailEnd type="none" w="med" len="med"/>
-                    </a:lnB>
-                  </a:tcPr>
-                </a:tc>
-              </a:tr>
-              <a:tr h="438912">
-                <a:tc>
-                  <a:txBody>
-                    <a:bodyPr/>
-                    <a:lstStyle/>
-                    <a:p>
-                      <a:pPr indent="0" marL="0">
-                        <a:buNone/>
-                      </a:pPr>
-                      <a:endParaRPr lang="en-US" sz="1300" dirty="0"/>
-                    </a:p>
-                  </a:txBody>
-                  <a:tcPr marL="91440" marR="91440" marT="45720" marB="45720" anchor="ctr">
-                    <a:lnL w="9525" cap="flat" cmpd="sng" algn="ctr">
-                      <a:solidFill>
-                        <a:srgbClr val="8FB3EA"/>
-                      </a:solidFill>
-                      <a:prstDash val="solid"/>
-                      <a:round/>
-                      <a:headEnd type="none" w="med" len="med"/>
-                      <a:tailEnd type="none" w="med" len="med"/>
-                    </a:lnL>
-                    <a:lnR w="9525" cap="flat" cmpd="sng" algn="ctr">
-                      <a:solidFill>
-                        <a:srgbClr val="8FB3EA"/>
-                      </a:solidFill>
-                      <a:prstDash val="solid"/>
-                      <a:round/>
-                      <a:headEnd type="none" w="med" len="med"/>
-                      <a:tailEnd type="none" w="med" len="med"/>
-                    </a:lnR>
-                    <a:lnT w="9525" cap="flat" cmpd="sng" algn="ctr">
-                      <a:solidFill>
-                        <a:srgbClr val="8FB3EA"/>
-                      </a:solidFill>
-                      <a:prstDash val="solid"/>
-                      <a:round/>
-                      <a:headEnd type="none" w="med" len="med"/>
-                      <a:tailEnd type="none" w="med" len="med"/>
-                    </a:lnT>
-                    <a:lnB w="9525" cap="flat" cmpd="sng" algn="ctr">
-                      <a:solidFill>
-                        <a:srgbClr val="8FB3EA"/>
-                      </a:solidFill>
-                      <a:prstDash val="solid"/>
-                      <a:round/>
-                      <a:headEnd type="none" w="med" len="med"/>
-                      <a:tailEnd type="none" w="med" len="med"/>
-                    </a:lnB>
-                  </a:tcPr>
-                </a:tc>
-                <a:tc>
-                  <a:txBody>
-                    <a:bodyPr/>
-                    <a:lstStyle/>
-                    <a:p>
-                      <a:pPr indent="0" marL="0">
-                        <a:buNone/>
-                      </a:pPr>
-                      <a:endParaRPr lang="en-US" sz="1300" dirty="0"/>
-                    </a:p>
-                  </a:txBody>
-                  <a:tcPr marL="91440" marR="91440" marT="45720" marB="45720" anchor="ctr">
-                    <a:lnL w="9525" cap="flat" cmpd="sng" algn="ctr">
-                      <a:solidFill>
-                        <a:srgbClr val="8FB3EA"/>
-                      </a:solidFill>
-                      <a:prstDash val="solid"/>
-                      <a:round/>
-                      <a:headEnd type="none" w="med" len="med"/>
-                      <a:tailEnd type="none" w="med" len="med"/>
-                    </a:lnL>
-                    <a:lnR w="9525" cap="flat" cmpd="sng" algn="ctr">
-                      <a:solidFill>
-                        <a:srgbClr val="8FB3EA"/>
-                      </a:solidFill>
-                      <a:prstDash val="solid"/>
-                      <a:round/>
-                      <a:headEnd type="none" w="med" len="med"/>
-                      <a:tailEnd type="none" w="med" len="med"/>
-                    </a:lnR>
-                    <a:lnT w="9525" cap="flat" cmpd="sng" algn="ctr">
-                      <a:solidFill>
-                        <a:srgbClr val="8FB3EA"/>
-                      </a:solidFill>
-                      <a:prstDash val="solid"/>
-                      <a:round/>
-                      <a:headEnd type="none" w="med" len="med"/>
-                      <a:tailEnd type="none" w="med" len="med"/>
-                    </a:lnT>
-                    <a:lnB w="9525" cap="flat" cmpd="sng" algn="ctr">
-                      <a:solidFill>
-                        <a:srgbClr val="8FB3EA"/>
-                      </a:solidFill>
-                      <a:prstDash val="solid"/>
-                      <a:round/>
-                      <a:headEnd type="none" w="med" len="med"/>
-                      <a:tailEnd type="none" w="med" len="med"/>
-                    </a:lnB>
-                  </a:tcPr>
-                </a:tc>
-              </a:tr>
-              <a:tr h="438912">
-                <a:tc>
-                  <a:txBody>
-                    <a:bodyPr/>
-                    <a:lstStyle/>
-                    <a:p>
-                      <a:pPr indent="0" marL="0">
-                        <a:buNone/>
-                      </a:pPr>
-                      <a:endParaRPr lang="en-US" sz="1300" dirty="0"/>
-                    </a:p>
-                  </a:txBody>
-                  <a:tcPr marL="91440" marR="91440" marT="45720" marB="45720" anchor="ctr">
-                    <a:lnL w="9525" cap="flat" cmpd="sng" algn="ctr">
-                      <a:solidFill>
-                        <a:srgbClr val="8FB3EA"/>
-                      </a:solidFill>
-                      <a:prstDash val="solid"/>
-                      <a:round/>
-                      <a:headEnd type="none" w="med" len="med"/>
-                      <a:tailEnd type="none" w="med" len="med"/>
-                    </a:lnL>
-                    <a:lnR w="9525" cap="flat" cmpd="sng" algn="ctr">
-                      <a:solidFill>
-                        <a:srgbClr val="8FB3EA"/>
-                      </a:solidFill>
-                      <a:prstDash val="solid"/>
-                      <a:round/>
-                      <a:headEnd type="none" w="med" len="med"/>
-                      <a:tailEnd type="none" w="med" len="med"/>
-                    </a:lnR>
-                    <a:lnT w="9525" cap="flat" cmpd="sng" algn="ctr">
-                      <a:solidFill>
-                        <a:srgbClr val="8FB3EA"/>
-                      </a:solidFill>
-                      <a:prstDash val="solid"/>
-                      <a:round/>
-                      <a:headEnd type="none" w="med" len="med"/>
-                      <a:tailEnd type="none" w="med" len="med"/>
-                    </a:lnT>
-                    <a:lnB w="9525" cap="flat" cmpd="sng" algn="ctr">
-                      <a:solidFill>
-                        <a:srgbClr val="8FB3EA"/>
-                      </a:solidFill>
-                      <a:prstDash val="solid"/>
-                      <a:round/>
-                      <a:headEnd type="none" w="med" len="med"/>
-                      <a:tailEnd type="none" w="med" len="med"/>
-                    </a:lnB>
-                  </a:tcPr>
-                </a:tc>
-                <a:tc>
-                  <a:txBody>
-                    <a:bodyPr/>
-                    <a:lstStyle/>
-                    <a:p>
-                      <a:pPr indent="0" marL="0">
-                        <a:buNone/>
-                      </a:pPr>
-                      <a:endParaRPr lang="en-US" sz="1300" dirty="0"/>
-                    </a:p>
-                  </a:txBody>
-                  <a:tcPr marL="91440" marR="91440" marT="45720" marB="45720" anchor="ctr">
+                  <a:tcPr marL="109728" marR="73152" marT="27432" marB="27432" anchor="ctr">
                     <a:lnL w="9525" cap="flat" cmpd="sng" algn="ctr">
                       <a:solidFill>
                         <a:srgbClr val="8FB3EA"/>
@@ -3256,7 +3084,7 @@
           </p:nvPr>
         </p:nvGraphicFramePr>
         <p:xfrm>
-          <a:off x="7680960" y="5257800"/>
+          <a:off x="7680960" y="4956048"/>
           <a:ext cx="3959352" cy="914400"/>
         </p:xfrm>
         <a:graphic>
@@ -3264,8 +3092,8 @@
             <a:tbl>
               <a:tblPr/>
               <a:tblGrid>
-                <a:gridCol w="1234440"/>
-                <a:gridCol w="2724912"/>
+                <a:gridCol w="1005840"/>
+                <a:gridCol w="2953512"/>
               </a:tblGrid>
               <a:tr h="438912">
                 <a:tc>
@@ -3334,9 +3162,17 @@
                     <a:bodyPr/>
                     <a:lstStyle/>
                     <a:p>
-                      <a:pPr indent="0" marL="0">
+                      <a:pPr algn="ctr" indent="0" marL="0">
                         <a:buNone/>
                       </a:pPr>
+                      <a:r>
+                        <a:rPr lang="en-US" sz="1300" dirty="0">
+                          <a:solidFill>
+                            <a:schemeClr val="tx1"/>
+                          </a:solidFill>
+                        </a:rPr>
+                        <a:t>2026.10.14</a:t>
+                      </a:r>
                       <a:endParaRPr lang="en-US" sz="1300" dirty="0"/>
                     </a:p>
                   </a:txBody>
@@ -3449,7 +3285,7 @@
       </p:sp>
       <p:sp>
         <p:nvSpPr>
-          <p:cNvPr id="3" name="image-slot-12"/>
+          <p:cNvPr id="3" name="map-frame"/>
           <p:cNvSpPr/>
           <p:nvPr/>
         </p:nvSpPr>
@@ -3464,24 +3300,230 @@
           <a:solidFill>
             <a:schemeClr val="bg2"/>
           </a:solidFill>
-          <a:ln w="19050">
+          <a:ln w="12700">
             <a:solidFill>
-              <a:schemeClr val="accent3"/>
+              <a:schemeClr val="accent6"/>
             </a:solidFill>
-            <a:prstDash val="dash"/>
+            <a:prstDash val="solid"/>
           </a:ln>
         </p:spPr>
       </p:sp>
-      <p:sp>
-        <p:nvSpPr>
-          <p:cNvPr id="4" name="image-slot-label-13"/>
+      <p:pic>
+        <p:nvPicPr>
+          <p:cNvPr id="4" name="map-highway" descr="성남TG→송파IC 방향 선택 구간 위성지도 (네이버지도)">    </p:cNvPr>
+          <p:cNvPicPr>
+            <a:picLocks noChangeAspect="1"/>
+          </p:cNvPicPr>
+          <p:nvPr/>
+        </p:nvPicPr>
+        <p:blipFill>
+          <a:blip r:embed="rId1"/>
+          <a:stretch>
+            <a:fillRect/>
+          </a:stretch>
+        </p:blipFill>
+        <p:spPr>
+          <a:xfrm>
+            <a:off x="2331720" y="1234440"/>
+            <a:ext cx="1452616" cy="4206240"/>
+          </a:xfrm>
+          <a:prstGeom prst="rect">
+            <a:avLst/>
+          </a:prstGeom>
+        </p:spPr>
+      </p:pic>
+      <p:sp>
+        <p:nvSpPr>
+          <p:cNvPr id="5" name="leader-12"/>
+          <p:cNvSpPr/>
+          <p:nvPr/>
+        </p:nvSpPr>
+        <p:spPr>
+          <a:xfrm>
+            <a:off x="3160232" y="1907438"/>
+            <a:ext cx="1046008" cy="0"/>
+          </a:xfrm>
+          <a:prstGeom prst="line">
+            <a:avLst/>
+          </a:prstGeom>
+          <a:noFill/>
+          <a:ln w="12700">
+            <a:solidFill>
+              <a:schemeClr val="tx2"/>
+            </a:solidFill>
+            <a:prstDash val="solid"/>
+          </a:ln>
+        </p:spPr>
+      </p:sp>
+      <p:sp>
+        <p:nvSpPr>
+          <p:cNvPr id="6" name="callout-13"/>
           <p:cNvSpPr txBox="1"/>
           <p:nvPr/>
         </p:nvSpPr>
         <p:spPr>
           <a:xfrm>
-            <a:off x="731520" y="1417320"/>
-            <a:ext cx="6035040" cy="3840480"/>
+            <a:off x="4206240" y="1633118"/>
+            <a:ext cx="2606040" cy="548640"/>
+          </a:xfrm>
+          <a:prstGeom prst="rect">
+            <a:avLst/>
+          </a:prstGeom>
+          <a:solidFill>
+            <a:schemeClr val="bg1"/>
+          </a:solidFill>
+          <a:ln w="9525">
+            <a:solidFill>
+              <a:schemeClr val="accent6"/>
+            </a:solidFill>
+          </a:ln>
+        </p:spPr>
+        <p:txBody>
+          <a:bodyPr wrap="square" lIns="381" tIns="1016" rIns="1016" bIns="381" rtlCol="0" anchor="ctr"/>
+          <a:lstStyle/>
+          <a:p>
+            <a:pPr indent="0" marL="0">
+              <a:buNone/>
+            </a:pPr>
+            <a:r>
+              <a:rPr lang="en-US" sz="1200" b="1" dirty="0">
+                <a:solidFill>
+                  <a:schemeClr val="tx2"/>
+                </a:solidFill>
+              </a:rPr>
+              <a:t>종료점 (지도 ‘도착’)</a:t>
+            </a:r>
+            <a:endParaRPr lang="en-US" sz="1200" dirty="0"/>
+          </a:p>
+          <a:p>
+            <a:pPr indent="0" marL="0">
+              <a:buNone/>
+            </a:pPr>
+            <a:r>
+              <a:rPr lang="en-US" sz="1200" dirty="0">
+                <a:solidFill>
+                  <a:schemeClr val="tx1"/>
+                </a:solidFill>
+              </a:rPr>
+              <a:t>송파IC 쪽</a:t>
+            </a:r>
+            <a:endParaRPr lang="en-US" sz="1200" dirty="0"/>
+          </a:p>
+        </p:txBody>
+      </p:sp>
+      <p:sp>
+        <p:nvSpPr>
+          <p:cNvPr id="7" name="leader-14"/>
+          <p:cNvSpPr/>
+          <p:nvPr/>
+        </p:nvSpPr>
+        <p:spPr>
+          <a:xfrm>
+            <a:off x="3203811" y="4708794"/>
+            <a:ext cx="1002429" cy="0"/>
+          </a:xfrm>
+          <a:prstGeom prst="line">
+            <a:avLst/>
+          </a:prstGeom>
+          <a:noFill/>
+          <a:ln w="12700">
+            <a:solidFill>
+              <a:schemeClr val="tx2"/>
+            </a:solidFill>
+            <a:prstDash val="solid"/>
+          </a:ln>
+        </p:spPr>
+      </p:sp>
+      <p:sp>
+        <p:nvSpPr>
+          <p:cNvPr id="8" name="callout-15"/>
+          <p:cNvSpPr txBox="1"/>
+          <p:nvPr/>
+        </p:nvSpPr>
+        <p:spPr>
+          <a:xfrm>
+            <a:off x="4206240" y="4434474"/>
+            <a:ext cx="2606040" cy="548640"/>
+          </a:xfrm>
+          <a:prstGeom prst="rect">
+            <a:avLst/>
+          </a:prstGeom>
+          <a:solidFill>
+            <a:schemeClr val="bg1"/>
+          </a:solidFill>
+          <a:ln w="9525">
+            <a:solidFill>
+              <a:schemeClr val="accent6"/>
+            </a:solidFill>
+          </a:ln>
+        </p:spPr>
+        <p:txBody>
+          <a:bodyPr wrap="square" lIns="381" tIns="1016" rIns="1016" bIns="381" rtlCol="0" anchor="ctr"/>
+          <a:lstStyle/>
+          <a:p>
+            <a:pPr indent="0" marL="0">
+              <a:buNone/>
+            </a:pPr>
+            <a:r>
+              <a:rPr lang="en-US" sz="1200" b="1" dirty="0">
+                <a:solidFill>
+                  <a:schemeClr val="tx2"/>
+                </a:solidFill>
+              </a:rPr>
+              <a:t>시작점 (지도 ‘출발’)</a:t>
+            </a:r>
+            <a:endParaRPr lang="en-US" sz="1200" dirty="0"/>
+          </a:p>
+          <a:p>
+            <a:pPr indent="0" marL="0">
+              <a:buNone/>
+            </a:pPr>
+            <a:r>
+              <a:rPr lang="en-US" sz="1200" dirty="0">
+                <a:solidFill>
+                  <a:schemeClr val="tx1"/>
+                </a:solidFill>
+              </a:rPr>
+              <a:t>성남TG 쪽</a:t>
+            </a:r>
+            <a:endParaRPr lang="en-US" sz="1200" dirty="0"/>
+          </a:p>
+        </p:txBody>
+      </p:sp>
+      <p:sp>
+        <p:nvSpPr>
+          <p:cNvPr id="9" name="dir-arrow"/>
+          <p:cNvSpPr/>
+          <p:nvPr/>
+        </p:nvSpPr>
+        <p:spPr>
+          <a:xfrm flipV="1">
+            <a:off x="4434840" y="2651760"/>
+            <a:ext cx="0" cy="1417320"/>
+          </a:xfrm>
+          <a:prstGeom prst="line">
+            <a:avLst/>
+          </a:prstGeom>
+          <a:noFill/>
+          <a:ln w="38100">
+            <a:solidFill>
+              <a:schemeClr val="accent1"/>
+            </a:solidFill>
+            <a:prstDash val="solid"/>
+            <a:tailEnd type="triangle"/>
+          </a:ln>
+        </p:spPr>
+      </p:sp>
+      <p:sp>
+        <p:nvSpPr>
+          <p:cNvPr id="10" name="Text 7"/>
+          <p:cNvSpPr txBox="1"/>
+          <p:nvPr/>
+        </p:nvSpPr>
+        <p:spPr>
+          <a:xfrm>
+            <a:off x="4617720" y="3063240"/>
+            <a:ext cx="2103120" cy="548640"/>
           </a:xfrm>
           <a:prstGeom prst="rect">
             <a:avLst/>
@@ -3493,105 +3535,163 @@
           <a:bodyPr wrap="square" lIns="0" tIns="0" rIns="0" bIns="0" rtlCol="0" anchor="ctr"/>
           <a:lstStyle/>
           <a:p>
-            <a:pPr algn="ctr" indent="0" marL="0">
+            <a:pPr indent="0" marL="0">
               <a:buNone/>
             </a:pPr>
             <a:r>
-              <a:rPr lang="en-US" sz="1600" b="1" dirty="0">
+              <a:rPr lang="en-US" sz="1200" b="1" dirty="0">
                 <a:solidFill>
                   <a:schemeClr val="accent1"/>
                 </a:solidFill>
               </a:rPr>
-              <a:t>지도 삽입 위치</a:t>
-            </a:r>
-            <a:endParaRPr lang="en-US" sz="1600" dirty="0"/>
-          </a:p>
-          <a:p>
-            <a:pPr algn="ctr" indent="0" marL="0">
+              <a:t>진행방향</a:t>
+            </a:r>
+            <a:endParaRPr lang="en-US" sz="1200" dirty="0"/>
+          </a:p>
+          <a:p>
+            <a:pPr indent="0" marL="0">
               <a:buNone/>
             </a:pPr>
             <a:r>
-              <a:rPr lang="en-US" sz="800" dirty="0">
-                <a:solidFill>
-                  <a:srgbClr val="000000"/>
-                </a:solidFill>
-              </a:rPr>
-              <a:t> </a:t>
-            </a:r>
-            <a:endParaRPr lang="en-US" sz="1600" dirty="0"/>
-          </a:p>
-          <a:p>
-            <a:pPr algn="ctr" indent="0" marL="0">
+              <a:rPr lang="en-US" sz="1200" b="1" dirty="0">
+                <a:solidFill>
+                  <a:schemeClr val="accent1"/>
+                </a:solidFill>
+              </a:rPr>
+              <a:t>성남TG → 송파IC</a:t>
+            </a:r>
+            <a:endParaRPr lang="en-US" sz="1200" dirty="0"/>
+          </a:p>
+        </p:txBody>
+      </p:sp>
+      <p:sp>
+        <p:nvSpPr>
+          <p:cNvPr id="11" name="map-legend"/>
+          <p:cNvSpPr txBox="1"/>
+          <p:nvPr/>
+        </p:nvSpPr>
+        <p:spPr>
+          <a:xfrm>
+            <a:off x="685800" y="1371600"/>
+            <a:ext cx="1554480" cy="1280160"/>
+          </a:xfrm>
+          <a:prstGeom prst="rect">
+            <a:avLst/>
+          </a:prstGeom>
+          <a:noFill/>
+          <a:ln/>
+        </p:spPr>
+        <p:txBody>
+          <a:bodyPr wrap="square" lIns="0" tIns="0" rIns="0" bIns="0" rtlCol="0" anchor="t"/>
+          <a:lstStyle/>
+          <a:p>
+            <a:pPr indent="0" marL="0">
               <a:buNone/>
             </a:pPr>
             <a:r>
-              <a:rPr lang="en-US" sz="1200" dirty="0">
+              <a:rPr lang="en-US" sz="1100" b="1" dirty="0">
+                <a:solidFill>
+                  <a:schemeClr val="tx2"/>
+                </a:solidFill>
+              </a:rPr>
+              <a:t>지도 추가 표기 예정</a:t>
+            </a:r>
+            <a:endParaRPr lang="en-US" sz="1100" dirty="0"/>
+          </a:p>
+          <a:p>
+            <a:pPr indent="0" marL="0">
+              <a:buNone/>
+            </a:pPr>
+            <a:r>
+              <a:rPr lang="en-US" sz="1100" dirty="0">
+                <a:solidFill>
+                  <a:schemeClr val="tx1"/>
+                </a:solidFill>
+              </a:rPr>
+              <a:t>VDS 00700 · 00800</a:t>
+            </a:r>
+            <a:endParaRPr lang="en-US" sz="1100" dirty="0"/>
+          </a:p>
+          <a:p>
+            <a:pPr indent="0" marL="0">
+              <a:buNone/>
+            </a:pPr>
+            <a:r>
+              <a:rPr lang="en-US" sz="1100" dirty="0">
                 <a:solidFill>
                   <a:schemeClr val="accent5"/>
                 </a:solidFill>
               </a:rPr>
-              <a:t>표시 항목</a:t>
-            </a:r>
-            <a:endParaRPr lang="en-US" sz="1600" dirty="0"/>
-          </a:p>
-          <a:p>
-            <a:pPr algn="ctr" indent="0" marL="0">
+              <a:t>(이정 기반 근사 위치)</a:t>
+            </a:r>
+            <a:endParaRPr lang="en-US" sz="1100" dirty="0"/>
+          </a:p>
+          <a:p>
+            <a:pPr indent="0" marL="0">
               <a:buNone/>
             </a:pPr>
             <a:r>
-              <a:rPr lang="en-US" sz="1200" dirty="0">
+              <a:rPr lang="en-US" sz="1100" dirty="0">
+                <a:solidFill>
+                  <a:schemeClr val="tx1"/>
+                </a:solidFill>
+              </a:rPr>
+              <a:t>접속부 기준점·400m 경계</a:t>
+            </a:r>
+            <a:endParaRPr lang="en-US" sz="1100" dirty="0"/>
+          </a:p>
+        </p:txBody>
+      </p:sp>
+      <p:sp>
+        <p:nvSpPr>
+          <p:cNvPr id="12" name="Text 9"/>
+          <p:cNvSpPr txBox="1"/>
+          <p:nvPr/>
+        </p:nvSpPr>
+        <p:spPr>
+          <a:xfrm>
+            <a:off x="685800" y="5120640"/>
+            <a:ext cx="1600200" cy="228600"/>
+          </a:xfrm>
+          <a:prstGeom prst="rect">
+            <a:avLst/>
+          </a:prstGeom>
+          <a:noFill/>
+          <a:ln/>
+        </p:spPr>
+        <p:txBody>
+          <a:bodyPr wrap="square" lIns="0" tIns="0" rIns="0" bIns="0" rtlCol="0" anchor="ctr"/>
+          <a:lstStyle/>
+          <a:p>
+            <a:pPr indent="0" marL="0">
+              <a:buNone/>
+            </a:pPr>
+            <a:r>
+              <a:rPr lang="en-US" sz="1000" i="1" dirty="0">
                 <a:solidFill>
                   <a:schemeClr val="accent5"/>
                 </a:solidFill>
               </a:rPr>
-              <a:t>분석 시작점 · 종료점</a:t>
-            </a:r>
-            <a:endParaRPr lang="en-US" sz="1600" dirty="0"/>
-          </a:p>
-          <a:p>
-            <a:pPr algn="ctr" indent="0" marL="0">
-              <a:buNone/>
-            </a:pPr>
-            <a:r>
-              <a:rPr lang="en-US" sz="1200" dirty="0">
-                <a:solidFill>
-                  <a:schemeClr val="accent5"/>
-                </a:solidFill>
-              </a:rPr>
-              <a:t>진행방향 (성남TG → 송파IC)</a:t>
-            </a:r>
-            <a:endParaRPr lang="en-US" sz="1600" dirty="0"/>
-          </a:p>
-          <a:p>
-            <a:pPr algn="ctr" indent="0" marL="0">
-              <a:buNone/>
-            </a:pPr>
-            <a:r>
-              <a:rPr lang="en-US" sz="1200" dirty="0">
-                <a:solidFill>
-                  <a:schemeClr val="accent5"/>
-                </a:solidFill>
-              </a:rPr>
-              <a:t>VDS 00700 · 00800 (이정 기반 근사 위치)</a:t>
-            </a:r>
-            <a:endParaRPr lang="en-US" sz="1600" dirty="0"/>
+              <a:t>지도: 네이버지도 위성사진</a:t>
+            </a:r>
+            <a:endParaRPr lang="en-US" sz="1000" dirty="0"/>
           </a:p>
         </p:txBody>
       </p:sp>
       <p:sp>
         <p:nvSpPr>
-          <p:cNvPr id="5" name="card-14"/>
+          <p:cNvPr id="13" name="card-16"/>
           <p:cNvSpPr/>
           <p:nvPr/>
         </p:nvSpPr>
         <p:spPr>
           <a:xfrm>
             <a:off x="7269480" y="1234440"/>
-            <a:ext cx="4370832" cy="768096"/>
+            <a:ext cx="4370832" cy="786384"/>
           </a:xfrm>
           <a:prstGeom prst="roundRect">
             <a:avLst>
-              <a:gd name="adj" fmla="val 9524"/>
+              <a:gd name="adj" fmla="val 9302"/>
             </a:avLst>
           </a:prstGeom>
           <a:solidFill>
@@ -3607,14 +3707,14 @@
       </p:sp>
       <p:sp>
         <p:nvSpPr>
-          <p:cNvPr id="6" name="Text 4"/>
+          <p:cNvPr id="14" name="Text 11"/>
           <p:cNvSpPr txBox="1"/>
           <p:nvPr/>
         </p:nvSpPr>
         <p:spPr>
           <a:xfrm>
-            <a:off x="7498080" y="1325880"/>
-            <a:ext cx="2377440" cy="256032"/>
+            <a:off x="7498080" y="1307592"/>
+            <a:ext cx="2560320" cy="237744"/>
           </a:xfrm>
           <a:prstGeom prst="rect">
             <a:avLst/>
@@ -3635,7 +3735,7 @@
                   <a:schemeClr val="accent1"/>
                 </a:solidFill>
               </a:rPr>
-              <a:t>대상</a:t>
+              <a:t>대상 · 선정 이유</a:t>
             </a:r>
             <a:endParaRPr lang="en-US" sz="1200" dirty="0"/>
           </a:p>
@@ -3643,14 +3743,14 @@
       </p:sp>
       <p:sp>
         <p:nvSpPr>
-          <p:cNvPr id="7" name="Text 5"/>
+          <p:cNvPr id="15" name="Text 12"/>
           <p:cNvSpPr txBox="1"/>
           <p:nvPr/>
         </p:nvSpPr>
         <p:spPr>
           <a:xfrm>
-            <a:off x="7498080" y="1581912"/>
-            <a:ext cx="3913632" cy="365760"/>
+            <a:off x="7498080" y="1545336"/>
+            <a:ext cx="3913632" cy="420624"/>
           </a:xfrm>
           <a:prstGeom prst="rect">
             <a:avLst/>
@@ -3666,31 +3766,45 @@
               <a:buNone/>
             </a:pPr>
             <a:r>
-              <a:rPr lang="en-US" sz="1400" b="1" dirty="0">
+              <a:rPr lang="en-US" sz="1300" b="1" dirty="0">
                 <a:solidFill>
                   <a:schemeClr val="tx1"/>
                 </a:solidFill>
               </a:rPr>
-              <a:t>성남TG → 송파IC 방향의 선택 구간</a:t>
-            </a:r>
-            <a:endParaRPr lang="en-US" sz="1400" dirty="0"/>
+              <a:t>성남TG → 송파IC 방향 선택 구간</a:t>
+            </a:r>
+            <a:endParaRPr lang="en-US" sz="1300" dirty="0"/>
+          </a:p>
+          <a:p>
+            <a:pPr indent="0" marL="0">
+              <a:buNone/>
+            </a:pPr>
+            <a:r>
+              <a:rPr lang="en-US" sz="1300" dirty="0">
+                <a:solidFill>
+                  <a:schemeClr val="tx1"/>
+                </a:solidFill>
+              </a:rPr>
+              <a:t>차로 수 일정 · 인접 VDS 자료 비교 가능</a:t>
+            </a:r>
+            <a:endParaRPr lang="en-US" sz="1300" dirty="0"/>
           </a:p>
         </p:txBody>
       </p:sp>
       <p:sp>
         <p:nvSpPr>
-          <p:cNvPr id="8" name="card-15"/>
+          <p:cNvPr id="16" name="card-17"/>
           <p:cNvSpPr/>
           <p:nvPr/>
         </p:nvSpPr>
         <p:spPr>
           <a:xfrm>
-            <a:off x="7269480" y="2093976"/>
-            <a:ext cx="4370832" cy="768096"/>
+            <a:off x="7269480" y="2112264"/>
+            <a:ext cx="4370832" cy="786384"/>
           </a:xfrm>
           <a:prstGeom prst="roundRect">
             <a:avLst>
-              <a:gd name="adj" fmla="val 9524"/>
+              <a:gd name="adj" fmla="val 9302"/>
             </a:avLst>
           </a:prstGeom>
           <a:solidFill>
@@ -3706,14 +3820,14 @@
       </p:sp>
       <p:sp>
         <p:nvSpPr>
-          <p:cNvPr id="9" name="Text 7"/>
+          <p:cNvPr id="17" name="Text 14"/>
           <p:cNvSpPr txBox="1"/>
           <p:nvPr/>
         </p:nvSpPr>
         <p:spPr>
           <a:xfrm>
             <a:off x="7498080" y="2185416"/>
-            <a:ext cx="2377440" cy="256032"/>
+            <a:ext cx="2560320" cy="237744"/>
           </a:xfrm>
           <a:prstGeom prst="rect">
             <a:avLst/>
@@ -3742,14 +3856,14 @@
       </p:sp>
       <p:sp>
         <p:nvSpPr>
-          <p:cNvPr id="10" name="Text 8"/>
+          <p:cNvPr id="18" name="Text 15"/>
           <p:cNvSpPr txBox="1"/>
           <p:nvPr/>
         </p:nvSpPr>
         <p:spPr>
           <a:xfrm>
-            <a:off x="7498080" y="2441448"/>
-            <a:ext cx="3913632" cy="365760"/>
+            <a:off x="7498080" y="2423160"/>
+            <a:ext cx="3913632" cy="420624"/>
           </a:xfrm>
           <a:prstGeom prst="rect">
             <a:avLst/>
@@ -3765,31 +3879,45 @@
               <a:buNone/>
             </a:pPr>
             <a:r>
-              <a:rPr lang="en-US" sz="1400" dirty="0">
+              <a:rPr lang="en-US" sz="1300" dirty="0">
                 <a:solidFill>
                   <a:schemeClr val="tx1"/>
                 </a:solidFill>
               </a:rPr>
-              <a:t>지도상 접속부에서 각각 400m 이격하여 설정</a:t>
-            </a:r>
-            <a:endParaRPr lang="en-US" sz="1400" dirty="0"/>
+              <a:t>접속부 기준점에서 각각 400m 이격</a:t>
+            </a:r>
+            <a:endParaRPr lang="en-US" sz="1300" dirty="0"/>
+          </a:p>
+          <a:p>
+            <a:pPr indent="0" marL="0">
+              <a:buNone/>
+            </a:pPr>
+            <a:r>
+              <a:rPr lang="en-US" sz="1300" b="1" dirty="0">
+                <a:solidFill>
+                  <a:schemeClr val="accent4"/>
+                </a:solidFill>
+              </a:rPr>
+              <a:t>[기준점: 성남TG 측 ___ / 송파IC 측 ___]</a:t>
+            </a:r>
+            <a:endParaRPr lang="en-US" sz="1300" dirty="0"/>
           </a:p>
         </p:txBody>
       </p:sp>
       <p:sp>
         <p:nvSpPr>
-          <p:cNvPr id="11" name="card-16"/>
+          <p:cNvPr id="19" name="card-18"/>
           <p:cNvSpPr/>
           <p:nvPr/>
         </p:nvSpPr>
         <p:spPr>
           <a:xfrm>
-            <a:off x="7269480" y="2953512"/>
-            <a:ext cx="4370832" cy="768096"/>
+            <a:off x="7269480" y="2990088"/>
+            <a:ext cx="4370832" cy="621792"/>
           </a:xfrm>
           <a:prstGeom prst="roundRect">
             <a:avLst>
-              <a:gd name="adj" fmla="val 9524"/>
+              <a:gd name="adj" fmla="val 11765"/>
             </a:avLst>
           </a:prstGeom>
           <a:solidFill>
@@ -3805,14 +3933,14 @@
       </p:sp>
       <p:sp>
         <p:nvSpPr>
-          <p:cNvPr id="12" name="Text 10"/>
+          <p:cNvPr id="20" name="Text 17"/>
           <p:cNvSpPr txBox="1"/>
           <p:nvPr/>
         </p:nvSpPr>
         <p:spPr>
           <a:xfrm>
-            <a:off x="7498080" y="3044952"/>
-            <a:ext cx="2377440" cy="256032"/>
+            <a:off x="7498080" y="3063240"/>
+            <a:ext cx="2560320" cy="237744"/>
           </a:xfrm>
           <a:prstGeom prst="rect">
             <a:avLst/>
@@ -3833,7 +3961,7 @@
                   <a:schemeClr val="accent1"/>
                 </a:solidFill>
               </a:rPr>
-              <a:t>차로 조건</a:t>
+              <a:t>기본구간 판정 근거</a:t>
             </a:r>
             <a:endParaRPr lang="en-US" sz="1200" dirty="0"/>
           </a:p>
@@ -3841,13 +3969,156 @@
       </p:sp>
       <p:sp>
         <p:nvSpPr>
-          <p:cNvPr id="13" name="chip-17"/>
+          <p:cNvPr id="21" name="chip-19"/>
           <p:cNvSpPr txBox="1"/>
           <p:nvPr/>
         </p:nvSpPr>
         <p:spPr>
           <a:xfrm>
-            <a:off x="10881360" y="3044952"/>
+            <a:off x="10497312" y="3054096"/>
+            <a:ext cx="914400" cy="274320"/>
+          </a:xfrm>
+          <a:prstGeom prst="roundRect">
+            <a:avLst>
+              <a:gd name="adj" fmla="val 50000"/>
+            </a:avLst>
+          </a:prstGeom>
+          <a:solidFill>
+            <a:schemeClr val="bg1"/>
+          </a:solidFill>
+          <a:ln w="15875">
+            <a:solidFill>
+              <a:schemeClr val="accent4"/>
+            </a:solidFill>
+          </a:ln>
+        </p:spPr>
+        <p:txBody>
+          <a:bodyPr wrap="square" lIns="0" tIns="0" rIns="0" bIns="0" rtlCol="0" anchor="ctr"/>
+          <a:lstStyle/>
+          <a:p>
+            <a:pPr algn="ctr" indent="0" marL="0">
+              <a:buNone/>
+            </a:pPr>
+            <a:r>
+              <a:rPr lang="en-US" sz="1100" b="1" dirty="0">
+                <a:solidFill>
+                  <a:schemeClr val="accent4"/>
+                </a:solidFill>
+              </a:rPr>
+              <a:t>입력 필요</a:t>
+            </a:r>
+            <a:endParaRPr lang="en-US" sz="1100" dirty="0"/>
+          </a:p>
+        </p:txBody>
+      </p:sp>
+      <p:sp>
+        <p:nvSpPr>
+          <p:cNvPr id="22" name="Text 19"/>
+          <p:cNvSpPr txBox="1"/>
+          <p:nvPr/>
+        </p:nvSpPr>
+        <p:spPr>
+          <a:xfrm>
+            <a:off x="7498080" y="3300984"/>
+            <a:ext cx="3913632" cy="256032"/>
+          </a:xfrm>
+          <a:prstGeom prst="rect">
+            <a:avLst/>
+          </a:prstGeom>
+          <a:noFill/>
+          <a:ln/>
+        </p:spPr>
+        <p:txBody>
+          <a:bodyPr wrap="square" lIns="0" tIns="0" rIns="0" bIns="0" rtlCol="0" anchor="t"/>
+          <a:lstStyle/>
+          <a:p>
+            <a:pPr indent="0" marL="0">
+              <a:buNone/>
+            </a:pPr>
+            <a:r>
+              <a:rPr lang="en-US" sz="1300" b="1" dirty="0">
+                <a:solidFill>
+                  <a:schemeClr val="accent4"/>
+                </a:solidFill>
+              </a:rPr>
+              <a:t>[수업 적용 기준 · TG·접속부 영향 검토 방법]</a:t>
+            </a:r>
+            <a:endParaRPr lang="en-US" sz="1300" dirty="0"/>
+          </a:p>
+        </p:txBody>
+      </p:sp>
+      <p:sp>
+        <p:nvSpPr>
+          <p:cNvPr id="23" name="card-20"/>
+          <p:cNvSpPr/>
+          <p:nvPr/>
+        </p:nvSpPr>
+        <p:spPr>
+          <a:xfrm>
+            <a:off x="7269480" y="3703320"/>
+            <a:ext cx="4370832" cy="786384"/>
+          </a:xfrm>
+          <a:prstGeom prst="roundRect">
+            <a:avLst>
+              <a:gd name="adj" fmla="val 9302"/>
+            </a:avLst>
+          </a:prstGeom>
+          <a:solidFill>
+            <a:schemeClr val="bg2"/>
+          </a:solidFill>
+          <a:ln w="12700">
+            <a:solidFill>
+              <a:schemeClr val="bg2"/>
+            </a:solidFill>
+            <a:prstDash val="solid"/>
+          </a:ln>
+        </p:spPr>
+      </p:sp>
+      <p:sp>
+        <p:nvSpPr>
+          <p:cNvPr id="24" name="Text 21"/>
+          <p:cNvSpPr txBox="1"/>
+          <p:nvPr/>
+        </p:nvSpPr>
+        <p:spPr>
+          <a:xfrm>
+            <a:off x="7498080" y="3776472"/>
+            <a:ext cx="2560320" cy="237744"/>
+          </a:xfrm>
+          <a:prstGeom prst="rect">
+            <a:avLst/>
+          </a:prstGeom>
+          <a:noFill/>
+          <a:ln/>
+        </p:spPr>
+        <p:txBody>
+          <a:bodyPr wrap="square" lIns="0" tIns="0" rIns="0" bIns="0" rtlCol="0" anchor="ctr"/>
+          <a:lstStyle/>
+          <a:p>
+            <a:pPr indent="0" marL="0">
+              <a:buNone/>
+            </a:pPr>
+            <a:r>
+              <a:rPr lang="en-US" sz="1200" b="1" dirty="0">
+                <a:solidFill>
+                  <a:schemeClr val="accent1"/>
+                </a:solidFill>
+              </a:rPr>
+              <a:t>차로 조건</a:t>
+            </a:r>
+            <a:endParaRPr lang="en-US" sz="1200" dirty="0"/>
+          </a:p>
+        </p:txBody>
+      </p:sp>
+      <p:sp>
+        <p:nvSpPr>
+          <p:cNvPr id="25" name="chip-21"/>
+          <p:cNvSpPr txBox="1"/>
+          <p:nvPr/>
+        </p:nvSpPr>
+        <p:spPr>
+          <a:xfrm>
+            <a:off x="10881360" y="3767328"/>
             <a:ext cx="530352" cy="274320"/>
           </a:xfrm>
           <a:prstGeom prst="roundRect">
@@ -3885,14 +4156,14 @@
       </p:sp>
       <p:sp>
         <p:nvSpPr>
-          <p:cNvPr id="14" name="Text 12"/>
+          <p:cNvPr id="26" name="Text 23"/>
           <p:cNvSpPr txBox="1"/>
           <p:nvPr/>
         </p:nvSpPr>
         <p:spPr>
           <a:xfrm>
-            <a:off x="7498080" y="3300984"/>
-            <a:ext cx="3913632" cy="365760"/>
+            <a:off x="7498080" y="4014216"/>
+            <a:ext cx="3913632" cy="420624"/>
           </a:xfrm>
           <a:prstGeom prst="rect">
             <a:avLst/>
@@ -3908,31 +4179,45 @@
               <a:buNone/>
             </a:pPr>
             <a:r>
-              <a:rPr lang="en-US" sz="1400" dirty="0">
+              <a:rPr lang="en-US" sz="1300" dirty="0">
                 <a:solidFill>
                   <a:schemeClr val="tx1"/>
                 </a:solidFill>
               </a:rPr>
               <a:t>선택 구간 내 편도 4차로 유지</a:t>
             </a:r>
-            <a:endParaRPr lang="en-US" sz="1400" dirty="0"/>
+            <a:endParaRPr lang="en-US" sz="1300" dirty="0"/>
+          </a:p>
+          <a:p>
+            <a:pPr indent="0" marL="0">
+              <a:buNone/>
+            </a:pPr>
+            <a:r>
+              <a:rPr lang="en-US" sz="1300" b="1" dirty="0">
+                <a:solidFill>
+                  <a:schemeClr val="accent4"/>
+                </a:solidFill>
+              </a:rPr>
+              <a:t>[확인 자료]</a:t>
+            </a:r>
+            <a:endParaRPr lang="en-US" sz="1300" dirty="0"/>
           </a:p>
         </p:txBody>
       </p:sp>
       <p:sp>
         <p:nvSpPr>
-          <p:cNvPr id="15" name="card-18"/>
+          <p:cNvPr id="27" name="card-22"/>
           <p:cNvSpPr/>
           <p:nvPr/>
         </p:nvSpPr>
         <p:spPr>
           <a:xfrm>
-            <a:off x="7269480" y="3813048"/>
-            <a:ext cx="4370832" cy="768096"/>
+            <a:off x="7269480" y="4581144"/>
+            <a:ext cx="4370832" cy="621792"/>
           </a:xfrm>
           <a:prstGeom prst="roundRect">
             <a:avLst>
-              <a:gd name="adj" fmla="val 9524"/>
+              <a:gd name="adj" fmla="val 11765"/>
             </a:avLst>
           </a:prstGeom>
           <a:solidFill>
@@ -3948,14 +4233,14 @@
       </p:sp>
       <p:sp>
         <p:nvSpPr>
-          <p:cNvPr id="16" name="Text 14"/>
+          <p:cNvPr id="28" name="Text 25"/>
           <p:cNvSpPr txBox="1"/>
           <p:nvPr/>
         </p:nvSpPr>
         <p:spPr>
           <a:xfrm>
-            <a:off x="7498080" y="3904488"/>
-            <a:ext cx="2377440" cy="256032"/>
+            <a:off x="7498080" y="4654296"/>
+            <a:ext cx="2560320" cy="237744"/>
           </a:xfrm>
           <a:prstGeom prst="rect">
             <a:avLst/>
@@ -3976,7 +4261,7 @@
                   <a:schemeClr val="accent1"/>
                 </a:solidFill>
               </a:rPr>
-              <a:t>선정 이유</a:t>
+              <a:t>선택한 기본구간 길이</a:t>
             </a:r>
             <a:endParaRPr lang="en-US" sz="1200" dirty="0"/>
           </a:p>
@@ -3984,112 +4269,13 @@
       </p:sp>
       <p:sp>
         <p:nvSpPr>
-          <p:cNvPr id="17" name="Text 15"/>
+          <p:cNvPr id="29" name="chip-23"/>
           <p:cNvSpPr txBox="1"/>
           <p:nvPr/>
         </p:nvSpPr>
         <p:spPr>
           <a:xfrm>
-            <a:off x="7498080" y="4160520"/>
-            <a:ext cx="3913632" cy="365760"/>
-          </a:xfrm>
-          <a:prstGeom prst="rect">
-            <a:avLst/>
-          </a:prstGeom>
-          <a:noFill/>
-          <a:ln/>
-        </p:spPr>
-        <p:txBody>
-          <a:bodyPr wrap="square" lIns="0" tIns="0" rIns="0" bIns="0" rtlCol="0" anchor="t"/>
-          <a:lstStyle/>
-          <a:p>
-            <a:pPr indent="0" marL="0">
-              <a:buNone/>
-            </a:pPr>
-            <a:r>
-              <a:rPr lang="en-US" sz="1400" dirty="0">
-                <a:solidFill>
-                  <a:schemeClr val="tx1"/>
-                </a:solidFill>
-              </a:rPr>
-              <a:t>차로 수 일정 · 인접 VDS 자료 비교·검토 가능</a:t>
-            </a:r>
-            <a:endParaRPr lang="en-US" sz="1400" dirty="0"/>
-          </a:p>
-        </p:txBody>
-      </p:sp>
-      <p:sp>
-        <p:nvSpPr>
-          <p:cNvPr id="18" name="card-19"/>
-          <p:cNvSpPr/>
-          <p:nvPr/>
-        </p:nvSpPr>
-        <p:spPr>
-          <a:xfrm>
-            <a:off x="7269480" y="4672584"/>
-            <a:ext cx="4370832" cy="768096"/>
-          </a:xfrm>
-          <a:prstGeom prst="roundRect">
-            <a:avLst>
-              <a:gd name="adj" fmla="val 9524"/>
-            </a:avLst>
-          </a:prstGeom>
-          <a:solidFill>
-            <a:schemeClr val="bg2"/>
-          </a:solidFill>
-          <a:ln w="12700">
-            <a:solidFill>
-              <a:schemeClr val="bg2"/>
-            </a:solidFill>
-            <a:prstDash val="solid"/>
-          </a:ln>
-        </p:spPr>
-      </p:sp>
-      <p:sp>
-        <p:nvSpPr>
-          <p:cNvPr id="19" name="Text 17"/>
-          <p:cNvSpPr txBox="1"/>
-          <p:nvPr/>
-        </p:nvSpPr>
-        <p:spPr>
-          <a:xfrm>
-            <a:off x="7498080" y="4764024"/>
-            <a:ext cx="2377440" cy="256032"/>
-          </a:xfrm>
-          <a:prstGeom prst="rect">
-            <a:avLst/>
-          </a:prstGeom>
-          <a:noFill/>
-          <a:ln/>
-        </p:spPr>
-        <p:txBody>
-          <a:bodyPr wrap="square" lIns="0" tIns="0" rIns="0" bIns="0" rtlCol="0" anchor="ctr"/>
-          <a:lstStyle/>
-          <a:p>
-            <a:pPr indent="0" marL="0">
-              <a:buNone/>
-            </a:pPr>
-            <a:r>
-              <a:rPr lang="en-US" sz="1200" b="1" dirty="0">
-                <a:solidFill>
-                  <a:schemeClr val="accent1"/>
-                </a:solidFill>
-              </a:rPr>
-              <a:t>전체 구간 길이</a:t>
-            </a:r>
-            <a:endParaRPr lang="en-US" sz="1200" dirty="0"/>
-          </a:p>
-        </p:txBody>
-      </p:sp>
-      <p:sp>
-        <p:nvSpPr>
-          <p:cNvPr id="20" name="chip-20"/>
-          <p:cNvSpPr txBox="1"/>
-          <p:nvPr/>
-        </p:nvSpPr>
-        <p:spPr>
-          <a:xfrm>
-            <a:off x="10497312" y="4764024"/>
+            <a:off x="10497312" y="4645152"/>
             <a:ext cx="914400" cy="274320"/>
           </a:xfrm>
           <a:prstGeom prst="roundRect">
@@ -4127,14 +4313,14 @@
       </p:sp>
       <p:sp>
         <p:nvSpPr>
-          <p:cNvPr id="21" name="Text 19"/>
+          <p:cNvPr id="30" name="Text 27"/>
           <p:cNvSpPr txBox="1"/>
           <p:nvPr/>
         </p:nvSpPr>
         <p:spPr>
           <a:xfrm>
-            <a:off x="7498080" y="5020056"/>
-            <a:ext cx="3913632" cy="365760"/>
+            <a:off x="7498080" y="4892040"/>
+            <a:ext cx="3913632" cy="256032"/>
           </a:xfrm>
           <a:prstGeom prst="rect">
             <a:avLst/>
@@ -4150,20 +4336,20 @@
               <a:buNone/>
             </a:pPr>
             <a:r>
-              <a:rPr lang="en-US" sz="1400" dirty="0">
-                <a:solidFill>
-                  <a:schemeClr val="tx1"/>
-                </a:solidFill>
-              </a:rPr>
-              <a:t>미확정</a:t>
-            </a:r>
-            <a:endParaRPr lang="en-US" sz="1400" dirty="0"/>
+              <a:rPr lang="en-US" sz="1300" b="1" dirty="0">
+                <a:solidFill>
+                  <a:schemeClr val="accent4"/>
+                </a:solidFill>
+              </a:rPr>
+              <a:t>[___ m]</a:t>
+            </a:r>
+            <a:endParaRPr lang="en-US" sz="1300" dirty="0"/>
           </a:p>
         </p:txBody>
       </p:sp>
       <p:sp>
         <p:nvSpPr>
-          <p:cNvPr id="22" name="notes-21"/>
+          <p:cNvPr id="31" name="notes-24"/>
           <p:cNvSpPr txBox="1"/>
           <p:nvPr/>
         </p:nvSpPr>
@@ -4341,18 +4527,18 @@
         </p:nvGraphicFramePr>
         <p:xfrm>
           <a:off x="548640" y="1234440"/>
-          <a:ext cx="7680960" cy="914400"/>
+          <a:ext cx="6035040" cy="914400"/>
         </p:xfrm>
         <a:graphic>
           <a:graphicData uri="http://schemas.openxmlformats.org/drawingml/2006/table">
             <a:tbl>
               <a:tblPr/>
               <a:tblGrid>
-                <a:gridCol w="1783080"/>
-                <a:gridCol w="4800600"/>
-                <a:gridCol w="1097280"/>
+                <a:gridCol w="1600200"/>
+                <a:gridCol w="3611880"/>
+                <a:gridCol w="822960"/>
               </a:tblGrid>
-              <a:tr h="512064">
+              <a:tr h="384048">
                 <a:tc>
                   <a:txBody>
                     <a:bodyPr/>
@@ -4537,7 +4723,7 @@
                   </a:tcPr>
                 </a:tc>
               </a:tr>
-              <a:tr h="512064">
+              <a:tr h="457200">
                 <a:tc>
                   <a:txBody>
                     <a:bodyPr/>
@@ -4713,7 +4899,7 @@
                   </a:tcPr>
                 </a:tc>
               </a:tr>
-              <a:tr h="512064">
+              <a:tr h="457200">
                 <a:tc>
                   <a:txBody>
                     <a:bodyPr/>
@@ -4889,7 +5075,7 @@
                   </a:tcPr>
                 </a:tc>
               </a:tr>
-              <a:tr h="512064">
+              <a:tr h="457200">
                 <a:tc>
                   <a:txBody>
                     <a:bodyPr/>
@@ -5065,7 +5251,7 @@
                   </a:tcPr>
                 </a:tc>
               </a:tr>
-              <a:tr h="512064">
+              <a:tr h="640080">
                 <a:tc>
                   <a:txBody>
                     <a:bodyPr/>
@@ -5138,7 +5324,21 @@
                             <a:schemeClr val="tx1"/>
                           </a:solidFill>
                         </a:rPr>
-                        <a:t>두 지점 5일간 일 교통량 차이 약 1.9~3.7%, 시간대별 흐름 유사</a:t>
+                        <a:t>일 교통량 차이 약 1.9~3.7%</a:t>
+                      </a:r>
+                      <a:endParaRPr lang="en-US" sz="1300" dirty="0"/>
+                    </a:p>
+                    <a:p>
+                      <a:pPr indent="0" marL="0">
+                        <a:buNone/>
+                      </a:pPr>
+                      <a:r>
+                        <a:rPr lang="en-US" sz="1300" dirty="0">
+                          <a:solidFill>
+                            <a:schemeClr val="tx1"/>
+                          </a:solidFill>
+                        </a:rPr>
+                        <a:t>시간대별 흐름 유사</a:t>
                       </a:r>
                       <a:endParaRPr lang="en-US" sz="1300" dirty="0"/>
                     </a:p>
@@ -5241,7 +5441,7 @@
                   </a:tcPr>
                 </a:tc>
               </a:tr>
-              <a:tr h="512064">
+              <a:tr h="640080">
                 <a:tc>
                   <a:txBody>
                     <a:bodyPr/>
@@ -5314,7 +5514,21 @@
                             <a:schemeClr val="tx1"/>
                           </a:solidFill>
                         </a:rPr>
-                        <a:t>00700의 1~4차로 기록 확인, 5분 통계와 거의 일치</a:t>
+                        <a:t>00700의 1~4차로 기록 확인</a:t>
+                      </a:r>
+                      <a:endParaRPr lang="en-US" sz="1300" dirty="0"/>
+                    </a:p>
+                    <a:p>
+                      <a:pPr indent="0" marL="0">
+                        <a:buNone/>
+                      </a:pPr>
+                      <a:r>
+                        <a:rPr lang="en-US" sz="1300" dirty="0">
+                          <a:solidFill>
+                            <a:schemeClr val="tx1"/>
+                          </a:solidFill>
+                        </a:rPr>
+                        <a:t>5분 통계와 거의 일치</a:t>
                       </a:r>
                       <a:endParaRPr lang="en-US" sz="1300" dirty="0"/>
                     </a:p>
@@ -5417,27 +5631,222 @@
                   </a:tcPr>
                 </a:tc>
               </a:tr>
-              <a:tr h="512064">
+            </a:tbl>
+          </a:graphicData>
+        </a:graphic>
+      </p:graphicFrame>
+      <p:sp>
+        <p:nvSpPr>
+          <p:cNvPr id="4" name="card-25"/>
+          <p:cNvSpPr/>
+          <p:nvPr/>
+        </p:nvSpPr>
+        <p:spPr>
+          <a:xfrm>
+            <a:off x="548640" y="4389120"/>
+            <a:ext cx="6035040" cy="1051560"/>
+          </a:xfrm>
+          <a:prstGeom prst="roundRect">
+            <a:avLst>
+              <a:gd name="adj" fmla="val 6957"/>
+            </a:avLst>
+          </a:prstGeom>
+          <a:solidFill>
+            <a:schemeClr val="bg2"/>
+          </a:solidFill>
+          <a:ln w="12700">
+            <a:solidFill>
+              <a:schemeClr val="bg2"/>
+            </a:solidFill>
+            <a:prstDash val="solid"/>
+          </a:ln>
+        </p:spPr>
+      </p:sp>
+      <p:sp>
+        <p:nvSpPr>
+          <p:cNvPr id="5" name="evidence"/>
+          <p:cNvSpPr txBox="1"/>
+          <p:nvPr/>
+        </p:nvSpPr>
+        <p:spPr>
+          <a:xfrm>
+            <a:off x="731520" y="4462272"/>
+            <a:ext cx="5715000" cy="914400"/>
+          </a:xfrm>
+          <a:prstGeom prst="rect">
+            <a:avLst/>
+          </a:prstGeom>
+          <a:noFill/>
+          <a:ln/>
+        </p:spPr>
+        <p:txBody>
+          <a:bodyPr wrap="square" lIns="0" tIns="0" rIns="0" bIns="0" rtlCol="0" anchor="ctr"/>
+          <a:lstStyle/>
+          <a:p>
+            <a:pPr indent="0" marL="0">
+              <a:spcAft>
+                <a:spcPts val="300"/>
+              </a:spcAft>
+              <a:buNone/>
+            </a:pPr>
+            <a:r>
+              <a:rPr lang="en-US" sz="1200" b="1" dirty="0">
+                <a:solidFill>
+                  <a:schemeClr val="accent1"/>
+                </a:solidFill>
+              </a:rPr>
+              <a:t>차이 계산 기준  </a:t>
+            </a:r>
+            <a:pPr indent="0" marL="0">
+              <a:spcAft>
+                <a:spcPts val="300"/>
+              </a:spcAft>
+              <a:buNone/>
+            </a:pPr>
+            <a:r>
+              <a:rPr lang="en-US" sz="1200" b="1" dirty="0">
+                <a:solidFill>
+                  <a:schemeClr val="accent4"/>
+                </a:solidFill>
+              </a:rPr>
+              <a:t>[분모 지점 · 동일 집계시간 · 차로 합계 범위]</a:t>
+            </a:r>
+            <a:endParaRPr lang="en-US" sz="1200" dirty="0"/>
+          </a:p>
+          <a:p>
+            <a:pPr indent="0" marL="0">
+              <a:spcAft>
+                <a:spcPts val="300"/>
+              </a:spcAft>
+              <a:buNone/>
+            </a:pPr>
+            <a:r>
+              <a:rPr lang="en-US" sz="1200" b="1" dirty="0">
+                <a:solidFill>
+                  <a:schemeClr val="accent1"/>
+                </a:solidFill>
+              </a:rPr>
+              <a:t>근거 수치  </a:t>
+            </a:r>
+            <a:pPr indent="0" marL="0">
+              <a:spcAft>
+                <a:spcPts val="300"/>
+              </a:spcAft>
+              <a:buNone/>
+            </a:pPr>
+            <a:r>
+              <a:rPr lang="en-US" sz="1200" b="1" dirty="0">
+                <a:solidFill>
+                  <a:schemeClr val="accent4"/>
+                </a:solidFill>
+              </a:rPr>
+              <a:t>[시간대별 비교 그래프 또는 원시자료–5분 통계 차이(%)]</a:t>
+            </a:r>
+            <a:endParaRPr lang="en-US" sz="1200" dirty="0"/>
+          </a:p>
+          <a:p>
+            <a:pPr indent="0" marL="0">
+              <a:spcAft>
+                <a:spcPts val="300"/>
+              </a:spcAft>
+              <a:buNone/>
+            </a:pPr>
+            <a:r>
+              <a:rPr lang="en-US" sz="1200" dirty="0">
+                <a:solidFill>
+                  <a:schemeClr val="tx1"/>
+                </a:solidFill>
+              </a:rPr>
+              <a:t>00800은 집계 차로 범위 미확인 → 비교용으로만 활용, 교통량 합산하지 않음</a:t>
+            </a:r>
+            <a:endParaRPr lang="en-US" sz="1200" dirty="0"/>
+          </a:p>
+        </p:txBody>
+      </p:sp>
+      <p:sp>
+        <p:nvSpPr>
+          <p:cNvPr id="6" name="head-26"/>
+          <p:cNvSpPr txBox="1"/>
+          <p:nvPr/>
+        </p:nvSpPr>
+        <p:spPr>
+          <a:xfrm>
+            <a:off x="6858000" y="1188720"/>
+            <a:ext cx="4782312" cy="365760"/>
+          </a:xfrm>
+          <a:prstGeom prst="rect">
+            <a:avLst/>
+          </a:prstGeom>
+          <a:noFill/>
+          <a:ln/>
+        </p:spPr>
+        <p:txBody>
+          <a:bodyPr wrap="square" lIns="0" tIns="0" rIns="0" bIns="0" rtlCol="0" anchor="ctr"/>
+          <a:lstStyle/>
+          <a:p>
+            <a:pPr indent="0" marL="0">
+              <a:buNone/>
+            </a:pPr>
+            <a:r>
+              <a:rPr lang="en-US" sz="1600" b="1" dirty="0">
+                <a:solidFill>
+                  <a:schemeClr val="tx2"/>
+                </a:solidFill>
+              </a:rPr>
+              <a:t>미확보 항목 보완 계획</a:t>
+            </a:r>
+            <a:endParaRPr lang="en-US" sz="1600" dirty="0"/>
+          </a:p>
+        </p:txBody>
+      </p:sp>
+      <p:graphicFrame>
+        <p:nvGraphicFramePr>
+          <p:cNvPr id="7" name="hw-plan-table"/>
+          <p:cNvGraphicFramePr>
+            <a:graphicFrameLocks noGrp="1"/>
+          </p:cNvGraphicFramePr>
+          <p:nvPr>
+            <p:extLst>
+              <p:ext uri="{D42A27DB-BD31-4B8C-83A1-F6EECF244321}">
+                <p14:modId xmlns:p14="http://schemas.microsoft.com/office/powerpoint/2010/main" val="1579011935"/>
+              </p:ext>
+            </p:extLst>
+          </p:nvPr>
+        </p:nvGraphicFramePr>
+        <p:xfrm>
+          <a:off x="6858000" y="1645920"/>
+          <a:ext cx="4782312" cy="914400"/>
+        </p:xfrm>
+        <a:graphic>
+          <a:graphicData uri="http://schemas.openxmlformats.org/drawingml/2006/table">
+            <a:tbl>
+              <a:tblPr/>
+              <a:tblGrid>
+                <a:gridCol w="1417320"/>
+                <a:gridCol w="2542032"/>
+                <a:gridCol w="822960"/>
+              </a:tblGrid>
+              <a:tr h="384048">
                 <a:tc>
                   <a:txBody>
                     <a:bodyPr/>
                     <a:lstStyle/>
                     <a:p>
-                      <a:pPr indent="0" marL="0">
+                      <a:pPr algn="ctr" indent="0" marL="0">
                         <a:buNone/>
                       </a:pPr>
                       <a:r>
-                        <a:rPr lang="en-US" sz="1300" b="1" dirty="0">
+                        <a:rPr lang="en-US" sz="1200" b="1" dirty="0">
                           <a:solidFill>
-                            <a:schemeClr val="tx2"/>
+                            <a:schemeClr val="bg1"/>
                           </a:solidFill>
                         </a:rPr>
-                        <a:t>추가 확보 항목</a:t>
+                        <a:t>항목</a:t>
                       </a:r>
-                      <a:endParaRPr lang="en-US" sz="1300" dirty="0"/>
+                      <a:endParaRPr lang="en-US" sz="1200" dirty="0"/>
                     </a:p>
                   </a:txBody>
-                  <a:tcPr marL="109728" marR="73152" marT="27432" marB="27432" anchor="ctr">
+                  <a:tcPr marL="91440" marR="54864" marT="27432" marB="27432" anchor="ctr">
                     <a:lnL w="9525" cap="flat" cmpd="sng" algn="ctr">
                       <a:solidFill>
                         <a:srgbClr val="D6E2F5"/>
@@ -5475,68 +5884,7 @@
                       <a:tailEnd type="none" w="med" len="med"/>
                     </a:lnB>
                     <a:solidFill>
-                      <a:schemeClr val="bg2"/>
-                    </a:solidFill>
-                  </a:tcPr>
-                </a:tc>
-                <a:tc>
-                  <a:txBody>
-                    <a:bodyPr/>
-                    <a:lstStyle/>
-                    <a:p>
-                      <a:pPr indent="0" marL="0">
-                        <a:buNone/>
-                      </a:pPr>
-                      <a:r>
-                        <a:rPr lang="en-US" sz="1300" dirty="0">
-                          <a:solidFill>
-                            <a:schemeClr val="tx1"/>
-                          </a:solidFill>
-                        </a:rPr>
-                        <a:t>차로폭 · 측방여유폭 · 종단경사 · 중차량 구성비</a:t>
-                      </a:r>
-                      <a:endParaRPr lang="en-US" sz="1300" dirty="0"/>
-                    </a:p>
-                  </a:txBody>
-                  <a:tcPr marL="109728" marR="73152" marT="27432" marB="27432" anchor="ctr">
-                    <a:lnL w="9525" cap="flat" cmpd="sng" algn="ctr">
-                      <a:solidFill>
-                        <a:srgbClr val="D6E2F5"/>
-                      </a:solidFill>
-                      <a:prstDash val="solid"/>
-                      <a:round/>
-                      <a:headEnd type="none" w="med" len="med"/>
-                      <a:tailEnd type="none" w="med" len="med"/>
-                    </a:lnL>
-                    <a:lnR w="9525" cap="flat" cmpd="sng" algn="ctr">
-                      <a:solidFill>
-                        <a:srgbClr val="D6E2F5"/>
-                      </a:solidFill>
-                      <a:prstDash val="solid"/>
-                      <a:round/>
-                      <a:headEnd type="none" w="med" len="med"/>
-                      <a:tailEnd type="none" w="med" len="med"/>
-                    </a:lnR>
-                    <a:lnT w="9525" cap="flat" cmpd="sng" algn="ctr">
-                      <a:solidFill>
-                        <a:srgbClr val="D6E2F5"/>
-                      </a:solidFill>
-                      <a:prstDash val="solid"/>
-                      <a:round/>
-                      <a:headEnd type="none" w="med" len="med"/>
-                      <a:tailEnd type="none" w="med" len="med"/>
-                    </a:lnT>
-                    <a:lnB w="9525" cap="flat" cmpd="sng" algn="ctr">
-                      <a:solidFill>
-                        <a:srgbClr val="D6E2F5"/>
-                      </a:solidFill>
-                      <a:prstDash val="solid"/>
-                      <a:round/>
-                      <a:headEnd type="none" w="med" len="med"/>
-                      <a:tailEnd type="none" w="med" len="med"/>
-                    </a:lnB>
-                    <a:solidFill>
-                      <a:schemeClr val="bg2"/>
+                      <a:schemeClr val="accent4"/>
                     </a:solidFill>
                   </a:tcPr>
                 </a:tc>
@@ -5549,17 +5897,17 @@
                         <a:buNone/>
                       </a:pPr>
                       <a:r>
-                        <a:rPr lang="en-US" sz="1300" b="1" dirty="0">
+                        <a:rPr lang="en-US" sz="1200" b="1" dirty="0">
                           <a:solidFill>
-                            <a:schemeClr val="accent4"/>
+                            <a:schemeClr val="bg1"/>
                           </a:solidFill>
                         </a:rPr>
-                        <a:t>추가 확보</a:t>
+                        <a:t>확보 경로</a:t>
                       </a:r>
-                      <a:endParaRPr lang="en-US" sz="1300" dirty="0"/>
+                      <a:endParaRPr lang="en-US" sz="1200" dirty="0"/>
                     </a:p>
                   </a:txBody>
-                  <a:tcPr marL="109728" marR="73152" marT="27432" marB="27432" anchor="ctr">
+                  <a:tcPr marL="91440" marR="54864" marT="27432" marB="27432" anchor="ctr">
                     <a:lnL w="9525" cap="flat" cmpd="sng" algn="ctr">
                       <a:solidFill>
                         <a:srgbClr val="D6E2F5"/>
@@ -5597,131 +5945,7 @@
                       <a:tailEnd type="none" w="med" len="med"/>
                     </a:lnB>
                     <a:solidFill>
-                      <a:schemeClr val="bg2"/>
-                    </a:solidFill>
-                  </a:tcPr>
-                </a:tc>
-              </a:tr>
-              <a:tr h="512064">
-                <a:tc>
-                  <a:txBody>
-                    <a:bodyPr/>
-                    <a:lstStyle/>
-                    <a:p>
-                      <a:pPr indent="0" marL="0">
-                        <a:buNone/>
-                      </a:pPr>
-                      <a:r>
-                        <a:rPr lang="en-US" sz="1300" b="1" dirty="0">
-                          <a:solidFill>
-                            <a:schemeClr val="tx2"/>
-                          </a:solidFill>
-                        </a:rPr>
-                        <a:t>추가 확인 항목</a:t>
-                      </a:r>
-                      <a:endParaRPr lang="en-US" sz="1300" dirty="0"/>
-                    </a:p>
-                  </a:txBody>
-                  <a:tcPr marL="109728" marR="73152" marT="27432" marB="27432" anchor="ctr">
-                    <a:lnL w="9525" cap="flat" cmpd="sng" algn="ctr">
-                      <a:solidFill>
-                        <a:srgbClr val="D6E2F5"/>
-                      </a:solidFill>
-                      <a:prstDash val="solid"/>
-                      <a:round/>
-                      <a:headEnd type="none" w="med" len="med"/>
-                      <a:tailEnd type="none" w="med" len="med"/>
-                    </a:lnL>
-                    <a:lnR w="9525" cap="flat" cmpd="sng" algn="ctr">
-                      <a:solidFill>
-                        <a:srgbClr val="D6E2F5"/>
-                      </a:solidFill>
-                      <a:prstDash val="solid"/>
-                      <a:round/>
-                      <a:headEnd type="none" w="med" len="med"/>
-                      <a:tailEnd type="none" w="med" len="med"/>
-                    </a:lnR>
-                    <a:lnT w="9525" cap="flat" cmpd="sng" algn="ctr">
-                      <a:solidFill>
-                        <a:srgbClr val="D6E2F5"/>
-                      </a:solidFill>
-                      <a:prstDash val="solid"/>
-                      <a:round/>
-                      <a:headEnd type="none" w="med" len="med"/>
-                      <a:tailEnd type="none" w="med" len="med"/>
-                    </a:lnT>
-                    <a:lnB w="9525" cap="flat" cmpd="sng" algn="ctr">
-                      <a:solidFill>
-                        <a:srgbClr val="D6E2F5"/>
-                      </a:solidFill>
-                      <a:prstDash val="solid"/>
-                      <a:round/>
-                      <a:headEnd type="none" w="med" len="med"/>
-                      <a:tailEnd type="none" w="med" len="med"/>
-                    </a:lnB>
-                    <a:solidFill>
-                      <a:schemeClr val="bg2"/>
-                    </a:solidFill>
-                  </a:tcPr>
-                </a:tc>
-                <a:tc>
-                  <a:txBody>
-                    <a:bodyPr/>
-                    <a:lstStyle/>
-                    <a:p>
-                      <a:pPr indent="0" marL="0">
-                        <a:buNone/>
-                      </a:pPr>
-                      <a:r>
-                        <a:rPr lang="en-US" sz="1300" dirty="0">
-                          <a:solidFill>
-                            <a:schemeClr val="tx1"/>
-                          </a:solidFill>
-                        </a:rPr>
-                        <a:t>정확한 VDS 설치 위치, 00800의 집계 차로 범위</a:t>
-                      </a:r>
-                      <a:endParaRPr lang="en-US" sz="1300" dirty="0"/>
-                    </a:p>
-                  </a:txBody>
-                  <a:tcPr marL="109728" marR="73152" marT="27432" marB="27432" anchor="ctr">
-                    <a:lnL w="9525" cap="flat" cmpd="sng" algn="ctr">
-                      <a:solidFill>
-                        <a:srgbClr val="D6E2F5"/>
-                      </a:solidFill>
-                      <a:prstDash val="solid"/>
-                      <a:round/>
-                      <a:headEnd type="none" w="med" len="med"/>
-                      <a:tailEnd type="none" w="med" len="med"/>
-                    </a:lnL>
-                    <a:lnR w="9525" cap="flat" cmpd="sng" algn="ctr">
-                      <a:solidFill>
-                        <a:srgbClr val="D6E2F5"/>
-                      </a:solidFill>
-                      <a:prstDash val="solid"/>
-                      <a:round/>
-                      <a:headEnd type="none" w="med" len="med"/>
-                      <a:tailEnd type="none" w="med" len="med"/>
-                    </a:lnR>
-                    <a:lnT w="9525" cap="flat" cmpd="sng" algn="ctr">
-                      <a:solidFill>
-                        <a:srgbClr val="D6E2F5"/>
-                      </a:solidFill>
-                      <a:prstDash val="solid"/>
-                      <a:round/>
-                      <a:headEnd type="none" w="med" len="med"/>
-                      <a:tailEnd type="none" w="med" len="med"/>
-                    </a:lnT>
-                    <a:lnB w="9525" cap="flat" cmpd="sng" algn="ctr">
-                      <a:solidFill>
-                        <a:srgbClr val="D6E2F5"/>
-                      </a:solidFill>
-                      <a:prstDash val="solid"/>
-                      <a:round/>
-                      <a:headEnd type="none" w="med" len="med"/>
-                      <a:tailEnd type="none" w="med" len="med"/>
-                    </a:lnB>
-                    <a:solidFill>
-                      <a:schemeClr val="bg2"/>
+                      <a:schemeClr val="accent4"/>
                     </a:solidFill>
                   </a:tcPr>
                 </a:tc>
@@ -5734,17 +5958,196 @@
                         <a:buNone/>
                       </a:pPr>
                       <a:r>
-                        <a:rPr lang="en-US" sz="1300" b="1" dirty="0">
+                        <a:rPr lang="en-US" sz="1200" b="1" dirty="0">
+                          <a:solidFill>
+                            <a:schemeClr val="bg1"/>
+                          </a:solidFill>
+                        </a:rPr>
+                        <a:t>목표일</a:t>
+                      </a:r>
+                      <a:endParaRPr lang="en-US" sz="1200" dirty="0"/>
+                    </a:p>
+                  </a:txBody>
+                  <a:tcPr marL="91440" marR="54864" marT="27432" marB="27432" anchor="ctr">
+                    <a:lnL w="9525" cap="flat" cmpd="sng" algn="ctr">
+                      <a:solidFill>
+                        <a:srgbClr val="D6E2F5"/>
+                      </a:solidFill>
+                      <a:prstDash val="solid"/>
+                      <a:round/>
+                      <a:headEnd type="none" w="med" len="med"/>
+                      <a:tailEnd type="none" w="med" len="med"/>
+                    </a:lnL>
+                    <a:lnR w="9525" cap="flat" cmpd="sng" algn="ctr">
+                      <a:solidFill>
+                        <a:srgbClr val="D6E2F5"/>
+                      </a:solidFill>
+                      <a:prstDash val="solid"/>
+                      <a:round/>
+                      <a:headEnd type="none" w="med" len="med"/>
+                      <a:tailEnd type="none" w="med" len="med"/>
+                    </a:lnR>
+                    <a:lnT w="9525" cap="flat" cmpd="sng" algn="ctr">
+                      <a:solidFill>
+                        <a:srgbClr val="D6E2F5"/>
+                      </a:solidFill>
+                      <a:prstDash val="solid"/>
+                      <a:round/>
+                      <a:headEnd type="none" w="med" len="med"/>
+                      <a:tailEnd type="none" w="med" len="med"/>
+                    </a:lnT>
+                    <a:lnB w="9525" cap="flat" cmpd="sng" algn="ctr">
+                      <a:solidFill>
+                        <a:srgbClr val="D6E2F5"/>
+                      </a:solidFill>
+                      <a:prstDash val="solid"/>
+                      <a:round/>
+                      <a:headEnd type="none" w="med" len="med"/>
+                      <a:tailEnd type="none" w="med" len="med"/>
+                    </a:lnB>
+                    <a:solidFill>
+                      <a:schemeClr val="accent4"/>
+                    </a:solidFill>
+                  </a:tcPr>
+                </a:tc>
+              </a:tr>
+              <a:tr h="502920">
+                <a:tc>
+                  <a:txBody>
+                    <a:bodyPr/>
+                    <a:lstStyle/>
+                    <a:p>
+                      <a:pPr indent="0" marL="0">
+                        <a:buNone/>
+                      </a:pPr>
+                      <a:r>
+                        <a:rPr lang="en-US" sz="1200" b="1" dirty="0">
+                          <a:solidFill>
+                            <a:schemeClr val="tx2"/>
+                          </a:solidFill>
+                        </a:rPr>
+                        <a:t>차로폭 · 측방여유폭</a:t>
+                      </a:r>
+                      <a:endParaRPr lang="en-US" sz="1200" dirty="0"/>
+                    </a:p>
+                  </a:txBody>
+                  <a:tcPr marL="91440" marR="54864" marT="27432" marB="27432" anchor="ctr">
+                    <a:lnL w="9525" cap="flat" cmpd="sng" algn="ctr">
+                      <a:solidFill>
+                        <a:srgbClr val="D6E2F5"/>
+                      </a:solidFill>
+                      <a:prstDash val="solid"/>
+                      <a:round/>
+                      <a:headEnd type="none" w="med" len="med"/>
+                      <a:tailEnd type="none" w="med" len="med"/>
+                    </a:lnL>
+                    <a:lnR w="9525" cap="flat" cmpd="sng" algn="ctr">
+                      <a:solidFill>
+                        <a:srgbClr val="D6E2F5"/>
+                      </a:solidFill>
+                      <a:prstDash val="solid"/>
+                      <a:round/>
+                      <a:headEnd type="none" w="med" len="med"/>
+                      <a:tailEnd type="none" w="med" len="med"/>
+                    </a:lnR>
+                    <a:lnT w="9525" cap="flat" cmpd="sng" algn="ctr">
+                      <a:solidFill>
+                        <a:srgbClr val="D6E2F5"/>
+                      </a:solidFill>
+                      <a:prstDash val="solid"/>
+                      <a:round/>
+                      <a:headEnd type="none" w="med" len="med"/>
+                      <a:tailEnd type="none" w="med" len="med"/>
+                    </a:lnT>
+                    <a:lnB w="9525" cap="flat" cmpd="sng" algn="ctr">
+                      <a:solidFill>
+                        <a:srgbClr val="D6E2F5"/>
+                      </a:solidFill>
+                      <a:prstDash val="solid"/>
+                      <a:round/>
+                      <a:headEnd type="none" w="med" len="med"/>
+                      <a:tailEnd type="none" w="med" len="med"/>
+                    </a:lnB>
+                  </a:tcPr>
+                </a:tc>
+                <a:tc>
+                  <a:txBody>
+                    <a:bodyPr/>
+                    <a:lstStyle/>
+                    <a:p>
+                      <a:pPr indent="0" marL="0">
+                        <a:buNone/>
+                      </a:pPr>
+                      <a:r>
+                        <a:rPr lang="en-US" sz="1200" dirty="0">
+                          <a:solidFill>
+                            <a:schemeClr val="tx1"/>
+                          </a:solidFill>
+                        </a:rPr>
+                        <a:t>도로대장 · 설계자료</a:t>
+                      </a:r>
+                      <a:endParaRPr lang="en-US" sz="1200" dirty="0"/>
+                    </a:p>
+                  </a:txBody>
+                  <a:tcPr marL="91440" marR="54864" marT="27432" marB="27432" anchor="ctr">
+                    <a:lnL w="9525" cap="flat" cmpd="sng" algn="ctr">
+                      <a:solidFill>
+                        <a:srgbClr val="D6E2F5"/>
+                      </a:solidFill>
+                      <a:prstDash val="solid"/>
+                      <a:round/>
+                      <a:headEnd type="none" w="med" len="med"/>
+                      <a:tailEnd type="none" w="med" len="med"/>
+                    </a:lnL>
+                    <a:lnR w="9525" cap="flat" cmpd="sng" algn="ctr">
+                      <a:solidFill>
+                        <a:srgbClr val="D6E2F5"/>
+                      </a:solidFill>
+                      <a:prstDash val="solid"/>
+                      <a:round/>
+                      <a:headEnd type="none" w="med" len="med"/>
+                      <a:tailEnd type="none" w="med" len="med"/>
+                    </a:lnR>
+                    <a:lnT w="9525" cap="flat" cmpd="sng" algn="ctr">
+                      <a:solidFill>
+                        <a:srgbClr val="D6E2F5"/>
+                      </a:solidFill>
+                      <a:prstDash val="solid"/>
+                      <a:round/>
+                      <a:headEnd type="none" w="med" len="med"/>
+                      <a:tailEnd type="none" w="med" len="med"/>
+                    </a:lnT>
+                    <a:lnB w="9525" cap="flat" cmpd="sng" algn="ctr">
+                      <a:solidFill>
+                        <a:srgbClr val="D6E2F5"/>
+                      </a:solidFill>
+                      <a:prstDash val="solid"/>
+                      <a:round/>
+                      <a:headEnd type="none" w="med" len="med"/>
+                      <a:tailEnd type="none" w="med" len="med"/>
+                    </a:lnB>
+                  </a:tcPr>
+                </a:tc>
+                <a:tc>
+                  <a:txBody>
+                    <a:bodyPr/>
+                    <a:lstStyle/>
+                    <a:p>
+                      <a:pPr algn="ctr" indent="0" marL="0">
+                        <a:buNone/>
+                      </a:pPr>
+                      <a:r>
+                        <a:rPr lang="en-US" sz="1200" b="1" dirty="0">
                           <a:solidFill>
                             <a:schemeClr val="accent4"/>
                           </a:solidFill>
                         </a:rPr>
-                        <a:t>추가 확인</a:t>
+                        <a:t>[__.__]</a:t>
                       </a:r>
-                      <a:endParaRPr lang="en-US" sz="1300" dirty="0"/>
+                      <a:endParaRPr lang="en-US" sz="1200" dirty="0"/>
                     </a:p>
                   </a:txBody>
-                  <a:tcPr marL="109728" marR="73152" marT="27432" marB="27432" anchor="ctr">
+                  <a:tcPr marL="91440" marR="54864" marT="27432" marB="27432" anchor="ctr">
                     <a:lnL w="9525" cap="flat" cmpd="sng" algn="ctr">
                       <a:solidFill>
                         <a:srgbClr val="D6E2F5"/>
@@ -5781,9 +6184,562 @@
                       <a:headEnd type="none" w="med" len="med"/>
                       <a:tailEnd type="none" w="med" len="med"/>
                     </a:lnB>
-                    <a:solidFill>
-                      <a:schemeClr val="bg2"/>
-                    </a:solidFill>
+                  </a:tcPr>
+                </a:tc>
+              </a:tr>
+              <a:tr h="502920">
+                <a:tc>
+                  <a:txBody>
+                    <a:bodyPr/>
+                    <a:lstStyle/>
+                    <a:p>
+                      <a:pPr indent="0" marL="0">
+                        <a:buNone/>
+                      </a:pPr>
+                      <a:r>
+                        <a:rPr lang="en-US" sz="1200" b="1" dirty="0">
+                          <a:solidFill>
+                            <a:schemeClr val="tx2"/>
+                          </a:solidFill>
+                        </a:rPr>
+                        <a:t>종단경사</a:t>
+                      </a:r>
+                      <a:endParaRPr lang="en-US" sz="1200" dirty="0"/>
+                    </a:p>
+                  </a:txBody>
+                  <a:tcPr marL="91440" marR="54864" marT="27432" marB="27432" anchor="ctr">
+                    <a:lnL w="9525" cap="flat" cmpd="sng" algn="ctr">
+                      <a:solidFill>
+                        <a:srgbClr val="D6E2F5"/>
+                      </a:solidFill>
+                      <a:prstDash val="solid"/>
+                      <a:round/>
+                      <a:headEnd type="none" w="med" len="med"/>
+                      <a:tailEnd type="none" w="med" len="med"/>
+                    </a:lnL>
+                    <a:lnR w="9525" cap="flat" cmpd="sng" algn="ctr">
+                      <a:solidFill>
+                        <a:srgbClr val="D6E2F5"/>
+                      </a:solidFill>
+                      <a:prstDash val="solid"/>
+                      <a:round/>
+                      <a:headEnd type="none" w="med" len="med"/>
+                      <a:tailEnd type="none" w="med" len="med"/>
+                    </a:lnR>
+                    <a:lnT w="9525" cap="flat" cmpd="sng" algn="ctr">
+                      <a:solidFill>
+                        <a:srgbClr val="D6E2F5"/>
+                      </a:solidFill>
+                      <a:prstDash val="solid"/>
+                      <a:round/>
+                      <a:headEnd type="none" w="med" len="med"/>
+                      <a:tailEnd type="none" w="med" len="med"/>
+                    </a:lnT>
+                    <a:lnB w="9525" cap="flat" cmpd="sng" algn="ctr">
+                      <a:solidFill>
+                        <a:srgbClr val="D6E2F5"/>
+                      </a:solidFill>
+                      <a:prstDash val="solid"/>
+                      <a:round/>
+                      <a:headEnd type="none" w="med" len="med"/>
+                      <a:tailEnd type="none" w="med" len="med"/>
+                    </a:lnB>
+                  </a:tcPr>
+                </a:tc>
+                <a:tc>
+                  <a:txBody>
+                    <a:bodyPr/>
+                    <a:lstStyle/>
+                    <a:p>
+                      <a:pPr indent="0" marL="0">
+                        <a:buNone/>
+                      </a:pPr>
+                      <a:r>
+                        <a:rPr lang="en-US" sz="1200" dirty="0">
+                          <a:solidFill>
+                            <a:schemeClr val="tx1"/>
+                          </a:solidFill>
+                        </a:rPr>
+                        <a:t>도로대장 · 설계자료</a:t>
+                      </a:r>
+                      <a:endParaRPr lang="en-US" sz="1200" dirty="0"/>
+                    </a:p>
+                  </a:txBody>
+                  <a:tcPr marL="91440" marR="54864" marT="27432" marB="27432" anchor="ctr">
+                    <a:lnL w="9525" cap="flat" cmpd="sng" algn="ctr">
+                      <a:solidFill>
+                        <a:srgbClr val="D6E2F5"/>
+                      </a:solidFill>
+                      <a:prstDash val="solid"/>
+                      <a:round/>
+                      <a:headEnd type="none" w="med" len="med"/>
+                      <a:tailEnd type="none" w="med" len="med"/>
+                    </a:lnL>
+                    <a:lnR w="9525" cap="flat" cmpd="sng" algn="ctr">
+                      <a:solidFill>
+                        <a:srgbClr val="D6E2F5"/>
+                      </a:solidFill>
+                      <a:prstDash val="solid"/>
+                      <a:round/>
+                      <a:headEnd type="none" w="med" len="med"/>
+                      <a:tailEnd type="none" w="med" len="med"/>
+                    </a:lnR>
+                    <a:lnT w="9525" cap="flat" cmpd="sng" algn="ctr">
+                      <a:solidFill>
+                        <a:srgbClr val="D6E2F5"/>
+                      </a:solidFill>
+                      <a:prstDash val="solid"/>
+                      <a:round/>
+                      <a:headEnd type="none" w="med" len="med"/>
+                      <a:tailEnd type="none" w="med" len="med"/>
+                    </a:lnT>
+                    <a:lnB w="9525" cap="flat" cmpd="sng" algn="ctr">
+                      <a:solidFill>
+                        <a:srgbClr val="D6E2F5"/>
+                      </a:solidFill>
+                      <a:prstDash val="solid"/>
+                      <a:round/>
+                      <a:headEnd type="none" w="med" len="med"/>
+                      <a:tailEnd type="none" w="med" len="med"/>
+                    </a:lnB>
+                  </a:tcPr>
+                </a:tc>
+                <a:tc>
+                  <a:txBody>
+                    <a:bodyPr/>
+                    <a:lstStyle/>
+                    <a:p>
+                      <a:pPr algn="ctr" indent="0" marL="0">
+                        <a:buNone/>
+                      </a:pPr>
+                      <a:r>
+                        <a:rPr lang="en-US" sz="1200" b="1" dirty="0">
+                          <a:solidFill>
+                            <a:schemeClr val="accent4"/>
+                          </a:solidFill>
+                        </a:rPr>
+                        <a:t>[__.__]</a:t>
+                      </a:r>
+                      <a:endParaRPr lang="en-US" sz="1200" dirty="0"/>
+                    </a:p>
+                  </a:txBody>
+                  <a:tcPr marL="91440" marR="54864" marT="27432" marB="27432" anchor="ctr">
+                    <a:lnL w="9525" cap="flat" cmpd="sng" algn="ctr">
+                      <a:solidFill>
+                        <a:srgbClr val="D6E2F5"/>
+                      </a:solidFill>
+                      <a:prstDash val="solid"/>
+                      <a:round/>
+                      <a:headEnd type="none" w="med" len="med"/>
+                      <a:tailEnd type="none" w="med" len="med"/>
+                    </a:lnL>
+                    <a:lnR w="9525" cap="flat" cmpd="sng" algn="ctr">
+                      <a:solidFill>
+                        <a:srgbClr val="D6E2F5"/>
+                      </a:solidFill>
+                      <a:prstDash val="solid"/>
+                      <a:round/>
+                      <a:headEnd type="none" w="med" len="med"/>
+                      <a:tailEnd type="none" w="med" len="med"/>
+                    </a:lnR>
+                    <a:lnT w="9525" cap="flat" cmpd="sng" algn="ctr">
+                      <a:solidFill>
+                        <a:srgbClr val="D6E2F5"/>
+                      </a:solidFill>
+                      <a:prstDash val="solid"/>
+                      <a:round/>
+                      <a:headEnd type="none" w="med" len="med"/>
+                      <a:tailEnd type="none" w="med" len="med"/>
+                    </a:lnT>
+                    <a:lnB w="9525" cap="flat" cmpd="sng" algn="ctr">
+                      <a:solidFill>
+                        <a:srgbClr val="D6E2F5"/>
+                      </a:solidFill>
+                      <a:prstDash val="solid"/>
+                      <a:round/>
+                      <a:headEnd type="none" w="med" len="med"/>
+                      <a:tailEnd type="none" w="med" len="med"/>
+                    </a:lnB>
+                  </a:tcPr>
+                </a:tc>
+              </a:tr>
+              <a:tr h="1143000">
+                <a:tc>
+                  <a:txBody>
+                    <a:bodyPr/>
+                    <a:lstStyle/>
+                    <a:p>
+                      <a:pPr indent="0" marL="0">
+                        <a:buNone/>
+                      </a:pPr>
+                      <a:r>
+                        <a:rPr lang="en-US" sz="1200" b="1" dirty="0">
+                          <a:solidFill>
+                            <a:schemeClr val="tx2"/>
+                          </a:solidFill>
+                        </a:rPr>
+                        <a:t>중차량 구성비</a:t>
+                      </a:r>
+                      <a:endParaRPr lang="en-US" sz="1200" dirty="0"/>
+                    </a:p>
+                  </a:txBody>
+                  <a:tcPr marL="91440" marR="54864" marT="27432" marB="27432" anchor="ctr">
+                    <a:lnL w="9525" cap="flat" cmpd="sng" algn="ctr">
+                      <a:solidFill>
+                        <a:srgbClr val="D6E2F5"/>
+                      </a:solidFill>
+                      <a:prstDash val="solid"/>
+                      <a:round/>
+                      <a:headEnd type="none" w="med" len="med"/>
+                      <a:tailEnd type="none" w="med" len="med"/>
+                    </a:lnL>
+                    <a:lnR w="9525" cap="flat" cmpd="sng" algn="ctr">
+                      <a:solidFill>
+                        <a:srgbClr val="D6E2F5"/>
+                      </a:solidFill>
+                      <a:prstDash val="solid"/>
+                      <a:round/>
+                      <a:headEnd type="none" w="med" len="med"/>
+                      <a:tailEnd type="none" w="med" len="med"/>
+                    </a:lnR>
+                    <a:lnT w="9525" cap="flat" cmpd="sng" algn="ctr">
+                      <a:solidFill>
+                        <a:srgbClr val="D6E2F5"/>
+                      </a:solidFill>
+                      <a:prstDash val="solid"/>
+                      <a:round/>
+                      <a:headEnd type="none" w="med" len="med"/>
+                      <a:tailEnd type="none" w="med" len="med"/>
+                    </a:lnT>
+                    <a:lnB w="9525" cap="flat" cmpd="sng" algn="ctr">
+                      <a:solidFill>
+                        <a:srgbClr val="D6E2F5"/>
+                      </a:solidFill>
+                      <a:prstDash val="solid"/>
+                      <a:round/>
+                      <a:headEnd type="none" w="med" len="med"/>
+                      <a:tailEnd type="none" w="med" len="med"/>
+                    </a:lnB>
+                  </a:tcPr>
+                </a:tc>
+                <a:tc>
+                  <a:txBody>
+                    <a:bodyPr/>
+                    <a:lstStyle/>
+                    <a:p>
+                      <a:pPr indent="0" marL="0">
+                        <a:buNone/>
+                      </a:pPr>
+                      <a:r>
+                        <a:rPr lang="en-US" sz="1200" dirty="0">
+                          <a:solidFill>
+                            <a:schemeClr val="tx1"/>
+                          </a:solidFill>
+                        </a:rPr>
+                        <a:t>대상 구간 직접 AVC 미확보</a:t>
+                      </a:r>
+                      <a:endParaRPr lang="en-US" sz="1200" dirty="0"/>
+                    </a:p>
+                    <a:p>
+                      <a:pPr indent="0" marL="0">
+                        <a:buNone/>
+                      </a:pPr>
+                      <a:r>
+                        <a:rPr lang="en-US" sz="1200" dirty="0">
+                          <a:solidFill>
+                            <a:schemeClr val="tx1"/>
+                          </a:solidFill>
+                        </a:rPr>
+                        <a:t>→ 인근 AVC 지점 자료 또는 현장 표본계수로 대체(안), 적용 근거 명시</a:t>
+                      </a:r>
+                      <a:endParaRPr lang="en-US" sz="1200" dirty="0"/>
+                    </a:p>
+                  </a:txBody>
+                  <a:tcPr marL="91440" marR="54864" marT="27432" marB="27432" anchor="ctr">
+                    <a:lnL w="9525" cap="flat" cmpd="sng" algn="ctr">
+                      <a:solidFill>
+                        <a:srgbClr val="D6E2F5"/>
+                      </a:solidFill>
+                      <a:prstDash val="solid"/>
+                      <a:round/>
+                      <a:headEnd type="none" w="med" len="med"/>
+                      <a:tailEnd type="none" w="med" len="med"/>
+                    </a:lnL>
+                    <a:lnR w="9525" cap="flat" cmpd="sng" algn="ctr">
+                      <a:solidFill>
+                        <a:srgbClr val="D6E2F5"/>
+                      </a:solidFill>
+                      <a:prstDash val="solid"/>
+                      <a:round/>
+                      <a:headEnd type="none" w="med" len="med"/>
+                      <a:tailEnd type="none" w="med" len="med"/>
+                    </a:lnR>
+                    <a:lnT w="9525" cap="flat" cmpd="sng" algn="ctr">
+                      <a:solidFill>
+                        <a:srgbClr val="D6E2F5"/>
+                      </a:solidFill>
+                      <a:prstDash val="solid"/>
+                      <a:round/>
+                      <a:headEnd type="none" w="med" len="med"/>
+                      <a:tailEnd type="none" w="med" len="med"/>
+                    </a:lnT>
+                    <a:lnB w="9525" cap="flat" cmpd="sng" algn="ctr">
+                      <a:solidFill>
+                        <a:srgbClr val="D6E2F5"/>
+                      </a:solidFill>
+                      <a:prstDash val="solid"/>
+                      <a:round/>
+                      <a:headEnd type="none" w="med" len="med"/>
+                      <a:tailEnd type="none" w="med" len="med"/>
+                    </a:lnB>
+                  </a:tcPr>
+                </a:tc>
+                <a:tc>
+                  <a:txBody>
+                    <a:bodyPr/>
+                    <a:lstStyle/>
+                    <a:p>
+                      <a:pPr algn="ctr" indent="0" marL="0">
+                        <a:buNone/>
+                      </a:pPr>
+                      <a:r>
+                        <a:rPr lang="en-US" sz="1200" b="1" dirty="0">
+                          <a:solidFill>
+                            <a:schemeClr val="accent4"/>
+                          </a:solidFill>
+                        </a:rPr>
+                        <a:t>[__.__]</a:t>
+                      </a:r>
+                      <a:endParaRPr lang="en-US" sz="1200" dirty="0"/>
+                    </a:p>
+                  </a:txBody>
+                  <a:tcPr marL="91440" marR="54864" marT="27432" marB="27432" anchor="ctr">
+                    <a:lnL w="9525" cap="flat" cmpd="sng" algn="ctr">
+                      <a:solidFill>
+                        <a:srgbClr val="D6E2F5"/>
+                      </a:solidFill>
+                      <a:prstDash val="solid"/>
+                      <a:round/>
+                      <a:headEnd type="none" w="med" len="med"/>
+                      <a:tailEnd type="none" w="med" len="med"/>
+                    </a:lnL>
+                    <a:lnR w="9525" cap="flat" cmpd="sng" algn="ctr">
+                      <a:solidFill>
+                        <a:srgbClr val="D6E2F5"/>
+                      </a:solidFill>
+                      <a:prstDash val="solid"/>
+                      <a:round/>
+                      <a:headEnd type="none" w="med" len="med"/>
+                      <a:tailEnd type="none" w="med" len="med"/>
+                    </a:lnR>
+                    <a:lnT w="9525" cap="flat" cmpd="sng" algn="ctr">
+                      <a:solidFill>
+                        <a:srgbClr val="D6E2F5"/>
+                      </a:solidFill>
+                      <a:prstDash val="solid"/>
+                      <a:round/>
+                      <a:headEnd type="none" w="med" len="med"/>
+                      <a:tailEnd type="none" w="med" len="med"/>
+                    </a:lnT>
+                    <a:lnB w="9525" cap="flat" cmpd="sng" algn="ctr">
+                      <a:solidFill>
+                        <a:srgbClr val="D6E2F5"/>
+                      </a:solidFill>
+                      <a:prstDash val="solid"/>
+                      <a:round/>
+                      <a:headEnd type="none" w="med" len="med"/>
+                      <a:tailEnd type="none" w="med" len="med"/>
+                    </a:lnB>
+                  </a:tcPr>
+                </a:tc>
+              </a:tr>
+              <a:tr h="685800">
+                <a:tc>
+                  <a:txBody>
+                    <a:bodyPr/>
+                    <a:lstStyle/>
+                    <a:p>
+                      <a:pPr indent="0" marL="0">
+                        <a:buNone/>
+                      </a:pPr>
+                      <a:r>
+                        <a:rPr lang="en-US" sz="1200" b="1" dirty="0">
+                          <a:solidFill>
+                            <a:schemeClr val="tx2"/>
+                          </a:solidFill>
+                        </a:rPr>
+                        <a:t>VDS 설치 위치 ·</a:t>
+                      </a:r>
+                      <a:endParaRPr lang="en-US" sz="1200" dirty="0"/>
+                    </a:p>
+                    <a:p>
+                      <a:pPr indent="0" marL="0">
+                        <a:buNone/>
+                      </a:pPr>
+                      <a:r>
+                        <a:rPr lang="en-US" sz="1200" b="1" dirty="0">
+                          <a:solidFill>
+                            <a:schemeClr val="tx2"/>
+                          </a:solidFill>
+                        </a:rPr>
+                        <a:t>00800 집계 차로</a:t>
+                      </a:r>
+                      <a:endParaRPr lang="en-US" sz="1200" dirty="0"/>
+                    </a:p>
+                  </a:txBody>
+                  <a:tcPr marL="91440" marR="54864" marT="27432" marB="27432" anchor="ctr">
+                    <a:lnL w="9525" cap="flat" cmpd="sng" algn="ctr">
+                      <a:solidFill>
+                        <a:srgbClr val="D6E2F5"/>
+                      </a:solidFill>
+                      <a:prstDash val="solid"/>
+                      <a:round/>
+                      <a:headEnd type="none" w="med" len="med"/>
+                      <a:tailEnd type="none" w="med" len="med"/>
+                    </a:lnL>
+                    <a:lnR w="9525" cap="flat" cmpd="sng" algn="ctr">
+                      <a:solidFill>
+                        <a:srgbClr val="D6E2F5"/>
+                      </a:solidFill>
+                      <a:prstDash val="solid"/>
+                      <a:round/>
+                      <a:headEnd type="none" w="med" len="med"/>
+                      <a:tailEnd type="none" w="med" len="med"/>
+                    </a:lnR>
+                    <a:lnT w="9525" cap="flat" cmpd="sng" algn="ctr">
+                      <a:solidFill>
+                        <a:srgbClr val="D6E2F5"/>
+                      </a:solidFill>
+                      <a:prstDash val="solid"/>
+                      <a:round/>
+                      <a:headEnd type="none" w="med" len="med"/>
+                      <a:tailEnd type="none" w="med" len="med"/>
+                    </a:lnT>
+                    <a:lnB w="9525" cap="flat" cmpd="sng" algn="ctr">
+                      <a:solidFill>
+                        <a:srgbClr val="D6E2F5"/>
+                      </a:solidFill>
+                      <a:prstDash val="solid"/>
+                      <a:round/>
+                      <a:headEnd type="none" w="med" len="med"/>
+                      <a:tailEnd type="none" w="med" len="med"/>
+                    </a:lnB>
+                  </a:tcPr>
+                </a:tc>
+                <a:tc>
+                  <a:txBody>
+                    <a:bodyPr/>
+                    <a:lstStyle/>
+                    <a:p>
+                      <a:pPr indent="0" marL="0">
+                        <a:buNone/>
+                      </a:pPr>
+                      <a:r>
+                        <a:rPr lang="en-US" sz="1200" dirty="0">
+                          <a:solidFill>
+                            <a:schemeClr val="tx1"/>
+                          </a:solidFill>
+                        </a:rPr>
+                        <a:t>제공기관(한국도로공사) 문의</a:t>
+                      </a:r>
+                      <a:endParaRPr lang="en-US" sz="1200" dirty="0"/>
+                    </a:p>
+                  </a:txBody>
+                  <a:tcPr marL="91440" marR="54864" marT="27432" marB="27432" anchor="ctr">
+                    <a:lnL w="9525" cap="flat" cmpd="sng" algn="ctr">
+                      <a:solidFill>
+                        <a:srgbClr val="D6E2F5"/>
+                      </a:solidFill>
+                      <a:prstDash val="solid"/>
+                      <a:round/>
+                      <a:headEnd type="none" w="med" len="med"/>
+                      <a:tailEnd type="none" w="med" len="med"/>
+                    </a:lnL>
+                    <a:lnR w="9525" cap="flat" cmpd="sng" algn="ctr">
+                      <a:solidFill>
+                        <a:srgbClr val="D6E2F5"/>
+                      </a:solidFill>
+                      <a:prstDash val="solid"/>
+                      <a:round/>
+                      <a:headEnd type="none" w="med" len="med"/>
+                      <a:tailEnd type="none" w="med" len="med"/>
+                    </a:lnR>
+                    <a:lnT w="9525" cap="flat" cmpd="sng" algn="ctr">
+                      <a:solidFill>
+                        <a:srgbClr val="D6E2F5"/>
+                      </a:solidFill>
+                      <a:prstDash val="solid"/>
+                      <a:round/>
+                      <a:headEnd type="none" w="med" len="med"/>
+                      <a:tailEnd type="none" w="med" len="med"/>
+                    </a:lnT>
+                    <a:lnB w="9525" cap="flat" cmpd="sng" algn="ctr">
+                      <a:solidFill>
+                        <a:srgbClr val="D6E2F5"/>
+                      </a:solidFill>
+                      <a:prstDash val="solid"/>
+                      <a:round/>
+                      <a:headEnd type="none" w="med" len="med"/>
+                      <a:tailEnd type="none" w="med" len="med"/>
+                    </a:lnB>
+                  </a:tcPr>
+                </a:tc>
+                <a:tc>
+                  <a:txBody>
+                    <a:bodyPr/>
+                    <a:lstStyle/>
+                    <a:p>
+                      <a:pPr algn="ctr" indent="0" marL="0">
+                        <a:buNone/>
+                      </a:pPr>
+                      <a:r>
+                        <a:rPr lang="en-US" sz="1200" b="1" dirty="0">
+                          <a:solidFill>
+                            <a:schemeClr val="accent4"/>
+                          </a:solidFill>
+                        </a:rPr>
+                        <a:t>[__.__]</a:t>
+                      </a:r>
+                      <a:endParaRPr lang="en-US" sz="1200" dirty="0"/>
+                    </a:p>
+                  </a:txBody>
+                  <a:tcPr marL="91440" marR="54864" marT="27432" marB="27432" anchor="ctr">
+                    <a:lnL w="9525" cap="flat" cmpd="sng" algn="ctr">
+                      <a:solidFill>
+                        <a:srgbClr val="D6E2F5"/>
+                      </a:solidFill>
+                      <a:prstDash val="solid"/>
+                      <a:round/>
+                      <a:headEnd type="none" w="med" len="med"/>
+                      <a:tailEnd type="none" w="med" len="med"/>
+                    </a:lnL>
+                    <a:lnR w="9525" cap="flat" cmpd="sng" algn="ctr">
+                      <a:solidFill>
+                        <a:srgbClr val="D6E2F5"/>
+                      </a:solidFill>
+                      <a:prstDash val="solid"/>
+                      <a:round/>
+                      <a:headEnd type="none" w="med" len="med"/>
+                      <a:tailEnd type="none" w="med" len="med"/>
+                    </a:lnR>
+                    <a:lnT w="9525" cap="flat" cmpd="sng" algn="ctr">
+                      <a:solidFill>
+                        <a:srgbClr val="D6E2F5"/>
+                      </a:solidFill>
+                      <a:prstDash val="solid"/>
+                      <a:round/>
+                      <a:headEnd type="none" w="med" len="med"/>
+                      <a:tailEnd type="none" w="med" len="med"/>
+                    </a:lnT>
+                    <a:lnB w="9525" cap="flat" cmpd="sng" algn="ctr">
+                      <a:solidFill>
+                        <a:srgbClr val="D6E2F5"/>
+                      </a:solidFill>
+                      <a:prstDash val="solid"/>
+                      <a:round/>
+                      <a:headEnd type="none" w="med" len="med"/>
+                      <a:tailEnd type="none" w="med" len="med"/>
+                    </a:lnB>
                   </a:tcPr>
                 </a:tc>
               </a:tr>
@@ -5793,330 +6749,13 @@
       </p:graphicFrame>
       <p:sp>
         <p:nvSpPr>
-          <p:cNvPr id="4" name="card-22"/>
-          <p:cNvSpPr/>
+          <p:cNvPr id="8" name="source-27"/>
+          <p:cNvSpPr txBox="1"/>
           <p:nvPr/>
         </p:nvSpPr>
         <p:spPr>
           <a:xfrm>
-            <a:off x="8503920" y="1234440"/>
-            <a:ext cx="3136392" cy="4114800"/>
-          </a:xfrm>
-          <a:prstGeom prst="roundRect">
-            <a:avLst>
-              <a:gd name="adj" fmla="val 2332"/>
-            </a:avLst>
-          </a:prstGeom>
-          <a:solidFill>
-            <a:schemeClr val="bg2"/>
-          </a:solidFill>
-          <a:ln w="12700">
-            <a:solidFill>
-              <a:schemeClr val="bg2"/>
-            </a:solidFill>
-            <a:prstDash val="solid"/>
-          </a:ln>
-        </p:spPr>
-      </p:sp>
-      <p:sp>
-        <p:nvSpPr>
-          <p:cNvPr id="5" name="head-23"/>
-          <p:cNvSpPr txBox="1"/>
-          <p:nvPr/>
-        </p:nvSpPr>
-        <p:spPr>
-          <a:xfrm>
-            <a:off x="8732520" y="1371600"/>
-            <a:ext cx="2679192" cy="365760"/>
-          </a:xfrm>
-          <a:prstGeom prst="rect">
-            <a:avLst/>
-          </a:prstGeom>
-          <a:noFill/>
-          <a:ln/>
-        </p:spPr>
-        <p:txBody>
-          <a:bodyPr wrap="square" lIns="0" tIns="0" rIns="0" bIns="0" rtlCol="0" anchor="ctr"/>
-          <a:lstStyle/>
-          <a:p>
-            <a:pPr indent="0" marL="0">
-              <a:buNone/>
-            </a:pPr>
-            <a:r>
-              <a:rPr lang="en-US" sz="1600" b="1" dirty="0">
-                <a:solidFill>
-                  <a:schemeClr val="tx2"/>
-                </a:solidFill>
-              </a:rPr>
-              <a:t>자료 활용·보완 계획</a:t>
-            </a:r>
-            <a:endParaRPr lang="en-US" sz="1600" dirty="0"/>
-          </a:p>
-        </p:txBody>
-      </p:sp>
-      <p:sp>
-        <p:nvSpPr>
-          <p:cNvPr id="6" name="Text 3"/>
-          <p:cNvSpPr txBox="1"/>
-          <p:nvPr/>
-        </p:nvSpPr>
-        <p:spPr>
-          <a:xfrm>
-            <a:off x="8732520" y="1828800"/>
-            <a:ext cx="2724912" cy="3383280"/>
-          </a:xfrm>
-          <a:prstGeom prst="rect">
-            <a:avLst/>
-          </a:prstGeom>
-          <a:noFill/>
-          <a:ln/>
-        </p:spPr>
-        <p:txBody>
-          <a:bodyPr wrap="square" lIns="0" tIns="0" rIns="0" bIns="0" rtlCol="0" anchor="t"/>
-          <a:lstStyle/>
-          <a:p>
-            <a:pPr marL="177800" indent="-177800">
-              <a:spcAft>
-                <a:spcPts val="1000"/>
-              </a:spcAft>
-              <a:buSzPct val="100000"/>
-              <a:buChar char="•"/>
-            </a:pPr>
-            <a:r>
-              <a:rPr lang="en-US" sz="1400" dirty="0">
-                <a:solidFill>
-                  <a:schemeClr val="tx1"/>
-                </a:solidFill>
-              </a:rPr>
-              <a:t>인접 VDS 교통량은 합산하지 않고, 대표 지점 분석과 비교 검토에 활용</a:t>
-            </a:r>
-            <a:endParaRPr lang="en-US" sz="1400" dirty="0"/>
-          </a:p>
-          <a:p>
-            <a:pPr marL="177800" indent="-177800">
-              <a:spcAft>
-                <a:spcPts val="1000"/>
-              </a:spcAft>
-              <a:buSzPct val="100000"/>
-              <a:buChar char="•"/>
-            </a:pPr>
-            <a:r>
-              <a:rPr lang="en-US" sz="1400" dirty="0">
-                <a:solidFill>
-                  <a:schemeClr val="tx1"/>
-                </a:solidFill>
-              </a:rPr>
-              <a:t>중차량 구성비: 대상 구간 직접 AVC 자료 미확보</a:t>
-            </a:r>
-            <a:endParaRPr lang="en-US" sz="1400" dirty="0"/>
-          </a:p>
-          <a:p>
-            <a:pPr marL="177800" indent="-177800">
-              <a:spcAft>
-                <a:spcPts val="1000"/>
-              </a:spcAft>
-              <a:buSzPct val="100000"/>
-              <a:buChar char="•"/>
-            </a:pPr>
-            <a:r>
-              <a:rPr lang="en-US" sz="1400" dirty="0">
-                <a:solidFill>
-                  <a:schemeClr val="tx1"/>
-                </a:solidFill>
-              </a:rPr>
-              <a:t>도로 조건: 도로대장·설계자료로 보완</a:t>
-            </a:r>
-            <a:endParaRPr lang="en-US" sz="1400" dirty="0"/>
-          </a:p>
-          <a:p>
-            <a:pPr marL="177800" indent="-177800">
-              <a:spcAft>
-                <a:spcPts val="1000"/>
-              </a:spcAft>
-              <a:buSzPct val="100000"/>
-              <a:buChar char="•"/>
-            </a:pPr>
-            <a:r>
-              <a:rPr lang="en-US" sz="1400" dirty="0">
-                <a:solidFill>
-                  <a:schemeClr val="tx1"/>
-                </a:solidFill>
-              </a:rPr>
-              <a:t>설치정보: 제공기관 문의로 보완</a:t>
-            </a:r>
-            <a:endParaRPr lang="en-US" sz="1400" dirty="0"/>
-          </a:p>
-        </p:txBody>
-      </p:sp>
-      <p:sp>
-        <p:nvSpPr>
-          <p:cNvPr id="7" name="chip-24"/>
-          <p:cNvSpPr txBox="1"/>
-          <p:nvPr/>
-        </p:nvSpPr>
-        <p:spPr>
-          <a:xfrm>
-            <a:off x="548640" y="5468112"/>
-            <a:ext cx="914400" cy="274320"/>
-          </a:xfrm>
-          <a:prstGeom prst="roundRect">
-            <a:avLst>
-              <a:gd name="adj" fmla="val 50000"/>
-            </a:avLst>
-          </a:prstGeom>
-          <a:solidFill>
-            <a:schemeClr val="accent1"/>
-          </a:solidFill>
-          <a:ln w="12700">
-            <a:solidFill>
-              <a:schemeClr val="accent1"/>
-            </a:solidFill>
-          </a:ln>
-        </p:spPr>
-        <p:txBody>
-          <a:bodyPr wrap="square" lIns="0" tIns="0" rIns="0" bIns="0" rtlCol="0" anchor="ctr"/>
-          <a:lstStyle/>
-          <a:p>
-            <a:pPr algn="ctr" indent="0" marL="0">
-              <a:buNone/>
-            </a:pPr>
-            <a:r>
-              <a:rPr lang="en-US" sz="1100" b="1" dirty="0">
-                <a:solidFill>
-                  <a:schemeClr val="bg1"/>
-                </a:solidFill>
-              </a:rPr>
-              <a:t>확보·확인</a:t>
-            </a:r>
-            <a:endParaRPr lang="en-US" sz="1100" dirty="0"/>
-          </a:p>
-        </p:txBody>
-      </p:sp>
-      <p:sp>
-        <p:nvSpPr>
-          <p:cNvPr id="8" name="Text 5"/>
-          <p:cNvSpPr txBox="1"/>
-          <p:nvPr/>
-        </p:nvSpPr>
-        <p:spPr>
-          <a:xfrm>
-            <a:off x="1600200" y="5468112"/>
-            <a:ext cx="2194560" cy="274320"/>
-          </a:xfrm>
-          <a:prstGeom prst="rect">
-            <a:avLst/>
-          </a:prstGeom>
-          <a:noFill/>
-          <a:ln/>
-        </p:spPr>
-        <p:txBody>
-          <a:bodyPr wrap="square" lIns="0" tIns="0" rIns="0" bIns="0" rtlCol="0" anchor="ctr"/>
-          <a:lstStyle/>
-          <a:p>
-            <a:pPr indent="0" marL="0">
-              <a:buNone/>
-            </a:pPr>
-            <a:r>
-              <a:rPr lang="en-US" sz="1100" dirty="0">
-                <a:solidFill>
-                  <a:schemeClr val="accent5"/>
-                </a:solidFill>
-              </a:rPr>
-              <a:t>자료 확보 또는 검토 완료</a:t>
-            </a:r>
-            <a:endParaRPr lang="en-US" sz="1100" dirty="0"/>
-          </a:p>
-        </p:txBody>
-      </p:sp>
-      <p:sp>
-        <p:nvSpPr>
-          <p:cNvPr id="9" name="chip-25"/>
-          <p:cNvSpPr txBox="1"/>
-          <p:nvPr/>
-        </p:nvSpPr>
-        <p:spPr>
-          <a:xfrm>
-            <a:off x="3886200" y="5468112"/>
-            <a:ext cx="914400" cy="274320"/>
-          </a:xfrm>
-          <a:prstGeom prst="roundRect">
-            <a:avLst>
-              <a:gd name="adj" fmla="val 50000"/>
-            </a:avLst>
-          </a:prstGeom>
-          <a:solidFill>
-            <a:schemeClr val="bg1"/>
-          </a:solidFill>
-          <a:ln w="15875">
-            <a:solidFill>
-              <a:schemeClr val="accent4"/>
-            </a:solidFill>
-          </a:ln>
-        </p:spPr>
-        <p:txBody>
-          <a:bodyPr wrap="square" lIns="0" tIns="0" rIns="0" bIns="0" rtlCol="0" anchor="ctr"/>
-          <a:lstStyle/>
-          <a:p>
-            <a:pPr algn="ctr" indent="0" marL="0">
-              <a:buNone/>
-            </a:pPr>
-            <a:r>
-              <a:rPr lang="en-US" sz="1100" b="1" dirty="0">
-                <a:solidFill>
-                  <a:schemeClr val="accent4"/>
-                </a:solidFill>
-              </a:rPr>
-              <a:t>추가 확인</a:t>
-            </a:r>
-            <a:endParaRPr lang="en-US" sz="1100" dirty="0"/>
-          </a:p>
-        </p:txBody>
-      </p:sp>
-      <p:sp>
-        <p:nvSpPr>
-          <p:cNvPr id="10" name="Text 7"/>
-          <p:cNvSpPr txBox="1"/>
-          <p:nvPr/>
-        </p:nvSpPr>
-        <p:spPr>
-          <a:xfrm>
-            <a:off x="4937760" y="5468112"/>
-            <a:ext cx="2377440" cy="274320"/>
-          </a:xfrm>
-          <a:prstGeom prst="rect">
-            <a:avLst/>
-          </a:prstGeom>
-          <a:noFill/>
-          <a:ln/>
-        </p:spPr>
-        <p:txBody>
-          <a:bodyPr wrap="square" lIns="0" tIns="0" rIns="0" bIns="0" rtlCol="0" anchor="ctr"/>
-          <a:lstStyle/>
-          <a:p>
-            <a:pPr indent="0" marL="0">
-              <a:buNone/>
-            </a:pPr>
-            <a:r>
-              <a:rPr lang="en-US" sz="1100" dirty="0">
-                <a:solidFill>
-                  <a:schemeClr val="accent5"/>
-                </a:solidFill>
-              </a:rPr>
-              <a:t>미확보·미확인, 추후 보완</a:t>
-            </a:r>
-            <a:endParaRPr lang="en-US" sz="1100" dirty="0"/>
-          </a:p>
-        </p:txBody>
-      </p:sp>
-      <p:sp>
-        <p:nvSpPr>
-          <p:cNvPr id="11" name="source-26"/>
-          <p:cNvSpPr txBox="1"/>
-          <p:nvPr/>
-        </p:nvSpPr>
-        <p:spPr>
-          <a:xfrm>
-            <a:off x="548640" y="6053328"/>
+            <a:off x="548640" y="5623560"/>
             <a:ext cx="11064240" cy="256032"/>
           </a:xfrm>
           <a:prstGeom prst="rect">
@@ -6285,8 +6924,8 @@
         </p:nvSpPr>
         <p:spPr>
           <a:xfrm>
-            <a:off x="2034540" y="1737360"/>
-            <a:ext cx="685800" cy="3200400"/>
+            <a:off x="1965960" y="1691640"/>
+            <a:ext cx="822960" cy="3291840"/>
           </a:xfrm>
           <a:prstGeom prst="rect">
             <a:avLst/>
@@ -6310,8 +6949,8 @@
         </p:nvSpPr>
         <p:spPr>
           <a:xfrm>
-            <a:off x="685800" y="2994660"/>
-            <a:ext cx="3383280" cy="685800"/>
+            <a:off x="685800" y="2926080"/>
+            <a:ext cx="3383280" cy="822960"/>
           </a:xfrm>
           <a:prstGeom prst="rect">
             <a:avLst/>
@@ -6329,14 +6968,110 @@
       </p:sp>
       <p:sp>
         <p:nvSpPr>
-          <p:cNvPr id="6" name="Text 4"/>
+          <p:cNvPr id="6" name="inbound-28"/>
+          <p:cNvSpPr/>
+          <p:nvPr/>
+        </p:nvSpPr>
+        <p:spPr>
+          <a:xfrm flipH="1">
+            <a:off x="2926080" y="3131820"/>
+            <a:ext cx="1005840" cy="0"/>
+          </a:xfrm>
+          <a:prstGeom prst="line">
+            <a:avLst/>
+          </a:prstGeom>
+          <a:noFill/>
+          <a:ln w="31750">
+            <a:solidFill>
+              <a:schemeClr val="tx2"/>
+            </a:solidFill>
+            <a:prstDash val="solid"/>
+            <a:tailEnd type="triangle"/>
+          </a:ln>
+        </p:spPr>
+      </p:sp>
+      <p:sp>
+        <p:nvSpPr>
+          <p:cNvPr id="7" name="inbound-29"/>
+          <p:cNvSpPr/>
+          <p:nvPr/>
+        </p:nvSpPr>
+        <p:spPr>
+          <a:xfrm>
+            <a:off x="822960" y="3543300"/>
+            <a:ext cx="1005840" cy="0"/>
+          </a:xfrm>
+          <a:prstGeom prst="line">
+            <a:avLst/>
+          </a:prstGeom>
+          <a:noFill/>
+          <a:ln w="31750">
+            <a:solidFill>
+              <a:schemeClr val="tx2"/>
+            </a:solidFill>
+            <a:prstDash val="solid"/>
+            <a:tailEnd type="triangle"/>
+          </a:ln>
+        </p:spPr>
+      </p:sp>
+      <p:sp>
+        <p:nvSpPr>
+          <p:cNvPr id="8" name="inbound-30"/>
+          <p:cNvSpPr/>
+          <p:nvPr/>
+        </p:nvSpPr>
+        <p:spPr>
+          <a:xfrm>
+            <a:off x="2171700" y="1783080"/>
+            <a:ext cx="0" cy="1005840"/>
+          </a:xfrm>
+          <a:prstGeom prst="line">
+            <a:avLst/>
+          </a:prstGeom>
+          <a:noFill/>
+          <a:ln w="31750">
+            <a:solidFill>
+              <a:schemeClr val="tx2"/>
+            </a:solidFill>
+            <a:prstDash val="solid"/>
+            <a:tailEnd type="triangle"/>
+          </a:ln>
+        </p:spPr>
+      </p:sp>
+      <p:sp>
+        <p:nvSpPr>
+          <p:cNvPr id="9" name="inbound-31"/>
+          <p:cNvSpPr/>
+          <p:nvPr/>
+        </p:nvSpPr>
+        <p:spPr>
+          <a:xfrm flipV="1">
+            <a:off x="2583180" y="3886200"/>
+            <a:ext cx="0" cy="1005840"/>
+          </a:xfrm>
+          <a:prstGeom prst="line">
+            <a:avLst/>
+          </a:prstGeom>
+          <a:noFill/>
+          <a:ln w="31750">
+            <a:solidFill>
+              <a:schemeClr val="tx2"/>
+            </a:solidFill>
+            <a:prstDash val="solid"/>
+            <a:tailEnd type="triangle"/>
+          </a:ln>
+        </p:spPr>
+      </p:sp>
+      <p:sp>
+        <p:nvSpPr>
+          <p:cNvPr id="10" name="Text 8"/>
           <p:cNvSpPr txBox="1"/>
           <p:nvPr/>
         </p:nvSpPr>
         <p:spPr>
           <a:xfrm>
-            <a:off x="640080" y="1307592"/>
-            <a:ext cx="3474720" cy="411480"/>
+            <a:off x="640080" y="1289304"/>
+            <a:ext cx="3474720" cy="384048"/>
           </a:xfrm>
           <a:prstGeom prst="rect">
             <a:avLst/>
@@ -6357,7 +7092,7 @@
                   <a:schemeClr val="tx2"/>
                 </a:solidFill>
               </a:rPr>
-              <a:t>북 · 동일로 (공릉역 쪽)</a:t>
+              <a:t>북측 · 동일로 (공릉역 쪽)</a:t>
             </a:r>
             <a:endParaRPr lang="en-US" sz="1100" dirty="0"/>
           </a:p>
@@ -6365,14 +7100,14 @@
       </p:sp>
       <p:sp>
         <p:nvSpPr>
-          <p:cNvPr id="7" name="Text 5"/>
+          <p:cNvPr id="11" name="Text 9"/>
           <p:cNvSpPr txBox="1"/>
           <p:nvPr/>
         </p:nvSpPr>
         <p:spPr>
           <a:xfrm>
-            <a:off x="640080" y="4956048"/>
-            <a:ext cx="3474720" cy="411480"/>
+            <a:off x="640080" y="5001768"/>
+            <a:ext cx="3474720" cy="384048"/>
           </a:xfrm>
           <a:prstGeom prst="rect">
             <a:avLst/>
@@ -6393,7 +7128,7 @@
                   <a:schemeClr val="tx2"/>
                 </a:solidFill>
               </a:rPr>
-              <a:t>남 · 동일로 (먹골역 쪽)</a:t>
+              <a:t>남측 · 동일로 (먹골역 쪽)</a:t>
             </a:r>
             <a:endParaRPr lang="en-US" sz="1100" dirty="0"/>
           </a:p>
@@ -6401,14 +7136,14 @@
       </p:sp>
       <p:sp>
         <p:nvSpPr>
-          <p:cNvPr id="8" name="Text 6"/>
+          <p:cNvPr id="12" name="Text 10"/>
           <p:cNvSpPr txBox="1"/>
           <p:nvPr/>
         </p:nvSpPr>
         <p:spPr>
           <a:xfrm>
-            <a:off x="685800" y="2491740"/>
-            <a:ext cx="1280160" cy="411480"/>
+            <a:off x="685800" y="3840480"/>
+            <a:ext cx="1280160" cy="384048"/>
           </a:xfrm>
           <a:prstGeom prst="rect">
             <a:avLst/>
@@ -6429,7 +7164,7 @@
                   <a:schemeClr val="tx2"/>
                 </a:solidFill>
               </a:rPr>
-              <a:t>서 · 화랑로</a:t>
+              <a:t>서측 · 화랑로</a:t>
             </a:r>
             <a:endParaRPr lang="en-US" sz="1100" dirty="0"/>
           </a:p>
@@ -6451,14 +7186,14 @@
       </p:sp>
       <p:sp>
         <p:nvSpPr>
-          <p:cNvPr id="9" name="Text 7"/>
+          <p:cNvPr id="13" name="Text 11"/>
           <p:cNvSpPr txBox="1"/>
           <p:nvPr/>
         </p:nvSpPr>
         <p:spPr>
           <a:xfrm>
-            <a:off x="2788920" y="2491740"/>
-            <a:ext cx="1280160" cy="411480"/>
+            <a:off x="2788920" y="2468880"/>
+            <a:ext cx="1280160" cy="384048"/>
           </a:xfrm>
           <a:prstGeom prst="rect">
             <a:avLst/>
@@ -6479,7 +7214,7 @@
                   <a:schemeClr val="tx2"/>
                 </a:solidFill>
               </a:rPr>
-              <a:t>동 · 화랑로</a:t>
+              <a:t>동측 · 화랑로</a:t>
             </a:r>
             <a:endParaRPr lang="en-US" sz="1100" dirty="0"/>
           </a:p>
@@ -6487,14 +7222,14 @@
       </p:sp>
       <p:sp>
         <p:nvSpPr>
-          <p:cNvPr id="10" name="Text 8"/>
+          <p:cNvPr id="14" name="Text 12"/>
           <p:cNvSpPr txBox="1"/>
           <p:nvPr/>
         </p:nvSpPr>
         <p:spPr>
           <a:xfrm>
-            <a:off x="685800" y="3817620"/>
-            <a:ext cx="3383280" cy="320040"/>
+            <a:off x="4480560" y="1234440"/>
+            <a:ext cx="7159752" cy="365760"/>
           </a:xfrm>
           <a:prstGeom prst="rect">
             <a:avLst/>
@@ -6506,47 +7241,11 @@
           <a:bodyPr wrap="square" lIns="0" tIns="0" rIns="0" bIns="0" rtlCol="0" anchor="ctr"/>
           <a:lstStyle/>
           <a:p>
-            <a:pPr algn="ctr" indent="0" marL="0">
-              <a:buNone/>
-            </a:pPr>
-            <a:r>
-              <a:rPr lang="en-US" sz="1200" b="1" dirty="0">
-                <a:solidFill>
-                  <a:schemeClr val="accent1"/>
-                </a:solidFill>
-              </a:rPr>
-              <a:t>지도 / 접근로 도식 삽입 위치</a:t>
-            </a:r>
-            <a:endParaRPr lang="en-US" sz="1200" dirty="0"/>
-          </a:p>
-        </p:txBody>
-      </p:sp>
-      <p:sp>
-        <p:nvSpPr>
-          <p:cNvPr id="11" name="Text 9"/>
-          <p:cNvSpPr txBox="1"/>
-          <p:nvPr/>
-        </p:nvSpPr>
-        <p:spPr>
-          <a:xfrm>
-            <a:off x="4480560" y="1234440"/>
-            <a:ext cx="7159752" cy="320040"/>
-          </a:xfrm>
-          <a:prstGeom prst="rect">
-            <a:avLst/>
-          </a:prstGeom>
-          <a:noFill/>
-          <a:ln/>
-        </p:spPr>
-        <p:txBody>
-          <a:bodyPr wrap="square" lIns="0" tIns="0" rIns="0" bIns="0" rtlCol="0" anchor="ctr"/>
-          <a:lstStyle/>
-          <a:p>
             <a:pPr indent="0" marL="0">
               <a:buNone/>
             </a:pPr>
             <a:r>
-              <a:rPr lang="en-US" sz="1400" b="1" dirty="0">
+              <a:rPr lang="en-US" sz="1300" b="1" dirty="0">
                 <a:solidFill>
                   <a:schemeClr val="accent1"/>
                 </a:solidFill>
@@ -6557,182 +7256,36 @@
               <a:buNone/>
             </a:pPr>
             <a:r>
-              <a:rPr lang="en-US" sz="1400" dirty="0">
+              <a:rPr lang="en-US" sz="1300" dirty="0">
                 <a:solidFill>
                   <a:schemeClr val="tx1"/>
                 </a:solidFill>
               </a:rPr>
-              <a:t>화랑로와 동일로가 만나는 태릉입구역 사거리</a:t>
-            </a:r>
-            <a:endParaRPr lang="en-US" sz="1400" dirty="0"/>
-          </a:p>
-        </p:txBody>
-      </p:sp>
-      <p:sp>
-        <p:nvSpPr>
-          <p:cNvPr id="12" name="Text 10"/>
-          <p:cNvSpPr txBox="1"/>
-          <p:nvPr/>
-        </p:nvSpPr>
-        <p:spPr>
-          <a:xfrm>
-            <a:off x="4480560" y="1691640"/>
-            <a:ext cx="914400" cy="274320"/>
-          </a:xfrm>
-          <a:prstGeom prst="rect">
-            <a:avLst/>
-          </a:prstGeom>
-          <a:noFill/>
-          <a:ln/>
-        </p:spPr>
-        <p:txBody>
-          <a:bodyPr wrap="square" lIns="0" tIns="0" rIns="0" bIns="0" rtlCol="0" anchor="ctr"/>
-          <a:lstStyle/>
-          <a:p>
+              <a:t>화랑로 × 동일로 사거리      </a:t>
+            </a:r>
             <a:pPr indent="0" marL="0">
               <a:buNone/>
             </a:pPr>
             <a:r>
-              <a:rPr lang="en-US" sz="1400" b="1" dirty="0">
+              <a:rPr lang="en-US" sz="1300" b="1" dirty="0">
                 <a:solidFill>
                   <a:schemeClr val="accent1"/>
                 </a:solidFill>
               </a:rPr>
-              <a:t>선정 이유</a:t>
-            </a:r>
-            <a:endParaRPr lang="en-US" sz="1400" dirty="0"/>
-          </a:p>
-        </p:txBody>
-      </p:sp>
-      <p:sp>
-        <p:nvSpPr>
-          <p:cNvPr id="13" name="chip-27"/>
-          <p:cNvSpPr txBox="1"/>
-          <p:nvPr/>
-        </p:nvSpPr>
-        <p:spPr>
-          <a:xfrm>
-            <a:off x="5440680" y="1691640"/>
-            <a:ext cx="2194560" cy="274320"/>
-          </a:xfrm>
-          <a:prstGeom prst="roundRect">
-            <a:avLst>
-              <a:gd name="adj" fmla="val 50000"/>
-            </a:avLst>
-          </a:prstGeom>
-          <a:solidFill>
-            <a:schemeClr val="accent6"/>
-          </a:solidFill>
-          <a:ln w="12700">
-            <a:solidFill>
-              <a:schemeClr val="accent6"/>
-            </a:solidFill>
-          </a:ln>
-        </p:spPr>
-        <p:txBody>
-          <a:bodyPr wrap="square" lIns="0" tIns="0" rIns="0" bIns="0" rtlCol="0" anchor="ctr"/>
-          <a:lstStyle/>
-          <a:p>
-            <a:pPr algn="ctr" indent="0" marL="0">
+              <a:t>선정 이유  </a:t>
+            </a:r>
+            <a:pPr indent="0" marL="0">
               <a:buNone/>
             </a:pPr>
             <a:r>
-              <a:rPr lang="en-US" sz="1100" b="1" dirty="0">
-                <a:solidFill>
-                  <a:schemeClr val="tx2"/>
-                </a:solidFill>
-              </a:rPr>
-              <a:t>스마트교차로 자료 확보 가능</a:t>
-            </a:r>
-            <a:endParaRPr lang="en-US" sz="1100" dirty="0"/>
-          </a:p>
-        </p:txBody>
-      </p:sp>
-      <p:sp>
-        <p:nvSpPr>
-          <p:cNvPr id="14" name="chip-28"/>
-          <p:cNvSpPr txBox="1"/>
-          <p:nvPr/>
-        </p:nvSpPr>
-        <p:spPr>
-          <a:xfrm>
-            <a:off x="7744968" y="1691640"/>
-            <a:ext cx="1298448" cy="274320"/>
-          </a:xfrm>
-          <a:prstGeom prst="roundRect">
-            <a:avLst>
-              <a:gd name="adj" fmla="val 50000"/>
-            </a:avLst>
-          </a:prstGeom>
-          <a:solidFill>
-            <a:schemeClr val="accent6"/>
-          </a:solidFill>
-          <a:ln w="12700">
-            <a:solidFill>
-              <a:schemeClr val="accent6"/>
-            </a:solidFill>
-          </a:ln>
-        </p:spPr>
-        <p:txBody>
-          <a:bodyPr wrap="square" lIns="0" tIns="0" rIns="0" bIns="0" rtlCol="0" anchor="ctr"/>
-          <a:lstStyle/>
-          <a:p>
-            <a:pPr algn="ctr" indent="0" marL="0">
-              <a:buNone/>
-            </a:pPr>
-            <a:r>
-              <a:rPr lang="en-US" sz="1100" b="1" dirty="0">
-                <a:solidFill>
-                  <a:schemeClr val="tx2"/>
-                </a:solidFill>
-              </a:rPr>
-              <a:t>현장 접근 가능</a:t>
-            </a:r>
-            <a:endParaRPr lang="en-US" sz="1100" dirty="0"/>
-          </a:p>
-        </p:txBody>
-      </p:sp>
-      <p:sp>
-        <p:nvSpPr>
-          <p:cNvPr id="15" name="chip-29"/>
-          <p:cNvSpPr txBox="1"/>
-          <p:nvPr/>
-        </p:nvSpPr>
-        <p:spPr>
-          <a:xfrm>
-            <a:off x="9153144" y="1691640"/>
-            <a:ext cx="2066544" cy="274320"/>
-          </a:xfrm>
-          <a:prstGeom prst="roundRect">
-            <a:avLst>
-              <a:gd name="adj" fmla="val 50000"/>
-            </a:avLst>
-          </a:prstGeom>
-          <a:solidFill>
-            <a:schemeClr val="accent6"/>
-          </a:solidFill>
-          <a:ln w="12700">
-            <a:solidFill>
-              <a:schemeClr val="accent6"/>
-            </a:solidFill>
-          </a:ln>
-        </p:spPr>
-        <p:txBody>
-          <a:bodyPr wrap="square" lIns="0" tIns="0" rIns="0" bIns="0" rtlCol="0" anchor="ctr"/>
-          <a:lstStyle/>
-          <a:p>
-            <a:pPr algn="ctr" indent="0" marL="0">
-              <a:buNone/>
-            </a:pPr>
-            <a:r>
-              <a:rPr lang="en-US" sz="1100" b="1" dirty="0">
-                <a:solidFill>
-                  <a:schemeClr val="tx2"/>
-                </a:solidFill>
-              </a:rPr>
-              <a:t>회전별·접근로별 분석 가능</a:t>
-            </a:r>
-            <a:endParaRPr lang="en-US" sz="1100" dirty="0"/>
+              <a:rPr lang="en-US" sz="1300" dirty="0">
+                <a:solidFill>
+                  <a:schemeClr val="tx1"/>
+                </a:solidFill>
+              </a:rPr>
+              <a:t>T-DATA 자료 · 현장 접근 · 회전별 분석 가능</a:t>
+            </a:r>
+            <a:endParaRPr lang="en-US" sz="1300" dirty="0"/>
           </a:p>
         </p:txBody>
       </p:sp>
@@ -6751,7 +7304,7 @@
           </p:nvPr>
         </p:nvGraphicFramePr>
         <p:xfrm>
-          <a:off x="4480560" y="2194560"/>
+          <a:off x="4480560" y="1783080"/>
           <a:ext cx="7159752" cy="914400"/>
         </p:xfrm>
         <a:graphic>
@@ -6759,13 +7312,13 @@
             <a:tbl>
               <a:tblPr/>
               <a:tblGrid>
-                <a:gridCol w="1490472"/>
-                <a:gridCol w="731520"/>
-                <a:gridCol w="987552"/>
-                <a:gridCol w="987552"/>
-                <a:gridCol w="987552"/>
-                <a:gridCol w="987552"/>
-                <a:gridCol w="987552"/>
+                <a:gridCol w="1627632"/>
+                <a:gridCol w="548640"/>
+                <a:gridCol w="996696"/>
+                <a:gridCol w="996696"/>
+                <a:gridCol w="996696"/>
+                <a:gridCol w="996696"/>
+                <a:gridCol w="996696"/>
               </a:tblGrid>
               <a:tr h="411480">
                 <a:tc>
@@ -6777,14 +7330,14 @@
                         <a:buNone/>
                       </a:pPr>
                       <a:r>
-                        <a:rPr lang="en-US" sz="1200" b="1" dirty="0">
+                        <a:rPr lang="en-US" sz="1300" b="1" dirty="0">
                           <a:solidFill>
                             <a:schemeClr val="bg1"/>
                           </a:solidFill>
                         </a:rPr>
-                        <a:t>진입 접근로</a:t>
+                        <a:t>접근로 (진입방향)</a:t>
                       </a:r>
-                      <a:endParaRPr lang="en-US" sz="1200" dirty="0"/>
+                      <a:endParaRPr lang="en-US" sz="1300" dirty="0"/>
                     </a:p>
                   </a:txBody>
                   <a:tcPr marL="73152" marR="36576" marT="27432" marB="27432" anchor="ctr">
@@ -6838,14 +7391,14 @@
                         <a:buNone/>
                       </a:pPr>
                       <a:r>
-                        <a:rPr lang="en-US" sz="1200" b="1" dirty="0">
+                        <a:rPr lang="en-US" sz="1300" b="1" dirty="0">
                           <a:solidFill>
                             <a:schemeClr val="bg1"/>
                           </a:solidFill>
                         </a:rPr>
-                        <a:t>차로 수</a:t>
+                        <a:t>차로</a:t>
                       </a:r>
-                      <a:endParaRPr lang="en-US" sz="1200" dirty="0"/>
+                      <a:endParaRPr lang="en-US" sz="1300" dirty="0"/>
                     </a:p>
                   </a:txBody>
                   <a:tcPr marL="73152" marR="36576" marT="27432" marB="27432" anchor="ctr">
@@ -6899,14 +7452,14 @@
                         <a:buNone/>
                       </a:pPr>
                       <a:r>
-                        <a:rPr lang="en-US" sz="1200" b="1" dirty="0">
+                        <a:rPr lang="en-US" sz="1300" b="1" dirty="0">
                           <a:solidFill>
                             <a:schemeClr val="bg1"/>
                           </a:solidFill>
                         </a:rPr>
                         <a:t>1 (중앙선)</a:t>
                       </a:r>
-                      <a:endParaRPr lang="en-US" sz="1200" dirty="0"/>
+                      <a:endParaRPr lang="en-US" sz="1300" dirty="0"/>
                     </a:p>
                   </a:txBody>
                   <a:tcPr marL="73152" marR="36576" marT="27432" marB="27432" anchor="ctr">
@@ -6960,14 +7513,14 @@
                         <a:buNone/>
                       </a:pPr>
                       <a:r>
-                        <a:rPr lang="en-US" sz="1200" b="1" dirty="0">
+                        <a:rPr lang="en-US" sz="1300" b="1" dirty="0">
                           <a:solidFill>
                             <a:schemeClr val="bg1"/>
                           </a:solidFill>
                         </a:rPr>
                         <a:t>2</a:t>
                       </a:r>
-                      <a:endParaRPr lang="en-US" sz="1200" dirty="0"/>
+                      <a:endParaRPr lang="en-US" sz="1300" dirty="0"/>
                     </a:p>
                   </a:txBody>
                   <a:tcPr marL="73152" marR="36576" marT="27432" marB="27432" anchor="ctr">
@@ -7021,14 +7574,14 @@
                         <a:buNone/>
                       </a:pPr>
                       <a:r>
-                        <a:rPr lang="en-US" sz="1200" b="1" dirty="0">
+                        <a:rPr lang="en-US" sz="1300" b="1" dirty="0">
                           <a:solidFill>
                             <a:schemeClr val="bg1"/>
                           </a:solidFill>
                         </a:rPr>
                         <a:t>3</a:t>
                       </a:r>
-                      <a:endParaRPr lang="en-US" sz="1200" dirty="0"/>
+                      <a:endParaRPr lang="en-US" sz="1300" dirty="0"/>
                     </a:p>
                   </a:txBody>
                   <a:tcPr marL="73152" marR="36576" marT="27432" marB="27432" anchor="ctr">
@@ -7082,14 +7635,14 @@
                         <a:buNone/>
                       </a:pPr>
                       <a:r>
-                        <a:rPr lang="en-US" sz="1200" b="1" dirty="0">
+                        <a:rPr lang="en-US" sz="1300" b="1" dirty="0">
                           <a:solidFill>
                             <a:schemeClr val="bg1"/>
                           </a:solidFill>
                         </a:rPr>
                         <a:t>4</a:t>
                       </a:r>
-                      <a:endParaRPr lang="en-US" sz="1200" dirty="0"/>
+                      <a:endParaRPr lang="en-US" sz="1300" dirty="0"/>
                     </a:p>
                   </a:txBody>
                   <a:tcPr marL="73152" marR="36576" marT="27432" marB="27432" anchor="ctr">
@@ -7143,14 +7696,14 @@
                         <a:buNone/>
                       </a:pPr>
                       <a:r>
-                        <a:rPr lang="en-US" sz="1200" b="1" dirty="0">
+                        <a:rPr lang="en-US" sz="1300" b="1" dirty="0">
                           <a:solidFill>
                             <a:schemeClr val="bg1"/>
                           </a:solidFill>
                         </a:rPr>
                         <a:t>5</a:t>
                       </a:r>
-                      <a:endParaRPr lang="en-US" sz="1200" dirty="0"/>
+                      <a:endParaRPr lang="en-US" sz="1300" dirty="0"/>
                     </a:p>
                   </a:txBody>
                   <a:tcPr marL="73152" marR="36576" marT="27432" marB="27432" anchor="ctr">
@@ -7196,7 +7749,7 @@
                   </a:tcPr>
                 </a:tc>
               </a:tr>
-              <a:tr h="658368">
+              <a:tr h="713232">
                 <a:tc>
                   <a:txBody>
                     <a:bodyPr/>
@@ -7206,14 +7759,28 @@
                         <a:buNone/>
                       </a:pPr>
                       <a:r>
-                        <a:rPr lang="en-US" sz="1200" b="1" dirty="0">
+                        <a:rPr lang="en-US" sz="1300" b="1" dirty="0">
                           <a:solidFill>
                             <a:schemeClr val="tx2"/>
                           </a:solidFill>
                         </a:rPr>
-                        <a:t>화랑로 동쪽</a:t>
+                        <a:t>동측 · 화랑로</a:t>
                       </a:r>
-                      <a:endParaRPr lang="en-US" sz="1200" dirty="0"/>
+                      <a:endParaRPr lang="en-US" sz="1300" dirty="0"/>
+                    </a:p>
+                    <a:p>
+                      <a:pPr indent="0" marL="0">
+                        <a:buNone/>
+                      </a:pPr>
+                      <a:r>
+                        <a:rPr lang="en-US" sz="1100" dirty="0">
+                          <a:solidFill>
+                            <a:schemeClr val="accent5"/>
+                          </a:solidFill>
+                        </a:rPr>
+                        <a:t>동쪽에서 진입</a:t>
+                      </a:r>
+                      <a:endParaRPr lang="en-US" sz="1300" dirty="0"/>
                     </a:p>
                   </a:txBody>
                   <a:tcPr marL="73152" marR="36576" marT="27432" marB="27432" anchor="ctr">
@@ -7264,14 +7831,14 @@
                         <a:buNone/>
                       </a:pPr>
                       <a:r>
-                        <a:rPr lang="en-US" sz="1200" b="1" dirty="0">
+                        <a:rPr lang="en-US" sz="1300" b="1" dirty="0">
                           <a:solidFill>
                             <a:schemeClr val="tx2"/>
                           </a:solidFill>
                         </a:rPr>
                         <a:t>5</a:t>
                       </a:r>
-                      <a:endParaRPr lang="en-US" sz="1200" dirty="0"/>
+                      <a:endParaRPr lang="en-US" sz="1300" dirty="0"/>
                     </a:p>
                   </a:txBody>
                   <a:tcPr marL="73152" marR="36576" marT="27432" marB="27432" anchor="ctr">
@@ -7322,14 +7889,14 @@
                         <a:buNone/>
                       </a:pPr>
                       <a:r>
-                        <a:rPr lang="en-US" sz="1200" dirty="0">
+                        <a:rPr lang="en-US" sz="1300" dirty="0">
                           <a:solidFill>
                             <a:schemeClr val="tx1"/>
                           </a:solidFill>
                         </a:rPr>
                         <a:t>좌회전·유턴</a:t>
                       </a:r>
-                      <a:endParaRPr lang="en-US" sz="1200" dirty="0"/>
+                      <a:endParaRPr lang="en-US" sz="1300" dirty="0"/>
                     </a:p>
                   </a:txBody>
                   <a:tcPr marL="73152" marR="36576" marT="27432" marB="27432" anchor="ctr">
@@ -7383,14 +7950,14 @@
                         <a:buNone/>
                       </a:pPr>
                       <a:r>
-                        <a:rPr lang="en-US" sz="1200" dirty="0">
+                        <a:rPr lang="en-US" sz="1300" dirty="0">
                           <a:solidFill>
                             <a:schemeClr val="tx1"/>
                           </a:solidFill>
                         </a:rPr>
                         <a:t>좌회전</a:t>
                       </a:r>
-                      <a:endParaRPr lang="en-US" sz="1200" dirty="0"/>
+                      <a:endParaRPr lang="en-US" sz="1300" dirty="0"/>
                     </a:p>
                   </a:txBody>
                   <a:tcPr marL="73152" marR="36576" marT="27432" marB="27432" anchor="ctr">
@@ -7444,14 +8011,14 @@
                         <a:buNone/>
                       </a:pPr>
                       <a:r>
-                        <a:rPr lang="en-US" sz="1200" dirty="0">
+                        <a:rPr lang="en-US" sz="1300" dirty="0">
                           <a:solidFill>
                             <a:schemeClr val="tx1"/>
                           </a:solidFill>
                         </a:rPr>
                         <a:t>직진</a:t>
                       </a:r>
-                      <a:endParaRPr lang="en-US" sz="1200" dirty="0"/>
+                      <a:endParaRPr lang="en-US" sz="1300" dirty="0"/>
                     </a:p>
                   </a:txBody>
                   <a:tcPr marL="73152" marR="36576" marT="27432" marB="27432" anchor="ctr">
@@ -7505,14 +8072,14 @@
                         <a:buNone/>
                       </a:pPr>
                       <a:r>
-                        <a:rPr lang="en-US" sz="1200" dirty="0">
+                        <a:rPr lang="en-US" sz="1300" dirty="0">
                           <a:solidFill>
                             <a:schemeClr val="tx1"/>
                           </a:solidFill>
                         </a:rPr>
                         <a:t>직진</a:t>
                       </a:r>
-                      <a:endParaRPr lang="en-US" sz="1200" dirty="0"/>
+                      <a:endParaRPr lang="en-US" sz="1300" dirty="0"/>
                     </a:p>
                   </a:txBody>
                   <a:tcPr marL="73152" marR="36576" marT="27432" marB="27432" anchor="ctr">
@@ -7566,14 +8133,14 @@
                         <a:buNone/>
                       </a:pPr>
                       <a:r>
-                        <a:rPr lang="en-US" sz="1200" dirty="0">
+                        <a:rPr lang="en-US" sz="1300" dirty="0">
                           <a:solidFill>
                             <a:schemeClr val="tx1"/>
                           </a:solidFill>
                         </a:rPr>
                         <a:t>직진·우회전</a:t>
                       </a:r>
-                      <a:endParaRPr lang="en-US" sz="1200" dirty="0"/>
+                      <a:endParaRPr lang="en-US" sz="1300" dirty="0"/>
                     </a:p>
                   </a:txBody>
                   <a:tcPr marL="73152" marR="36576" marT="27432" marB="27432" anchor="ctr">
@@ -7619,7 +8186,7 @@
                   </a:tcPr>
                 </a:tc>
               </a:tr>
-              <a:tr h="658368">
+              <a:tr h="713232">
                 <a:tc>
                   <a:txBody>
                     <a:bodyPr/>
@@ -7629,28 +8196,28 @@
                         <a:buNone/>
                       </a:pPr>
                       <a:r>
-                        <a:rPr lang="en-US" sz="1200" b="1" dirty="0">
+                        <a:rPr lang="en-US" sz="1300" b="1" dirty="0">
                           <a:solidFill>
                             <a:schemeClr val="tx2"/>
                           </a:solidFill>
                         </a:rPr>
-                        <a:t>화랑로 서쪽</a:t>
+                        <a:t>서측 · 화랑로</a:t>
                       </a:r>
-                      <a:endParaRPr lang="en-US" sz="1200" dirty="0"/>
+                      <a:endParaRPr lang="en-US" sz="1300" dirty="0"/>
                     </a:p>
                     <a:p>
                       <a:pPr indent="0" marL="0">
                         <a:buNone/>
                       </a:pPr>
                       <a:r>
-                        <a:rPr lang="en-US" sz="1200" b="1" dirty="0">
+                        <a:rPr lang="en-US" sz="1100" dirty="0">
                           <a:solidFill>
-                            <a:schemeClr val="tx2"/>
+                            <a:schemeClr val="accent5"/>
                           </a:solidFill>
                         </a:rPr>
-                        <a:t>(석계역 쪽)</a:t>
+                        <a:t>서쪽에서 진입</a:t>
                       </a:r>
-                      <a:endParaRPr lang="en-US" sz="1200" dirty="0"/>
+                      <a:endParaRPr lang="en-US" sz="1300" dirty="0"/>
                     </a:p>
                   </a:txBody>
                   <a:tcPr marL="73152" marR="36576" marT="27432" marB="27432" anchor="ctr">
@@ -7701,14 +8268,14 @@
                         <a:buNone/>
                       </a:pPr>
                       <a:r>
-                        <a:rPr lang="en-US" sz="1200" b="1" dirty="0">
+                        <a:rPr lang="en-US" sz="1300" b="1" dirty="0">
                           <a:solidFill>
                             <a:schemeClr val="tx2"/>
                           </a:solidFill>
                         </a:rPr>
                         <a:t>5</a:t>
                       </a:r>
-                      <a:endParaRPr lang="en-US" sz="1200" dirty="0"/>
+                      <a:endParaRPr lang="en-US" sz="1300" dirty="0"/>
                     </a:p>
                   </a:txBody>
                   <a:tcPr marL="73152" marR="36576" marT="27432" marB="27432" anchor="ctr">
@@ -7759,14 +8326,14 @@
                         <a:buNone/>
                       </a:pPr>
                       <a:r>
-                        <a:rPr lang="en-US" sz="1200" dirty="0">
+                        <a:rPr lang="en-US" sz="1300" dirty="0">
                           <a:solidFill>
                             <a:schemeClr val="tx1"/>
                           </a:solidFill>
                         </a:rPr>
                         <a:t>좌회전·유턴</a:t>
                       </a:r>
-                      <a:endParaRPr lang="en-US" sz="1200" dirty="0"/>
+                      <a:endParaRPr lang="en-US" sz="1300" dirty="0"/>
                     </a:p>
                   </a:txBody>
                   <a:tcPr marL="73152" marR="36576" marT="27432" marB="27432" anchor="ctr">
@@ -7820,14 +8387,14 @@
                         <a:buNone/>
                       </a:pPr>
                       <a:r>
-                        <a:rPr lang="en-US" sz="1200" dirty="0">
+                        <a:rPr lang="en-US" sz="1300" dirty="0">
                           <a:solidFill>
                             <a:schemeClr val="tx1"/>
                           </a:solidFill>
                         </a:rPr>
                         <a:t>직진</a:t>
                       </a:r>
-                      <a:endParaRPr lang="en-US" sz="1200" dirty="0"/>
+                      <a:endParaRPr lang="en-US" sz="1300" dirty="0"/>
                     </a:p>
                   </a:txBody>
                   <a:tcPr marL="73152" marR="36576" marT="27432" marB="27432" anchor="ctr">
@@ -7881,14 +8448,14 @@
                         <a:buNone/>
                       </a:pPr>
                       <a:r>
-                        <a:rPr lang="en-US" sz="1200" dirty="0">
+                        <a:rPr lang="en-US" sz="1300" dirty="0">
                           <a:solidFill>
                             <a:schemeClr val="tx1"/>
                           </a:solidFill>
                         </a:rPr>
                         <a:t>직진</a:t>
                       </a:r>
-                      <a:endParaRPr lang="en-US" sz="1200" dirty="0"/>
+                      <a:endParaRPr lang="en-US" sz="1300" dirty="0"/>
                     </a:p>
                   </a:txBody>
                   <a:tcPr marL="73152" marR="36576" marT="27432" marB="27432" anchor="ctr">
@@ -7942,14 +8509,14 @@
                         <a:buNone/>
                       </a:pPr>
                       <a:r>
-                        <a:rPr lang="en-US" sz="1200" dirty="0">
+                        <a:rPr lang="en-US" sz="1300" dirty="0">
                           <a:solidFill>
                             <a:schemeClr val="tx1"/>
                           </a:solidFill>
                         </a:rPr>
                         <a:t>직진</a:t>
                       </a:r>
-                      <a:endParaRPr lang="en-US" sz="1200" dirty="0"/>
+                      <a:endParaRPr lang="en-US" sz="1300" dirty="0"/>
                     </a:p>
                   </a:txBody>
                   <a:tcPr marL="73152" marR="36576" marT="27432" marB="27432" anchor="ctr">
@@ -8003,14 +8570,14 @@
                         <a:buNone/>
                       </a:pPr>
                       <a:r>
-                        <a:rPr lang="en-US" sz="1200" dirty="0">
+                        <a:rPr lang="en-US" sz="1300" dirty="0">
                           <a:solidFill>
                             <a:schemeClr val="tx1"/>
                           </a:solidFill>
                         </a:rPr>
                         <a:t>우회전 전용</a:t>
                       </a:r>
-                      <a:endParaRPr lang="en-US" sz="1200" dirty="0"/>
+                      <a:endParaRPr lang="en-US" sz="1300" dirty="0"/>
                     </a:p>
                   </a:txBody>
                   <a:tcPr marL="73152" marR="36576" marT="27432" marB="27432" anchor="ctr">
@@ -8056,7 +8623,7 @@
                   </a:tcPr>
                 </a:tc>
               </a:tr>
-              <a:tr h="658368">
+              <a:tr h="713232">
                 <a:tc>
                   <a:txBody>
                     <a:bodyPr/>
@@ -8066,28 +8633,28 @@
                         <a:buNone/>
                       </a:pPr>
                       <a:r>
-                        <a:rPr lang="en-US" sz="1200" b="1" dirty="0">
+                        <a:rPr lang="en-US" sz="1300" b="1" dirty="0">
                           <a:solidFill>
                             <a:schemeClr val="tx2"/>
                           </a:solidFill>
                         </a:rPr>
-                        <a:t>동일로 북쪽</a:t>
+                        <a:t>북측 · 동일로</a:t>
                       </a:r>
-                      <a:endParaRPr lang="en-US" sz="1200" dirty="0"/>
+                      <a:endParaRPr lang="en-US" sz="1300" dirty="0"/>
                     </a:p>
                     <a:p>
                       <a:pPr indent="0" marL="0">
                         <a:buNone/>
                       </a:pPr>
                       <a:r>
-                        <a:rPr lang="en-US" sz="1200" b="1" dirty="0">
+                        <a:rPr lang="en-US" sz="1100" dirty="0">
                           <a:solidFill>
-                            <a:schemeClr val="tx2"/>
+                            <a:schemeClr val="accent5"/>
                           </a:solidFill>
                         </a:rPr>
-                        <a:t>(공릉역 쪽)</a:t>
+                        <a:t>북쪽에서 진입</a:t>
                       </a:r>
-                      <a:endParaRPr lang="en-US" sz="1200" dirty="0"/>
+                      <a:endParaRPr lang="en-US" sz="1300" dirty="0"/>
                     </a:p>
                   </a:txBody>
                   <a:tcPr marL="73152" marR="36576" marT="27432" marB="27432" anchor="ctr">
@@ -8138,14 +8705,14 @@
                         <a:buNone/>
                       </a:pPr>
                       <a:r>
-                        <a:rPr lang="en-US" sz="1200" b="1" dirty="0">
+                        <a:rPr lang="en-US" sz="1300" b="1" dirty="0">
                           <a:solidFill>
                             <a:schemeClr val="tx2"/>
                           </a:solidFill>
                         </a:rPr>
                         <a:t>4</a:t>
                       </a:r>
-                      <a:endParaRPr lang="en-US" sz="1200" dirty="0"/>
+                      <a:endParaRPr lang="en-US" sz="1300" dirty="0"/>
                     </a:p>
                   </a:txBody>
                   <a:tcPr marL="73152" marR="36576" marT="27432" marB="27432" anchor="ctr">
@@ -8196,14 +8763,14 @@
                         <a:buNone/>
                       </a:pPr>
                       <a:r>
-                        <a:rPr lang="en-US" sz="1200" dirty="0">
+                        <a:rPr lang="en-US" sz="1300" dirty="0">
                           <a:solidFill>
                             <a:schemeClr val="tx1"/>
                           </a:solidFill>
                         </a:rPr>
                         <a:t>좌회전·유턴</a:t>
                       </a:r>
-                      <a:endParaRPr lang="en-US" sz="1200" dirty="0"/>
+                      <a:endParaRPr lang="en-US" sz="1300" dirty="0"/>
                     </a:p>
                   </a:txBody>
                   <a:tcPr marL="73152" marR="36576" marT="27432" marB="27432" anchor="ctr">
@@ -8257,14 +8824,14 @@
                         <a:buNone/>
                       </a:pPr>
                       <a:r>
-                        <a:rPr lang="en-US" sz="1200" dirty="0">
+                        <a:rPr lang="en-US" sz="1300" dirty="0">
                           <a:solidFill>
                             <a:schemeClr val="tx1"/>
                           </a:solidFill>
                         </a:rPr>
                         <a:t>직진</a:t>
                       </a:r>
-                      <a:endParaRPr lang="en-US" sz="1200" dirty="0"/>
+                      <a:endParaRPr lang="en-US" sz="1300" dirty="0"/>
                     </a:p>
                   </a:txBody>
                   <a:tcPr marL="73152" marR="36576" marT="27432" marB="27432" anchor="ctr">
@@ -8318,14 +8885,14 @@
                         <a:buNone/>
                       </a:pPr>
                       <a:r>
-                        <a:rPr lang="en-US" sz="1200" dirty="0">
+                        <a:rPr lang="en-US" sz="1300" dirty="0">
                           <a:solidFill>
                             <a:schemeClr val="tx1"/>
                           </a:solidFill>
                         </a:rPr>
                         <a:t>직진</a:t>
                       </a:r>
-                      <a:endParaRPr lang="en-US" sz="1200" dirty="0"/>
+                      <a:endParaRPr lang="en-US" sz="1300" dirty="0"/>
                     </a:p>
                   </a:txBody>
                   <a:tcPr marL="73152" marR="36576" marT="27432" marB="27432" anchor="ctr">
@@ -8379,14 +8946,14 @@
                         <a:buNone/>
                       </a:pPr>
                       <a:r>
-                        <a:rPr lang="en-US" sz="1200" dirty="0">
+                        <a:rPr lang="en-US" sz="1300" dirty="0">
                           <a:solidFill>
                             <a:schemeClr val="tx1"/>
                           </a:solidFill>
                         </a:rPr>
                         <a:t>직진·우회전</a:t>
                       </a:r>
-                      <a:endParaRPr lang="en-US" sz="1200" dirty="0"/>
+                      <a:endParaRPr lang="en-US" sz="1300" dirty="0"/>
                     </a:p>
                   </a:txBody>
                   <a:tcPr marL="73152" marR="36576" marT="27432" marB="27432" anchor="ctr">
@@ -8440,14 +9007,14 @@
                         <a:buNone/>
                       </a:pPr>
                       <a:r>
-                        <a:rPr lang="en-US" sz="1200" dirty="0">
+                        <a:rPr lang="en-US" sz="1300" dirty="0">
                           <a:solidFill>
                             <a:schemeClr val="accent5"/>
                           </a:solidFill>
                         </a:rPr>
                         <a:t>–</a:t>
                       </a:r>
-                      <a:endParaRPr lang="en-US" sz="1200" dirty="0"/>
+                      <a:endParaRPr lang="en-US" sz="1300" dirty="0"/>
                     </a:p>
                   </a:txBody>
                   <a:tcPr marL="73152" marR="36576" marT="27432" marB="27432" anchor="ctr">
@@ -8490,7 +9057,7 @@
                   </a:tcPr>
                 </a:tc>
               </a:tr>
-              <a:tr h="658368">
+              <a:tr h="713232">
                 <a:tc>
                   <a:txBody>
                     <a:bodyPr/>
@@ -8500,28 +9067,28 @@
                         <a:buNone/>
                       </a:pPr>
                       <a:r>
-                        <a:rPr lang="en-US" sz="1200" b="1" dirty="0">
+                        <a:rPr lang="en-US" sz="1300" b="1" dirty="0">
                           <a:solidFill>
                             <a:schemeClr val="tx2"/>
                           </a:solidFill>
                         </a:rPr>
-                        <a:t>동일로 남쪽</a:t>
+                        <a:t>남측 · 동일로</a:t>
                       </a:r>
-                      <a:endParaRPr lang="en-US" sz="1200" dirty="0"/>
+                      <a:endParaRPr lang="en-US" sz="1300" dirty="0"/>
                     </a:p>
                     <a:p>
                       <a:pPr indent="0" marL="0">
                         <a:buNone/>
                       </a:pPr>
                       <a:r>
-                        <a:rPr lang="en-US" sz="1200" b="1" dirty="0">
+                        <a:rPr lang="en-US" sz="1100" dirty="0">
                           <a:solidFill>
-                            <a:schemeClr val="tx2"/>
+                            <a:schemeClr val="accent5"/>
                           </a:solidFill>
                         </a:rPr>
-                        <a:t>(먹골역 쪽)</a:t>
+                        <a:t>남쪽에서 진입</a:t>
                       </a:r>
-                      <a:endParaRPr lang="en-US" sz="1200" dirty="0"/>
+                      <a:endParaRPr lang="en-US" sz="1300" dirty="0"/>
                     </a:p>
                   </a:txBody>
                   <a:tcPr marL="73152" marR="36576" marT="27432" marB="27432" anchor="ctr">
@@ -8572,14 +9139,14 @@
                         <a:buNone/>
                       </a:pPr>
                       <a:r>
-                        <a:rPr lang="en-US" sz="1200" b="1" dirty="0">
+                        <a:rPr lang="en-US" sz="1300" b="1" dirty="0">
                           <a:solidFill>
                             <a:schemeClr val="tx2"/>
                           </a:solidFill>
                         </a:rPr>
                         <a:t>5</a:t>
                       </a:r>
-                      <a:endParaRPr lang="en-US" sz="1200" dirty="0"/>
+                      <a:endParaRPr lang="en-US" sz="1300" dirty="0"/>
                     </a:p>
                   </a:txBody>
                   <a:tcPr marL="73152" marR="36576" marT="27432" marB="27432" anchor="ctr">
@@ -8630,14 +9197,14 @@
                         <a:buNone/>
                       </a:pPr>
                       <a:r>
-                        <a:rPr lang="en-US" sz="1200" dirty="0">
+                        <a:rPr lang="en-US" sz="1300" dirty="0">
                           <a:solidFill>
                             <a:schemeClr val="tx1"/>
                           </a:solidFill>
                         </a:rPr>
                         <a:t>좌회전·유턴</a:t>
                       </a:r>
-                      <a:endParaRPr lang="en-US" sz="1200" dirty="0"/>
+                      <a:endParaRPr lang="en-US" sz="1300" dirty="0"/>
                     </a:p>
                   </a:txBody>
                   <a:tcPr marL="73152" marR="36576" marT="27432" marB="27432" anchor="ctr">
@@ -8691,14 +9258,14 @@
                         <a:buNone/>
                       </a:pPr>
                       <a:r>
-                        <a:rPr lang="en-US" sz="1200" dirty="0">
+                        <a:rPr lang="en-US" sz="1300" dirty="0">
                           <a:solidFill>
                             <a:schemeClr val="tx1"/>
                           </a:solidFill>
                         </a:rPr>
                         <a:t>좌회전</a:t>
                       </a:r>
-                      <a:endParaRPr lang="en-US" sz="1200" dirty="0"/>
+                      <a:endParaRPr lang="en-US" sz="1300" dirty="0"/>
                     </a:p>
                   </a:txBody>
                   <a:tcPr marL="73152" marR="36576" marT="27432" marB="27432" anchor="ctr">
@@ -8752,14 +9319,14 @@
                         <a:buNone/>
                       </a:pPr>
                       <a:r>
-                        <a:rPr lang="en-US" sz="1200" dirty="0">
+                        <a:rPr lang="en-US" sz="1300" dirty="0">
                           <a:solidFill>
                             <a:schemeClr val="tx1"/>
                           </a:solidFill>
                         </a:rPr>
                         <a:t>직진</a:t>
                       </a:r>
-                      <a:endParaRPr lang="en-US" sz="1200" dirty="0"/>
+                      <a:endParaRPr lang="en-US" sz="1300" dirty="0"/>
                     </a:p>
                   </a:txBody>
                   <a:tcPr marL="73152" marR="36576" marT="27432" marB="27432" anchor="ctr">
@@ -8813,14 +9380,14 @@
                         <a:buNone/>
                       </a:pPr>
                       <a:r>
-                        <a:rPr lang="en-US" sz="1200" dirty="0">
+                        <a:rPr lang="en-US" sz="1300" dirty="0">
                           <a:solidFill>
                             <a:schemeClr val="tx1"/>
                           </a:solidFill>
                         </a:rPr>
                         <a:t>직진</a:t>
                       </a:r>
-                      <a:endParaRPr lang="en-US" sz="1200" dirty="0"/>
+                      <a:endParaRPr lang="en-US" sz="1300" dirty="0"/>
                     </a:p>
                   </a:txBody>
                   <a:tcPr marL="73152" marR="36576" marT="27432" marB="27432" anchor="ctr">
@@ -8874,14 +9441,14 @@
                         <a:buNone/>
                       </a:pPr>
                       <a:r>
-                        <a:rPr lang="en-US" sz="1200" dirty="0">
+                        <a:rPr lang="en-US" sz="1300" dirty="0">
                           <a:solidFill>
                             <a:schemeClr val="tx1"/>
                           </a:solidFill>
                         </a:rPr>
                         <a:t>직진·우회전</a:t>
                       </a:r>
-                      <a:endParaRPr lang="en-US" sz="1200" dirty="0"/>
+                      <a:endParaRPr lang="en-US" sz="1300" dirty="0"/>
                     </a:p>
                   </a:txBody>
                   <a:tcPr marL="73152" marR="36576" marT="27432" marB="27432" anchor="ctr">
@@ -8933,13 +9500,13 @@
       </p:graphicFrame>
       <p:sp>
         <p:nvSpPr>
-          <p:cNvPr id="17" name="Text 14"/>
+          <p:cNvPr id="16" name="Text 13"/>
           <p:cNvSpPr txBox="1"/>
           <p:nvPr/>
         </p:nvSpPr>
         <p:spPr>
           <a:xfrm>
-            <a:off x="4480560" y="5239512"/>
+            <a:off x="4480560" y="5120640"/>
             <a:ext cx="7159752" cy="228600"/>
           </a:xfrm>
           <a:prstGeom prst="rect">
@@ -8961,7 +9528,7 @@
                   <a:schemeClr val="accent5"/>
                 </a:solidFill>
               </a:rPr>
-              <a:t>차로 구성은 중앙선 쪽부터 표시  ·  음영: 좌회전 포함 차로</a:t>
+              <a:t>차로 구성은 중앙선 쪽부터 표시  ·  음영: 좌회전 포함 차로  ·  방향 표기는 5장 그래프와 동일</a:t>
             </a:r>
             <a:endParaRPr lang="en-US" sz="1100" dirty="0"/>
           </a:p>
@@ -8969,13 +9536,13 @@
       </p:sp>
       <p:sp>
         <p:nvSpPr>
-          <p:cNvPr id="18" name="notes-30"/>
+          <p:cNvPr id="17" name="notes-32"/>
           <p:cNvSpPr txBox="1"/>
           <p:nvPr/>
         </p:nvSpPr>
         <p:spPr>
           <a:xfrm>
-            <a:off x="548640" y="5577840"/>
+            <a:off x="548640" y="5486400"/>
             <a:ext cx="11064240" cy="548640"/>
           </a:xfrm>
           <a:prstGeom prst="rect">
@@ -9017,7 +9584,7 @@
                   <a:schemeClr val="accent5"/>
                 </a:solidFill>
               </a:rPr>
-              <a:t>※ 버스전용차로 위치·운영시간·적용 범위와 유턴 조건은 현장 표지판으로 확인 예정</a:t>
+              <a:t>※ 버스전용차로(위치·운영시간·적용 범위)·유턴 조건은 현장 표지판으로 확인하고, 차로군 구성에 주는 영향까지 검토</a:t>
             </a:r>
             <a:endParaRPr lang="en-US" sz="1200" dirty="0"/>
           </a:p>
@@ -9025,13 +9592,13 @@
       </p:sp>
       <p:sp>
         <p:nvSpPr>
-          <p:cNvPr id="19" name="source-31"/>
+          <p:cNvPr id="18" name="source-33"/>
           <p:cNvSpPr txBox="1"/>
           <p:nvPr/>
         </p:nvSpPr>
         <p:spPr>
           <a:xfrm>
-            <a:off x="548640" y="6144768"/>
+            <a:off x="548640" y="6108192"/>
             <a:ext cx="11064240" cy="256032"/>
           </a:xfrm>
           <a:prstGeom prst="rect">
@@ -9169,18 +9736,18 @@
       </p:sp>
       <p:sp>
         <p:nvSpPr>
-          <p:cNvPr id="3" name="card-32"/>
+          <p:cNvPr id="3" name="card-34"/>
           <p:cNvSpPr/>
           <p:nvPr/>
         </p:nvSpPr>
         <p:spPr>
           <a:xfrm>
             <a:off x="548640" y="1188720"/>
-            <a:ext cx="2514600" cy="914400"/>
+            <a:ext cx="3657600" cy="960120"/>
           </a:xfrm>
           <a:prstGeom prst="roundRect">
             <a:avLst>
-              <a:gd name="adj" fmla="val 8000"/>
+              <a:gd name="adj" fmla="val 7619"/>
             </a:avLst>
           </a:prstGeom>
           <a:solidFill>
@@ -9203,7 +9770,7 @@
         <p:spPr>
           <a:xfrm>
             <a:off x="713232" y="1243584"/>
-            <a:ext cx="2240280" cy="804672"/>
+            <a:ext cx="3383280" cy="850392"/>
           </a:xfrm>
           <a:prstGeom prst="rect">
             <a:avLst/>
@@ -9226,7 +9793,7 @@
               </a:rPr>
               <a:t>자료</a:t>
             </a:r>
-            <a:endParaRPr lang="en-US" sz="1100" dirty="0"/>
+            <a:endParaRPr lang="en-US" sz="1200" dirty="0"/>
           </a:p>
           <a:p>
             <a:pPr indent="0" marL="0">
@@ -9238,9 +9805,9 @@
                   <a:schemeClr val="tx1"/>
                 </a:solidFill>
               </a:rPr>
-              <a:t>서울시 T-DATA</a:t>
-            </a:r>
-            <a:endParaRPr lang="en-US" sz="1100" dirty="0"/>
+              <a:t>서울시 T-DATA 스마트교차로 5분 교통량</a:t>
+            </a:r>
+            <a:endParaRPr lang="en-US" sz="1200" dirty="0"/>
           </a:p>
           <a:p>
             <a:pPr indent="0" marL="0">
@@ -9252,26 +9819,26 @@
                   <a:schemeClr val="tx1"/>
                 </a:solidFill>
               </a:rPr>
-              <a:t>스마트교차로 5분 교통량</a:t>
-            </a:r>
-            <a:endParaRPr lang="en-US" sz="1100" dirty="0"/>
+              <a:t>태릉입구역(ID 172) · 2026.9.29</a:t>
+            </a:r>
+            <a:endParaRPr lang="en-US" sz="1200" dirty="0"/>
           </a:p>
         </p:txBody>
       </p:sp>
       <p:sp>
         <p:nvSpPr>
-          <p:cNvPr id="5" name="card-33"/>
+          <p:cNvPr id="5" name="card-35"/>
           <p:cNvSpPr/>
           <p:nvPr/>
         </p:nvSpPr>
         <p:spPr>
           <a:xfrm>
-            <a:off x="3246120" y="1188720"/>
-            <a:ext cx="1828800" cy="914400"/>
+            <a:off x="4389120" y="1188720"/>
+            <a:ext cx="7251192" cy="960120"/>
           </a:xfrm>
           <a:prstGeom prst="roundRect">
             <a:avLst>
-              <a:gd name="adj" fmla="val 8000"/>
+              <a:gd name="adj" fmla="val 7619"/>
             </a:avLst>
           </a:prstGeom>
           <a:solidFill>
@@ -9293,8 +9860,8 @@
         </p:nvSpPr>
         <p:spPr>
           <a:xfrm>
-            <a:off x="3410712" y="1243584"/>
-            <a:ext cx="1554480" cy="804672"/>
+            <a:off x="4553712" y="1243584"/>
+            <a:ext cx="6949440" cy="850392"/>
           </a:xfrm>
           <a:prstGeom prst="rect">
             <a:avLst/>
@@ -9315,9 +9882,9 @@
                   <a:schemeClr val="accent1"/>
                 </a:solidFill>
               </a:rPr>
-              <a:t>날짜</a:t>
-            </a:r>
-            <a:endParaRPr lang="en-US" sz="1100" dirty="0"/>
+              <a:t>첨두 1시간 산정 방법</a:t>
+            </a:r>
+            <a:endParaRPr lang="en-US" sz="1200" dirty="0"/>
           </a:p>
           <a:p>
             <a:pPr indent="0" marL="0">
@@ -9329,26 +9896,73 @@
                   <a:schemeClr val="tx1"/>
                 </a:solidFill>
               </a:rPr>
-              <a:t>2026년 9월 29일</a:t>
-            </a:r>
-            <a:endParaRPr lang="en-US" sz="1100" dirty="0"/>
+              <a:t>회전별(좌·직·우·유턴) 5분 VOL 합산 → 연속 12개(1시간) 합계가 최대인 구간 선정</a:t>
+            </a:r>
+            <a:endParaRPr lang="en-US" sz="1200" dirty="0"/>
+          </a:p>
+          <a:p>
+            <a:pPr indent="0" marL="0">
+              <a:buNone/>
+            </a:pPr>
+            <a:r>
+              <a:rPr lang="en-US" sz="1200" dirty="0">
+                <a:solidFill>
+                  <a:schemeClr val="tx1"/>
+                </a:solidFill>
+              </a:rPr>
+              <a:t>검토 시간범위 </a:t>
+            </a:r>
+            <a:pPr indent="0" marL="0">
+              <a:buNone/>
+            </a:pPr>
+            <a:r>
+              <a:rPr lang="en-US" sz="1200" b="1" dirty="0">
+                <a:solidFill>
+                  <a:schemeClr val="accent4"/>
+                </a:solidFill>
+              </a:rPr>
+              <a:t>[오전 __~__ / 오후 __~__]</a:t>
+            </a:r>
+            <a:pPr indent="0" marL="0">
+              <a:buNone/>
+            </a:pPr>
+            <a:r>
+              <a:rPr lang="en-US" sz="1200" dirty="0">
+                <a:solidFill>
+                  <a:schemeClr val="tx1"/>
+                </a:solidFill>
+              </a:rPr>
+              <a:t>  ·  시각 표기 </a:t>
+            </a:r>
+            <a:pPr indent="0" marL="0">
+              <a:buNone/>
+            </a:pPr>
+            <a:r>
+              <a:rPr lang="en-US" sz="1200" b="1" dirty="0">
+                <a:solidFill>
+                  <a:schemeClr val="accent4"/>
+                </a:solidFill>
+              </a:rPr>
+              <a:t>[원자료 시각 = 구간 시작/종료 확인]</a:t>
+            </a:r>
+            <a:endParaRPr lang="en-US" sz="1200" dirty="0"/>
           </a:p>
         </p:txBody>
       </p:sp>
       <p:sp>
         <p:nvSpPr>
-          <p:cNvPr id="7" name="card-34"/>
+          <p:cNvPr id="7" name="card-36"/>
           <p:cNvSpPr/>
           <p:nvPr/>
         </p:nvSpPr>
         <p:spPr>
           <a:xfrm>
-            <a:off x="5257800" y="1188720"/>
-            <a:ext cx="1965960" cy="914400"/>
+            <a:off x="548640" y="2331720"/>
+            <a:ext cx="3657600" cy="1188720"/>
           </a:xfrm>
           <a:prstGeom prst="roundRect">
             <a:avLst>
-              <a:gd name="adj" fmla="val 8000"/>
+              <a:gd name="adj" fmla="val 6154"/>
             </a:avLst>
           </a:prstGeom>
           <a:solidFill>
@@ -9370,8 +9984,8 @@
         </p:nvSpPr>
         <p:spPr>
           <a:xfrm>
-            <a:off x="5422392" y="1243584"/>
-            <a:ext cx="1691640" cy="804672"/>
+            <a:off x="777240" y="2468880"/>
+            <a:ext cx="1737360" cy="914400"/>
           </a:xfrm>
           <a:prstGeom prst="rect">
             <a:avLst/>
@@ -9387,59 +10001,268 @@
               <a:buNone/>
             </a:pPr>
             <a:r>
-              <a:rPr lang="en-US" sz="1100" b="1" dirty="0">
+              <a:rPr lang="en-US" sz="1300" b="1" dirty="0">
                 <a:solidFill>
                   <a:schemeClr val="accent1"/>
                 </a:solidFill>
               </a:rPr>
-              <a:t>대상</a:t>
-            </a:r>
-            <a:endParaRPr lang="en-US" sz="1100" dirty="0"/>
+              <a:t>오전 첨두 1시간</a:t>
+            </a:r>
+            <a:endParaRPr lang="en-US" sz="1300" dirty="0"/>
           </a:p>
           <a:p>
             <a:pPr indent="0" marL="0">
               <a:buNone/>
             </a:pPr>
             <a:r>
-              <a:rPr lang="en-US" sz="1200" dirty="0">
+              <a:rPr lang="en-US" sz="1400" dirty="0">
                 <a:solidFill>
                   <a:schemeClr val="tx1"/>
                 </a:solidFill>
               </a:rPr>
-              <a:t>태릉입구역 교차로</a:t>
-            </a:r>
-            <a:endParaRPr lang="en-US" sz="1100" dirty="0"/>
-          </a:p>
-          <a:p>
-            <a:pPr indent="0" marL="0">
+              <a:t>07:25 ~ 08:25</a:t>
+            </a:r>
+            <a:endParaRPr lang="en-US" sz="1300" dirty="0"/>
+          </a:p>
+        </p:txBody>
+      </p:sp>
+      <p:sp>
+        <p:nvSpPr>
+          <p:cNvPr id="9" name="Text 7"/>
+          <p:cNvSpPr txBox="1"/>
+          <p:nvPr/>
+        </p:nvSpPr>
+        <p:spPr>
+          <a:xfrm>
+            <a:off x="2377440" y="2468880"/>
+            <a:ext cx="1645920" cy="914400"/>
+          </a:xfrm>
+          <a:prstGeom prst="rect">
+            <a:avLst/>
+          </a:prstGeom>
+          <a:noFill/>
+          <a:ln/>
+        </p:spPr>
+        <p:txBody>
+          <a:bodyPr wrap="square" lIns="0" tIns="0" rIns="0" bIns="0" rtlCol="0" anchor="ctr"/>
+          <a:lstStyle/>
+          <a:p>
+            <a:pPr algn="r" indent="0" marL="0">
               <a:buNone/>
             </a:pPr>
             <a:r>
-              <a:rPr lang="en-US" sz="1200" dirty="0">
-                <a:solidFill>
-                  <a:schemeClr val="tx1"/>
-                </a:solidFill>
-              </a:rPr>
-              <a:t>(ID 172)</a:t>
-            </a:r>
-            <a:endParaRPr lang="en-US" sz="1100" dirty="0"/>
+              <a:rPr lang="en-US" sz="3400" b="1" dirty="0">
+                <a:solidFill>
+                  <a:schemeClr val="tx2"/>
+                </a:solidFill>
+              </a:rPr>
+              <a:t>5,804</a:t>
+            </a:r>
+            <a:pPr algn="r" indent="0" marL="0">
+              <a:buNone/>
+            </a:pPr>
+            <a:r>
+              <a:rPr lang="en-US" sz="1400" dirty="0">
+                <a:solidFill>
+                  <a:schemeClr val="tx2"/>
+                </a:solidFill>
+              </a:rPr>
+              <a:t> 대</a:t>
+            </a:r>
+            <a:endParaRPr lang="en-US" sz="3400" dirty="0"/>
           </a:p>
         </p:txBody>
       </p:sp>
       <p:sp>
         <p:nvSpPr>
-          <p:cNvPr id="9" name="card-35"/>
+          <p:cNvPr id="10" name="card-37"/>
           <p:cNvSpPr/>
           <p:nvPr/>
         </p:nvSpPr>
         <p:spPr>
           <a:xfrm>
-            <a:off x="7406640" y="1188720"/>
-            <a:ext cx="4206240" cy="914400"/>
+            <a:off x="548640" y="3657600"/>
+            <a:ext cx="3657600" cy="1188720"/>
           </a:xfrm>
           <a:prstGeom prst="roundRect">
             <a:avLst>
-              <a:gd name="adj" fmla="val 8000"/>
+              <a:gd name="adj" fmla="val 6154"/>
+            </a:avLst>
+          </a:prstGeom>
+          <a:solidFill>
+            <a:schemeClr val="tx2"/>
+          </a:solidFill>
+          <a:ln w="12700">
+            <a:solidFill>
+              <a:schemeClr val="tx2"/>
+            </a:solidFill>
+            <a:prstDash val="solid"/>
+          </a:ln>
+        </p:spPr>
+      </p:sp>
+      <p:sp>
+        <p:nvSpPr>
+          <p:cNvPr id="11" name="Text 9"/>
+          <p:cNvSpPr txBox="1"/>
+          <p:nvPr/>
+        </p:nvSpPr>
+        <p:spPr>
+          <a:xfrm>
+            <a:off x="777240" y="3794760"/>
+            <a:ext cx="1737360" cy="914400"/>
+          </a:xfrm>
+          <a:prstGeom prst="rect">
+            <a:avLst/>
+          </a:prstGeom>
+          <a:noFill/>
+          <a:ln/>
+        </p:spPr>
+        <p:txBody>
+          <a:bodyPr wrap="square" lIns="0" tIns="0" rIns="0" bIns="0" rtlCol="0" anchor="ctr"/>
+          <a:lstStyle/>
+          <a:p>
+            <a:pPr indent="0" marL="0">
+              <a:buNone/>
+            </a:pPr>
+            <a:r>
+              <a:rPr lang="en-US" sz="1300" b="1" dirty="0">
+                <a:solidFill>
+                  <a:schemeClr val="accent6"/>
+                </a:solidFill>
+              </a:rPr>
+              <a:t>오후 첨두 1시간</a:t>
+            </a:r>
+            <a:endParaRPr lang="en-US" sz="1300" dirty="0"/>
+          </a:p>
+          <a:p>
+            <a:pPr indent="0" marL="0">
+              <a:buNone/>
+            </a:pPr>
+            <a:r>
+              <a:rPr lang="en-US" sz="1400" dirty="0">
+                <a:solidFill>
+                  <a:schemeClr val="bg1"/>
+                </a:solidFill>
+              </a:rPr>
+              <a:t>17:20 ~ 18:20</a:t>
+            </a:r>
+            <a:endParaRPr lang="en-US" sz="1300" dirty="0"/>
+          </a:p>
+        </p:txBody>
+      </p:sp>
+      <p:sp>
+        <p:nvSpPr>
+          <p:cNvPr id="12" name="Text 10"/>
+          <p:cNvSpPr txBox="1"/>
+          <p:nvPr/>
+        </p:nvSpPr>
+        <p:spPr>
+          <a:xfrm>
+            <a:off x="2377440" y="3794760"/>
+            <a:ext cx="1645920" cy="914400"/>
+          </a:xfrm>
+          <a:prstGeom prst="rect">
+            <a:avLst/>
+          </a:prstGeom>
+          <a:noFill/>
+          <a:ln/>
+        </p:spPr>
+        <p:txBody>
+          <a:bodyPr wrap="square" lIns="0" tIns="0" rIns="0" bIns="0" rtlCol="0" anchor="ctr"/>
+          <a:lstStyle/>
+          <a:p>
+            <a:pPr algn="r" indent="0" marL="0">
+              <a:buNone/>
+            </a:pPr>
+            <a:r>
+              <a:rPr lang="en-US" sz="3400" b="1" dirty="0">
+                <a:solidFill>
+                  <a:schemeClr val="bg1"/>
+                </a:solidFill>
+              </a:rPr>
+              <a:t>6,169</a:t>
+            </a:r>
+            <a:pPr algn="r" indent="0" marL="0">
+              <a:buNone/>
+            </a:pPr>
+            <a:r>
+              <a:rPr lang="en-US" sz="1400" dirty="0">
+                <a:solidFill>
+                  <a:schemeClr val="bg1"/>
+                </a:solidFill>
+              </a:rPr>
+              <a:t> 대</a:t>
+            </a:r>
+            <a:endParaRPr lang="en-US" sz="3400" dirty="0"/>
+          </a:p>
+        </p:txBody>
+      </p:sp>
+      <p:sp>
+        <p:nvSpPr>
+          <p:cNvPr id="13" name="Text 11"/>
+          <p:cNvSpPr txBox="1"/>
+          <p:nvPr/>
+        </p:nvSpPr>
+        <p:spPr>
+          <a:xfrm>
+            <a:off x="548640" y="4892040"/>
+            <a:ext cx="3657600" cy="228600"/>
+          </a:xfrm>
+          <a:prstGeom prst="rect">
+            <a:avLst/>
+          </a:prstGeom>
+          <a:noFill/>
+          <a:ln/>
+        </p:spPr>
+        <p:txBody>
+          <a:bodyPr wrap="square" lIns="0" tIns="0" rIns="0" bIns="0" rtlCol="0" anchor="ctr"/>
+          <a:lstStyle/>
+          <a:p>
+            <a:pPr indent="0" marL="0">
+              <a:buNone/>
+            </a:pPr>
+            <a:r>
+              <a:rPr lang="en-US" sz="1100" dirty="0">
+                <a:solidFill>
+                  <a:schemeClr val="accent5"/>
+                </a:solidFill>
+              </a:rPr>
+              <a:t>전체 진입 교통량 기준</a:t>
+            </a:r>
+            <a:endParaRPr lang="en-US" sz="1100" dirty="0"/>
+          </a:p>
+        </p:txBody>
+      </p:sp>
+      <p:graphicFrame>
+        <p:nvGraphicFramePr>
+          <p:cNvPr id="14" name="dir-volume-chart" descr=""/>
+          <p:cNvGraphicFramePr/>
+          <p:nvPr/>
+        </p:nvGraphicFramePr>
+        <p:xfrm>
+          <a:off x="4526280" y="2286000"/>
+          <a:ext cx="7114032" cy="2834640"/>
+        </p:xfrm>
+        <a:graphic xmlns:a="http://schemas.openxmlformats.org/drawingml/2006/main">
+          <a:graphicData uri="http://schemas.openxmlformats.org/drawingml/2006/chart">
+            <c:chart xmlns:c="http://schemas.openxmlformats.org/drawingml/2006/chart" r:id="rId1"/>
+          </a:graphicData>
+        </a:graphic>
+      </p:graphicFrame>
+      <p:sp>
+        <p:nvSpPr>
+          <p:cNvPr id="15" name="card-38"/>
+          <p:cNvSpPr/>
+          <p:nvPr/>
+        </p:nvSpPr>
+        <p:spPr>
+          <a:xfrm>
+            <a:off x="548640" y="5212080"/>
+            <a:ext cx="11091672" cy="841248"/>
+          </a:xfrm>
+          <a:prstGeom prst="roundRect">
+            <a:avLst>
+              <a:gd name="adj" fmla="val 8696"/>
             </a:avLst>
           </a:prstGeom>
           <a:solidFill>
@@ -9455,14 +10278,14 @@
       </p:sp>
       <p:sp>
         <p:nvSpPr>
-          <p:cNvPr id="10" name="Text 8"/>
+          <p:cNvPr id="16" name="interpretation"/>
           <p:cNvSpPr txBox="1"/>
           <p:nvPr/>
         </p:nvSpPr>
         <p:spPr>
           <a:xfrm>
-            <a:off x="7571232" y="1243584"/>
-            <a:ext cx="3931920" cy="804672"/>
+            <a:off x="731520" y="5230368"/>
+            <a:ext cx="10789920" cy="804672"/>
           </a:xfrm>
           <a:prstGeom prst="rect">
             <a:avLst/>
@@ -9478,16 +10301,13 @@
               <a:buNone/>
             </a:pPr>
             <a:r>
-              <a:rPr lang="en-US" sz="1100" b="1" dirty="0">
+              <a:rPr lang="en-US" sz="1200" b="1" dirty="0">
                 <a:solidFill>
                   <a:schemeClr val="accent1"/>
                 </a:solidFill>
               </a:rPr>
-              <a:t>방법</a:t>
-            </a:r>
-            <a:endParaRPr lang="en-US" sz="1100" dirty="0"/>
-          </a:p>
-          <a:p>
+              <a:t>해석  </a:t>
+            </a:r>
             <a:pPr indent="0" marL="0">
               <a:buNone/>
             </a:pPr>
@@ -9497,423 +10317,60 @@
                   <a:schemeClr val="tx1"/>
                 </a:solidFill>
               </a:rPr>
-              <a:t>회전별 5분 VOL 연속 12개 합산 → 첨두 1시간</a:t>
-            </a:r>
-            <a:endParaRPr lang="en-US" sz="1100" dirty="0"/>
+              <a:t>해당 날짜는 오후 첨두 교통량이 더 많고, 서측 접근로 진입 교통량이 가장 많음</a:t>
+            </a:r>
+            <a:endParaRPr lang="en-US" sz="1200" dirty="0"/>
           </a:p>
           <a:p>
             <a:pPr indent="0" marL="0">
               <a:buNone/>
             </a:pPr>
             <a:r>
+              <a:rPr lang="en-US" sz="1200" b="1" dirty="0">
+                <a:solidFill>
+                  <a:schemeClr val="accent1"/>
+                </a:solidFill>
+              </a:rPr>
+              <a:t>향후  </a:t>
+            </a:r>
+            <a:pPr indent="0" marL="0">
+              <a:buNone/>
+            </a:pPr>
+            <a:r>
               <a:rPr lang="en-US" sz="1200" dirty="0">
                 <a:solidFill>
                   <a:schemeClr val="tx1"/>
                 </a:solidFill>
               </a:rPr>
-              <a:t>(좌회전·직진·우회전·유턴 모두 포함)</a:t>
-            </a:r>
-            <a:endParaRPr lang="en-US" sz="1100" dirty="0"/>
+              <a:t>전체 진입량만으로 서비스수준을 판단하지 않음 → 접근로·회전별 교통량과 현장 신호시간을 연결해 차로군별 분석</a:t>
+            </a:r>
+            <a:endParaRPr lang="en-US" sz="1200" dirty="0"/>
+          </a:p>
+          <a:p>
+            <a:pPr indent="0" marL="0">
+              <a:buNone/>
+            </a:pPr>
+            <a:r>
+              <a:rPr lang="en-US" sz="1200" b="1" dirty="0">
+                <a:solidFill>
+                  <a:schemeClr val="accent4"/>
+                </a:solidFill>
+              </a:rPr>
+              <a:t>※ 한 날짜의 예비 결과로, 일반적인 첨두시간으로 확정하지 않음</a:t>
+            </a:r>
+            <a:endParaRPr lang="en-US" sz="1200" dirty="0"/>
           </a:p>
         </p:txBody>
       </p:sp>
       <p:sp>
         <p:nvSpPr>
-          <p:cNvPr id="11" name="card-36"/>
-          <p:cNvSpPr/>
+          <p:cNvPr id="17" name="source-39"/>
+          <p:cNvSpPr txBox="1"/>
           <p:nvPr/>
         </p:nvSpPr>
         <p:spPr>
           <a:xfrm>
-            <a:off x="548640" y="2286000"/>
-            <a:ext cx="3657600" cy="1261872"/>
-          </a:xfrm>
-          <a:prstGeom prst="roundRect">
-            <a:avLst>
-              <a:gd name="adj" fmla="val 5797"/>
-            </a:avLst>
-          </a:prstGeom>
-          <a:solidFill>
-            <a:schemeClr val="bg2"/>
-          </a:solidFill>
-          <a:ln w="12700">
-            <a:solidFill>
-              <a:schemeClr val="bg2"/>
-            </a:solidFill>
-            <a:prstDash val="solid"/>
-          </a:ln>
-        </p:spPr>
-      </p:sp>
-      <p:sp>
-        <p:nvSpPr>
-          <p:cNvPr id="12" name="Text 10"/>
-          <p:cNvSpPr txBox="1"/>
-          <p:nvPr/>
-        </p:nvSpPr>
-        <p:spPr>
-          <a:xfrm>
-            <a:off x="777240" y="2468880"/>
-            <a:ext cx="1737360" cy="896112"/>
-          </a:xfrm>
-          <a:prstGeom prst="rect">
-            <a:avLst/>
-          </a:prstGeom>
-          <a:noFill/>
-          <a:ln/>
-        </p:spPr>
-        <p:txBody>
-          <a:bodyPr wrap="square" lIns="0" tIns="0" rIns="0" bIns="0" rtlCol="0" anchor="ctr"/>
-          <a:lstStyle/>
-          <a:p>
-            <a:pPr indent="0" marL="0">
-              <a:buNone/>
-            </a:pPr>
-            <a:r>
-              <a:rPr lang="en-US" sz="1300" b="1" dirty="0">
-                <a:solidFill>
-                  <a:schemeClr val="accent1"/>
-                </a:solidFill>
-              </a:rPr>
-              <a:t>오전 첨두 1시간</a:t>
-            </a:r>
-            <a:endParaRPr lang="en-US" sz="1300" dirty="0"/>
-          </a:p>
-          <a:p>
-            <a:pPr indent="0" marL="0">
-              <a:buNone/>
-            </a:pPr>
-            <a:r>
-              <a:rPr lang="en-US" sz="1400" dirty="0">
-                <a:solidFill>
-                  <a:schemeClr val="tx1"/>
-                </a:solidFill>
-              </a:rPr>
-              <a:t>07:25 ~ 08:25</a:t>
-            </a:r>
-            <a:endParaRPr lang="en-US" sz="1300" dirty="0"/>
-          </a:p>
-        </p:txBody>
-      </p:sp>
-      <p:sp>
-        <p:nvSpPr>
-          <p:cNvPr id="13" name="Text 11"/>
-          <p:cNvSpPr txBox="1"/>
-          <p:nvPr/>
-        </p:nvSpPr>
-        <p:spPr>
-          <a:xfrm>
-            <a:off x="2377440" y="2468880"/>
-            <a:ext cx="1645920" cy="896112"/>
-          </a:xfrm>
-          <a:prstGeom prst="rect">
-            <a:avLst/>
-          </a:prstGeom>
-          <a:noFill/>
-          <a:ln/>
-        </p:spPr>
-        <p:txBody>
-          <a:bodyPr wrap="square" lIns="0" tIns="0" rIns="0" bIns="0" rtlCol="0" anchor="ctr"/>
-          <a:lstStyle/>
-          <a:p>
-            <a:pPr algn="r" indent="0" marL="0">
-              <a:buNone/>
-            </a:pPr>
-            <a:r>
-              <a:rPr lang="en-US" sz="3400" b="1" dirty="0">
-                <a:solidFill>
-                  <a:schemeClr val="tx2"/>
-                </a:solidFill>
-              </a:rPr>
-              <a:t>5,804</a:t>
-            </a:r>
-            <a:pPr algn="r" indent="0" marL="0">
-              <a:buNone/>
-            </a:pPr>
-            <a:r>
-              <a:rPr lang="en-US" sz="1400" dirty="0">
-                <a:solidFill>
-                  <a:schemeClr val="tx2"/>
-                </a:solidFill>
-              </a:rPr>
-              <a:t> 대</a:t>
-            </a:r>
-            <a:endParaRPr lang="en-US" sz="3400" dirty="0"/>
-          </a:p>
-        </p:txBody>
-      </p:sp>
-      <p:sp>
-        <p:nvSpPr>
-          <p:cNvPr id="14" name="card-37"/>
-          <p:cNvSpPr/>
-          <p:nvPr/>
-        </p:nvSpPr>
-        <p:spPr>
-          <a:xfrm>
-            <a:off x="548640" y="3685032"/>
-            <a:ext cx="3657600" cy="1261872"/>
-          </a:xfrm>
-          <a:prstGeom prst="roundRect">
-            <a:avLst>
-              <a:gd name="adj" fmla="val 5797"/>
-            </a:avLst>
-          </a:prstGeom>
-          <a:solidFill>
-            <a:schemeClr val="tx2"/>
-          </a:solidFill>
-          <a:ln w="12700">
-            <a:solidFill>
-              <a:schemeClr val="tx2"/>
-            </a:solidFill>
-            <a:prstDash val="solid"/>
-          </a:ln>
-        </p:spPr>
-      </p:sp>
-      <p:sp>
-        <p:nvSpPr>
-          <p:cNvPr id="15" name="Text 13"/>
-          <p:cNvSpPr txBox="1"/>
-          <p:nvPr/>
-        </p:nvSpPr>
-        <p:spPr>
-          <a:xfrm>
-            <a:off x="777240" y="3867912"/>
-            <a:ext cx="1737360" cy="896112"/>
-          </a:xfrm>
-          <a:prstGeom prst="rect">
-            <a:avLst/>
-          </a:prstGeom>
-          <a:noFill/>
-          <a:ln/>
-        </p:spPr>
-        <p:txBody>
-          <a:bodyPr wrap="square" lIns="0" tIns="0" rIns="0" bIns="0" rtlCol="0" anchor="ctr"/>
-          <a:lstStyle/>
-          <a:p>
-            <a:pPr indent="0" marL="0">
-              <a:buNone/>
-            </a:pPr>
-            <a:r>
-              <a:rPr lang="en-US" sz="1300" b="1" dirty="0">
-                <a:solidFill>
-                  <a:schemeClr val="accent6"/>
-                </a:solidFill>
-              </a:rPr>
-              <a:t>오후 첨두 1시간</a:t>
-            </a:r>
-            <a:endParaRPr lang="en-US" sz="1300" dirty="0"/>
-          </a:p>
-          <a:p>
-            <a:pPr indent="0" marL="0">
-              <a:buNone/>
-            </a:pPr>
-            <a:r>
-              <a:rPr lang="en-US" sz="1400" dirty="0">
-                <a:solidFill>
-                  <a:schemeClr val="bg1"/>
-                </a:solidFill>
-              </a:rPr>
-              <a:t>17:20 ~ 18:20</a:t>
-            </a:r>
-            <a:endParaRPr lang="en-US" sz="1300" dirty="0"/>
-          </a:p>
-        </p:txBody>
-      </p:sp>
-      <p:sp>
-        <p:nvSpPr>
-          <p:cNvPr id="16" name="Text 14"/>
-          <p:cNvSpPr txBox="1"/>
-          <p:nvPr/>
-        </p:nvSpPr>
-        <p:spPr>
-          <a:xfrm>
-            <a:off x="2377440" y="3867912"/>
-            <a:ext cx="1645920" cy="896112"/>
-          </a:xfrm>
-          <a:prstGeom prst="rect">
-            <a:avLst/>
-          </a:prstGeom>
-          <a:noFill/>
-          <a:ln/>
-        </p:spPr>
-        <p:txBody>
-          <a:bodyPr wrap="square" lIns="0" tIns="0" rIns="0" bIns="0" rtlCol="0" anchor="ctr"/>
-          <a:lstStyle/>
-          <a:p>
-            <a:pPr algn="r" indent="0" marL="0">
-              <a:buNone/>
-            </a:pPr>
-            <a:r>
-              <a:rPr lang="en-US" sz="3400" b="1" dirty="0">
-                <a:solidFill>
-                  <a:schemeClr val="bg1"/>
-                </a:solidFill>
-              </a:rPr>
-              <a:t>6,169</a:t>
-            </a:r>
-            <a:pPr algn="r" indent="0" marL="0">
-              <a:buNone/>
-            </a:pPr>
-            <a:r>
-              <a:rPr lang="en-US" sz="1400" dirty="0">
-                <a:solidFill>
-                  <a:schemeClr val="bg1"/>
-                </a:solidFill>
-              </a:rPr>
-              <a:t> 대</a:t>
-            </a:r>
-            <a:endParaRPr lang="en-US" sz="3400" dirty="0"/>
-          </a:p>
-        </p:txBody>
-      </p:sp>
-      <p:sp>
-        <p:nvSpPr>
-          <p:cNvPr id="17" name="Text 15"/>
-          <p:cNvSpPr txBox="1"/>
-          <p:nvPr/>
-        </p:nvSpPr>
-        <p:spPr>
-          <a:xfrm>
-            <a:off x="548640" y="5029200"/>
-            <a:ext cx="3657600" cy="228600"/>
-          </a:xfrm>
-          <a:prstGeom prst="rect">
-            <a:avLst/>
-          </a:prstGeom>
-          <a:noFill/>
-          <a:ln/>
-        </p:spPr>
-        <p:txBody>
-          <a:bodyPr wrap="square" lIns="0" tIns="0" rIns="0" bIns="0" rtlCol="0" anchor="ctr"/>
-          <a:lstStyle/>
-          <a:p>
-            <a:pPr indent="0" marL="0">
-              <a:buNone/>
-            </a:pPr>
-            <a:r>
-              <a:rPr lang="en-US" sz="1100" dirty="0">
-                <a:solidFill>
-                  <a:schemeClr val="accent5"/>
-                </a:solidFill>
-              </a:rPr>
-              <a:t>전체 진입 교통량 기준</a:t>
-            </a:r>
-            <a:endParaRPr lang="en-US" sz="1100" dirty="0"/>
-          </a:p>
-        </p:txBody>
-      </p:sp>
-      <p:graphicFrame>
-        <p:nvGraphicFramePr>
-          <p:cNvPr id="18" name="dir-volume-chart" descr=""/>
-          <p:cNvGraphicFramePr/>
-          <p:nvPr/>
-        </p:nvGraphicFramePr>
-        <p:xfrm>
-          <a:off x="4526280" y="2240280"/>
-          <a:ext cx="7114032" cy="3017520"/>
-        </p:xfrm>
-        <a:graphic xmlns:a="http://schemas.openxmlformats.org/drawingml/2006/main">
-          <a:graphicData uri="http://schemas.openxmlformats.org/drawingml/2006/chart">
-            <c:chart xmlns:c="http://schemas.openxmlformats.org/drawingml/2006/chart" r:id="rId1"/>
-          </a:graphicData>
-        </a:graphic>
-      </p:graphicFrame>
-      <p:sp>
-        <p:nvSpPr>
-          <p:cNvPr id="19" name="card-38"/>
-          <p:cNvSpPr/>
-          <p:nvPr/>
-        </p:nvSpPr>
-        <p:spPr>
-          <a:xfrm>
-            <a:off x="548640" y="5440680"/>
-            <a:ext cx="11091672" cy="566928"/>
-          </a:xfrm>
-          <a:prstGeom prst="roundRect">
-            <a:avLst>
-              <a:gd name="adj" fmla="val 12903"/>
-            </a:avLst>
-          </a:prstGeom>
-          <a:solidFill>
-            <a:schemeClr val="bg2"/>
-          </a:solidFill>
-          <a:ln w="12700">
-            <a:solidFill>
-              <a:schemeClr val="bg2"/>
-            </a:solidFill>
-            <a:prstDash val="solid"/>
-          </a:ln>
-        </p:spPr>
-      </p:sp>
-      <p:sp>
-        <p:nvSpPr>
-          <p:cNvPr id="20" name="Text 17"/>
-          <p:cNvSpPr txBox="1"/>
-          <p:nvPr/>
-        </p:nvSpPr>
-        <p:spPr>
-          <a:xfrm>
-            <a:off x="731520" y="5440680"/>
-            <a:ext cx="10789920" cy="566928"/>
-          </a:xfrm>
-          <a:prstGeom prst="rect">
-            <a:avLst/>
-          </a:prstGeom>
-          <a:noFill/>
-          <a:ln/>
-        </p:spPr>
-        <p:txBody>
-          <a:bodyPr wrap="square" lIns="0" tIns="0" rIns="0" bIns="0" rtlCol="0" anchor="ctr"/>
-          <a:lstStyle/>
-          <a:p>
-            <a:pPr indent="0" marL="0">
-              <a:buNone/>
-            </a:pPr>
-            <a:r>
-              <a:rPr lang="en-US" sz="1300" b="1" dirty="0">
-                <a:solidFill>
-                  <a:schemeClr val="accent1"/>
-                </a:solidFill>
-              </a:rPr>
-              <a:t>해석  </a:t>
-            </a:r>
-            <a:pPr indent="0" marL="0">
-              <a:buNone/>
-            </a:pPr>
-            <a:r>
-              <a:rPr lang="en-US" sz="1300" dirty="0">
-                <a:solidFill>
-                  <a:schemeClr val="tx1"/>
-                </a:solidFill>
-              </a:rPr>
-              <a:t>해당 날짜는 오후 첨두 교통량이 더 많고, 서쪽 접근로 진입 교통량이 가장 많음</a:t>
-            </a:r>
-            <a:endParaRPr lang="en-US" sz="1300" dirty="0"/>
-          </a:p>
-          <a:p>
-            <a:pPr indent="0" marL="0">
-              <a:buNone/>
-            </a:pPr>
-            <a:r>
-              <a:rPr lang="en-US" sz="1200" b="1" dirty="0">
-                <a:solidFill>
-                  <a:schemeClr val="accent4"/>
-                </a:solidFill>
-              </a:rPr>
-              <a:t>※ 한 날짜의 예비 결과로, 일반적인 첨두시간으로 확정하지 않음</a:t>
-            </a:r>
-            <a:endParaRPr lang="en-US" sz="1300" dirty="0"/>
-          </a:p>
-        </p:txBody>
-      </p:sp>
-      <p:sp>
-        <p:nvSpPr>
-          <p:cNvPr id="21" name="source-39"/>
-          <p:cNvSpPr txBox="1"/>
-          <p:nvPr/>
-        </p:nvSpPr>
-        <p:spPr>
-          <a:xfrm>
-            <a:off x="548640" y="6080760"/>
+            <a:off x="548640" y="6108192"/>
             <a:ext cx="11064240" cy="256032"/>
           </a:xfrm>
           <a:prstGeom prst="rect">
@@ -10058,11 +10515,11 @@
         <p:spPr>
           <a:xfrm>
             <a:off x="548640" y="1234440"/>
-            <a:ext cx="4663440" cy="4114800"/>
+            <a:ext cx="4160520" cy="4160520"/>
           </a:xfrm>
           <a:prstGeom prst="roundRect">
             <a:avLst>
-              <a:gd name="adj" fmla="val 1778"/>
+              <a:gd name="adj" fmla="val 1758"/>
             </a:avLst>
           </a:prstGeom>
           <a:solidFill>
@@ -10084,8 +10541,8 @@
         </p:nvSpPr>
         <p:spPr>
           <a:xfrm>
-            <a:off x="777240" y="1371600"/>
-            <a:ext cx="2743200" cy="365760"/>
+            <a:off x="777240" y="1344168"/>
+            <a:ext cx="3703320" cy="365760"/>
           </a:xfrm>
           <a:prstGeom prst="rect">
             <a:avLst/>
@@ -10106,7 +10563,7 @@
                   <a:schemeClr val="tx2"/>
                 </a:solidFill>
               </a:rPr>
-              <a:t>교차로 현장조사</a:t>
+              <a:t>교차로 현장조사 항목</a:t>
             </a:r>
             <a:endParaRPr lang="en-US" sz="1600" dirty="0"/>
           </a:p>
@@ -10114,58 +10571,126 @@
       </p:sp>
       <p:sp>
         <p:nvSpPr>
-          <p:cNvPr id="5" name="chip-42"/>
+          <p:cNvPr id="5" name="Text 3"/>
           <p:cNvSpPr txBox="1"/>
           <p:nvPr/>
         </p:nvSpPr>
         <p:spPr>
           <a:xfrm>
-            <a:off x="3703320" y="1417320"/>
-            <a:ext cx="1280160" cy="274320"/>
+            <a:off x="777240" y="1801368"/>
+            <a:ext cx="3749040" cy="3474720"/>
           </a:xfrm>
-          <a:prstGeom prst="roundRect">
-            <a:avLst>
-              <a:gd name="adj" fmla="val 50000"/>
-            </a:avLst>
+          <a:prstGeom prst="rect">
+            <a:avLst/>
           </a:prstGeom>
-          <a:solidFill>
-            <a:schemeClr val="bg1"/>
-          </a:solidFill>
-          <a:ln w="15875">
-            <a:solidFill>
-              <a:schemeClr val="accent4"/>
-            </a:solidFill>
-          </a:ln>
+          <a:noFill/>
+          <a:ln/>
         </p:spPr>
         <p:txBody>
-          <a:bodyPr wrap="square" lIns="0" tIns="0" rIns="0" bIns="0" rtlCol="0" anchor="ctr"/>
+          <a:bodyPr wrap="square" lIns="0" tIns="0" rIns="0" bIns="0" rtlCol="0" anchor="t"/>
           <a:lstStyle/>
           <a:p>
-            <a:pPr algn="ctr" indent="0" marL="0">
-              <a:buNone/>
-            </a:pPr>
-            <a:r>
-              <a:rPr lang="en-US" sz="1100" b="1" dirty="0">
-                <a:solidFill>
-                  <a:schemeClr val="accent4"/>
-                </a:solidFill>
-              </a:rPr>
-              <a:t>조사일·시간 미정</a:t>
-            </a:r>
-            <a:endParaRPr lang="en-US" sz="1100" dirty="0"/>
+            <a:pPr marL="177800" indent="-177800">
+              <a:spcAft>
+                <a:spcPts val="700"/>
+              </a:spcAft>
+              <a:buSzPct val="100000"/>
+              <a:buChar char="•"/>
+            </a:pPr>
+            <a:r>
+              <a:rPr lang="en-US" sz="1300" dirty="0">
+                <a:solidFill>
+                  <a:schemeClr val="tx1"/>
+                </a:solidFill>
+              </a:rPr>
+              <a:t>차로 수·회전 구성 대조, 버스전용차로·유턴 표지 → 차로군 구성 영향 확인</a:t>
+            </a:r>
+            <a:endParaRPr lang="en-US" sz="1300" dirty="0"/>
+          </a:p>
+          <a:p>
+            <a:pPr marL="177800" indent="-177800">
+              <a:spcAft>
+                <a:spcPts val="700"/>
+              </a:spcAft>
+              <a:buSzPct val="100000"/>
+              <a:buChar char="•"/>
+            </a:pPr>
+            <a:r>
+              <a:rPr lang="en-US" sz="1300" dirty="0">
+                <a:solidFill>
+                  <a:schemeClr val="tx1"/>
+                </a:solidFill>
+              </a:rPr>
+              <a:t>신호주기·현시 순서, 현시별 녹색·황색·전적색시간</a:t>
+            </a:r>
+            <a:endParaRPr lang="en-US" sz="1300" dirty="0"/>
+          </a:p>
+          <a:p>
+            <a:pPr marL="177800" indent="-177800">
+              <a:spcAft>
+                <a:spcPts val="700"/>
+              </a:spcAft>
+              <a:buSzPct val="100000"/>
+              <a:buChar char="•"/>
+            </a:pPr>
+            <a:r>
+              <a:rPr lang="en-US" sz="1300" dirty="0">
+                <a:solidFill>
+                  <a:schemeClr val="tx1"/>
+                </a:solidFill>
+              </a:rPr>
+              <a:t>보행신호 시간·현시</a:t>
+            </a:r>
+            <a:endParaRPr lang="en-US" sz="1300" dirty="0"/>
+          </a:p>
+          <a:p>
+            <a:pPr marL="177800" indent="-177800">
+              <a:spcAft>
+                <a:spcPts val="700"/>
+              </a:spcAft>
+              <a:buSzPct val="100000"/>
+              <a:buChar char="•"/>
+            </a:pPr>
+            <a:r>
+              <a:rPr lang="en-US" sz="1300" dirty="0">
+                <a:solidFill>
+                  <a:schemeClr val="tx1"/>
+                </a:solidFill>
+              </a:rPr>
+              <a:t>3~5주기 예비 관측 → 변동이 있거나 관측이 불완전하면 추가 관측</a:t>
+            </a:r>
+            <a:endParaRPr lang="en-US" sz="1300" dirty="0"/>
+          </a:p>
+          <a:p>
+            <a:pPr marL="177800" indent="-177800">
+              <a:spcAft>
+                <a:spcPts val="700"/>
+              </a:spcAft>
+              <a:buSzPct val="100000"/>
+              <a:buChar char="•"/>
+            </a:pPr>
+            <a:r>
+              <a:rPr lang="en-US" sz="1300" dirty="0">
+                <a:solidFill>
+                  <a:schemeClr val="tx1"/>
+                </a:solidFill>
+              </a:rPr>
+              <a:t>조사 날짜·시간 기록, 사진 촬영</a:t>
+            </a:r>
+            <a:endParaRPr lang="en-US" sz="1300" dirty="0"/>
           </a:p>
         </p:txBody>
       </p:sp>
       <p:sp>
         <p:nvSpPr>
-          <p:cNvPr id="6" name="Text 4"/>
+          <p:cNvPr id="6" name="head-42"/>
           <p:cNvSpPr txBox="1"/>
           <p:nvPr/>
         </p:nvSpPr>
         <p:spPr>
           <a:xfrm>
-            <a:off x="777240" y="1828800"/>
-            <a:ext cx="4206240" cy="320040"/>
+            <a:off x="4937760" y="1234440"/>
+            <a:ext cx="3657600" cy="365760"/>
           </a:xfrm>
           <a:prstGeom prst="rect">
             <a:avLst/>
@@ -10181,38 +10706,720 @@
               <a:buNone/>
             </a:pPr>
             <a:r>
-              <a:rPr lang="en-US" sz="1400" b="1" dirty="0">
-                <a:solidFill>
-                  <a:schemeClr val="accent1"/>
-                </a:solidFill>
-              </a:rPr>
-              <a:t>일정  </a:t>
-            </a:r>
-            <a:pPr indent="0" marL="0">
-              <a:buNone/>
-            </a:pPr>
-            <a:r>
-              <a:rPr lang="en-US" sz="1400" dirty="0">
-                <a:solidFill>
-                  <a:schemeClr val="tx1"/>
-                </a:solidFill>
-              </a:rPr>
-              <a:t>평일 아침 또는 주말 중 가능한 시간</a:t>
-            </a:r>
-            <a:endParaRPr lang="en-US" sz="1400" dirty="0"/>
+              <a:rPr lang="en-US" sz="1600" b="1" dirty="0">
+                <a:solidFill>
+                  <a:schemeClr val="tx2"/>
+                </a:solidFill>
+              </a:rPr>
+              <a:t>조사 실행계획 (예정)</a:t>
+            </a:r>
+            <a:endParaRPr lang="en-US" sz="1600" dirty="0"/>
           </a:p>
         </p:txBody>
       </p:sp>
-      <p:sp>
-        <p:nvSpPr>
-          <p:cNvPr id="7" name="Text 5"/>
+      <p:graphicFrame>
+        <p:nvGraphicFramePr>
+          <p:cNvPr id="7" name="survey-plan"/>
+          <p:cNvGraphicFramePr>
+            <a:graphicFrameLocks noGrp="1"/>
+          </p:cNvGraphicFramePr>
+          <p:nvPr>
+            <p:extLst>
+              <p:ext uri="{D42A27DB-BD31-4B8C-83A1-F6EECF244321}">
+                <p14:modId xmlns:p14="http://schemas.microsoft.com/office/powerpoint/2010/main" val="1579011935"/>
+              </p:ext>
+            </p:extLst>
+          </p:nvPr>
+        </p:nvGraphicFramePr>
+        <p:xfrm>
+          <a:off x="4937760" y="1691640"/>
+          <a:ext cx="3657600" cy="914400"/>
+        </p:xfrm>
+        <a:graphic>
+          <a:graphicData uri="http://schemas.openxmlformats.org/drawingml/2006/table">
+            <a:tbl>
+              <a:tblPr/>
+              <a:tblGrid>
+                <a:gridCol w="914400"/>
+                <a:gridCol w="2743200"/>
+              </a:tblGrid>
+              <a:tr h="566928">
+                <a:tc>
+                  <a:txBody>
+                    <a:bodyPr/>
+                    <a:lstStyle/>
+                    <a:p>
+                      <a:pPr indent="0" marL="0">
+                        <a:buNone/>
+                      </a:pPr>
+                      <a:r>
+                        <a:rPr lang="en-US" sz="1200" b="1" dirty="0">
+                          <a:solidFill>
+                            <a:schemeClr val="tx2"/>
+                          </a:solidFill>
+                        </a:rPr>
+                        <a:t>조사일</a:t>
+                      </a:r>
+                      <a:endParaRPr lang="en-US" sz="1200" dirty="0"/>
+                    </a:p>
+                  </a:txBody>
+                  <a:tcPr marL="91440" marR="54864" marT="27432" marB="27432" anchor="ctr">
+                    <a:lnL w="9525" cap="flat" cmpd="sng" algn="ctr">
+                      <a:solidFill>
+                        <a:srgbClr val="D6E2F5"/>
+                      </a:solidFill>
+                      <a:prstDash val="solid"/>
+                      <a:round/>
+                      <a:headEnd type="none" w="med" len="med"/>
+                      <a:tailEnd type="none" w="med" len="med"/>
+                    </a:lnL>
+                    <a:lnR w="9525" cap="flat" cmpd="sng" algn="ctr">
+                      <a:solidFill>
+                        <a:srgbClr val="D6E2F5"/>
+                      </a:solidFill>
+                      <a:prstDash val="solid"/>
+                      <a:round/>
+                      <a:headEnd type="none" w="med" len="med"/>
+                      <a:tailEnd type="none" w="med" len="med"/>
+                    </a:lnR>
+                    <a:lnT w="9525" cap="flat" cmpd="sng" algn="ctr">
+                      <a:solidFill>
+                        <a:srgbClr val="D6E2F5"/>
+                      </a:solidFill>
+                      <a:prstDash val="solid"/>
+                      <a:round/>
+                      <a:headEnd type="none" w="med" len="med"/>
+                      <a:tailEnd type="none" w="med" len="med"/>
+                    </a:lnT>
+                    <a:lnB w="9525" cap="flat" cmpd="sng" algn="ctr">
+                      <a:solidFill>
+                        <a:srgbClr val="D6E2F5"/>
+                      </a:solidFill>
+                      <a:prstDash val="solid"/>
+                      <a:round/>
+                      <a:headEnd type="none" w="med" len="med"/>
+                      <a:tailEnd type="none" w="med" len="med"/>
+                    </a:lnB>
+                    <a:solidFill>
+                      <a:schemeClr val="bg2"/>
+                    </a:solidFill>
+                  </a:tcPr>
+                </a:tc>
+                <a:tc>
+                  <a:txBody>
+                    <a:bodyPr/>
+                    <a:lstStyle/>
+                    <a:p>
+                      <a:pPr indent="0" marL="0">
+                        <a:buNone/>
+                      </a:pPr>
+                      <a:r>
+                        <a:rPr lang="en-US" sz="1200" dirty="0">
+                          <a:solidFill>
+                            <a:schemeClr val="tx1"/>
+                          </a:solidFill>
+                        </a:rPr>
+                        <a:t>10월 말 </a:t>
+                      </a:r>
+                      <a:pPr indent="0" marL="0">
+                        <a:buNone/>
+                      </a:pPr>
+                      <a:r>
+                        <a:rPr lang="en-US" sz="1200" b="1" dirty="0">
+                          <a:solidFill>
+                            <a:schemeClr val="accent4"/>
+                          </a:solidFill>
+                        </a:rPr>
+                        <a:t>[날짜]</a:t>
+                      </a:r>
+                      <a:endParaRPr lang="en-US" sz="1200" dirty="0"/>
+                    </a:p>
+                  </a:txBody>
+                  <a:tcPr marL="91440" marR="54864" marT="27432" marB="27432" anchor="ctr">
+                    <a:lnL w="9525" cap="flat" cmpd="sng" algn="ctr">
+                      <a:solidFill>
+                        <a:srgbClr val="D6E2F5"/>
+                      </a:solidFill>
+                      <a:prstDash val="solid"/>
+                      <a:round/>
+                      <a:headEnd type="none" w="med" len="med"/>
+                      <a:tailEnd type="none" w="med" len="med"/>
+                    </a:lnL>
+                    <a:lnR w="9525" cap="flat" cmpd="sng" algn="ctr">
+                      <a:solidFill>
+                        <a:srgbClr val="D6E2F5"/>
+                      </a:solidFill>
+                      <a:prstDash val="solid"/>
+                      <a:round/>
+                      <a:headEnd type="none" w="med" len="med"/>
+                      <a:tailEnd type="none" w="med" len="med"/>
+                    </a:lnR>
+                    <a:lnT w="9525" cap="flat" cmpd="sng" algn="ctr">
+                      <a:solidFill>
+                        <a:srgbClr val="D6E2F5"/>
+                      </a:solidFill>
+                      <a:prstDash val="solid"/>
+                      <a:round/>
+                      <a:headEnd type="none" w="med" len="med"/>
+                      <a:tailEnd type="none" w="med" len="med"/>
+                    </a:lnT>
+                    <a:lnB w="9525" cap="flat" cmpd="sng" algn="ctr">
+                      <a:solidFill>
+                        <a:srgbClr val="D6E2F5"/>
+                      </a:solidFill>
+                      <a:prstDash val="solid"/>
+                      <a:round/>
+                      <a:headEnd type="none" w="med" len="med"/>
+                      <a:tailEnd type="none" w="med" len="med"/>
+                    </a:lnB>
+                  </a:tcPr>
+                </a:tc>
+              </a:tr>
+              <a:tr h="713232">
+                <a:tc>
+                  <a:txBody>
+                    <a:bodyPr/>
+                    <a:lstStyle/>
+                    <a:p>
+                      <a:pPr indent="0" marL="0">
+                        <a:buNone/>
+                      </a:pPr>
+                      <a:r>
+                        <a:rPr lang="en-US" sz="1200" b="1" dirty="0">
+                          <a:solidFill>
+                            <a:schemeClr val="tx2"/>
+                          </a:solidFill>
+                        </a:rPr>
+                        <a:t>시간대</a:t>
+                      </a:r>
+                      <a:endParaRPr lang="en-US" sz="1200" dirty="0"/>
+                    </a:p>
+                  </a:txBody>
+                  <a:tcPr marL="91440" marR="54864" marT="27432" marB="27432" anchor="ctr">
+                    <a:lnL w="9525" cap="flat" cmpd="sng" algn="ctr">
+                      <a:solidFill>
+                        <a:srgbClr val="D6E2F5"/>
+                      </a:solidFill>
+                      <a:prstDash val="solid"/>
+                      <a:round/>
+                      <a:headEnd type="none" w="med" len="med"/>
+                      <a:tailEnd type="none" w="med" len="med"/>
+                    </a:lnL>
+                    <a:lnR w="9525" cap="flat" cmpd="sng" algn="ctr">
+                      <a:solidFill>
+                        <a:srgbClr val="D6E2F5"/>
+                      </a:solidFill>
+                      <a:prstDash val="solid"/>
+                      <a:round/>
+                      <a:headEnd type="none" w="med" len="med"/>
+                      <a:tailEnd type="none" w="med" len="med"/>
+                    </a:lnR>
+                    <a:lnT w="9525" cap="flat" cmpd="sng" algn="ctr">
+                      <a:solidFill>
+                        <a:srgbClr val="D6E2F5"/>
+                      </a:solidFill>
+                      <a:prstDash val="solid"/>
+                      <a:round/>
+                      <a:headEnd type="none" w="med" len="med"/>
+                      <a:tailEnd type="none" w="med" len="med"/>
+                    </a:lnT>
+                    <a:lnB w="9525" cap="flat" cmpd="sng" algn="ctr">
+                      <a:solidFill>
+                        <a:srgbClr val="D6E2F5"/>
+                      </a:solidFill>
+                      <a:prstDash val="solid"/>
+                      <a:round/>
+                      <a:headEnd type="none" w="med" len="med"/>
+                      <a:tailEnd type="none" w="med" len="med"/>
+                    </a:lnB>
+                    <a:solidFill>
+                      <a:schemeClr val="bg2"/>
+                    </a:solidFill>
+                  </a:tcPr>
+                </a:tc>
+                <a:tc>
+                  <a:txBody>
+                    <a:bodyPr/>
+                    <a:lstStyle/>
+                    <a:p>
+                      <a:pPr indent="0" marL="0">
+                        <a:buNone/>
+                      </a:pPr>
+                      <a:r>
+                        <a:rPr lang="en-US" sz="1200" dirty="0">
+                          <a:solidFill>
+                            <a:schemeClr val="tx1"/>
+                          </a:solidFill>
+                        </a:rPr>
+                        <a:t>평일 오후 첨두(17:20~18:20) 포함 </a:t>
+                      </a:r>
+                      <a:pPr indent="0" marL="0">
+                        <a:buNone/>
+                      </a:pPr>
+                      <a:r>
+                        <a:rPr lang="en-US" sz="1200" b="1" dirty="0">
+                          <a:solidFill>
+                            <a:schemeClr val="accent4"/>
+                          </a:solidFill>
+                        </a:rPr>
+                        <a:t>[관측 시각]</a:t>
+                      </a:r>
+                      <a:endParaRPr lang="en-US" sz="1200" dirty="0"/>
+                    </a:p>
+                  </a:txBody>
+                  <a:tcPr marL="91440" marR="54864" marT="27432" marB="27432" anchor="ctr">
+                    <a:lnL w="9525" cap="flat" cmpd="sng" algn="ctr">
+                      <a:solidFill>
+                        <a:srgbClr val="D6E2F5"/>
+                      </a:solidFill>
+                      <a:prstDash val="solid"/>
+                      <a:round/>
+                      <a:headEnd type="none" w="med" len="med"/>
+                      <a:tailEnd type="none" w="med" len="med"/>
+                    </a:lnL>
+                    <a:lnR w="9525" cap="flat" cmpd="sng" algn="ctr">
+                      <a:solidFill>
+                        <a:srgbClr val="D6E2F5"/>
+                      </a:solidFill>
+                      <a:prstDash val="solid"/>
+                      <a:round/>
+                      <a:headEnd type="none" w="med" len="med"/>
+                      <a:tailEnd type="none" w="med" len="med"/>
+                    </a:lnR>
+                    <a:lnT w="9525" cap="flat" cmpd="sng" algn="ctr">
+                      <a:solidFill>
+                        <a:srgbClr val="D6E2F5"/>
+                      </a:solidFill>
+                      <a:prstDash val="solid"/>
+                      <a:round/>
+                      <a:headEnd type="none" w="med" len="med"/>
+                      <a:tailEnd type="none" w="med" len="med"/>
+                    </a:lnT>
+                    <a:lnB w="9525" cap="flat" cmpd="sng" algn="ctr">
+                      <a:solidFill>
+                        <a:srgbClr val="D6E2F5"/>
+                      </a:solidFill>
+                      <a:prstDash val="solid"/>
+                      <a:round/>
+                      <a:headEnd type="none" w="med" len="med"/>
+                      <a:tailEnd type="none" w="med" len="med"/>
+                    </a:lnB>
+                  </a:tcPr>
+                </a:tc>
+              </a:tr>
+              <a:tr h="566928">
+                <a:tc>
+                  <a:txBody>
+                    <a:bodyPr/>
+                    <a:lstStyle/>
+                    <a:p>
+                      <a:pPr indent="0" marL="0">
+                        <a:buNone/>
+                      </a:pPr>
+                      <a:r>
+                        <a:rPr lang="en-US" sz="1200" b="1" dirty="0">
+                          <a:solidFill>
+                            <a:schemeClr val="tx2"/>
+                          </a:solidFill>
+                        </a:rPr>
+                        <a:t>관측 위치</a:t>
+                      </a:r>
+                      <a:endParaRPr lang="en-US" sz="1200" dirty="0"/>
+                    </a:p>
+                  </a:txBody>
+                  <a:tcPr marL="91440" marR="54864" marT="27432" marB="27432" anchor="ctr">
+                    <a:lnL w="9525" cap="flat" cmpd="sng" algn="ctr">
+                      <a:solidFill>
+                        <a:srgbClr val="D6E2F5"/>
+                      </a:solidFill>
+                      <a:prstDash val="solid"/>
+                      <a:round/>
+                      <a:headEnd type="none" w="med" len="med"/>
+                      <a:tailEnd type="none" w="med" len="med"/>
+                    </a:lnL>
+                    <a:lnR w="9525" cap="flat" cmpd="sng" algn="ctr">
+                      <a:solidFill>
+                        <a:srgbClr val="D6E2F5"/>
+                      </a:solidFill>
+                      <a:prstDash val="solid"/>
+                      <a:round/>
+                      <a:headEnd type="none" w="med" len="med"/>
+                      <a:tailEnd type="none" w="med" len="med"/>
+                    </a:lnR>
+                    <a:lnT w="9525" cap="flat" cmpd="sng" algn="ctr">
+                      <a:solidFill>
+                        <a:srgbClr val="D6E2F5"/>
+                      </a:solidFill>
+                      <a:prstDash val="solid"/>
+                      <a:round/>
+                      <a:headEnd type="none" w="med" len="med"/>
+                      <a:tailEnd type="none" w="med" len="med"/>
+                    </a:lnT>
+                    <a:lnB w="9525" cap="flat" cmpd="sng" algn="ctr">
+                      <a:solidFill>
+                        <a:srgbClr val="D6E2F5"/>
+                      </a:solidFill>
+                      <a:prstDash val="solid"/>
+                      <a:round/>
+                      <a:headEnd type="none" w="med" len="med"/>
+                      <a:tailEnd type="none" w="med" len="med"/>
+                    </a:lnB>
+                    <a:solidFill>
+                      <a:schemeClr val="bg2"/>
+                    </a:solidFill>
+                  </a:tcPr>
+                </a:tc>
+                <a:tc>
+                  <a:txBody>
+                    <a:bodyPr/>
+                    <a:lstStyle/>
+                    <a:p>
+                      <a:pPr indent="0" marL="0">
+                        <a:buNone/>
+                      </a:pPr>
+                      <a:r>
+                        <a:rPr lang="en-US" sz="1200" dirty="0">
+                          <a:solidFill>
+                            <a:schemeClr val="tx1"/>
+                          </a:solidFill>
+                        </a:rPr>
+                        <a:t>교차로 모서리 보도 </a:t>
+                      </a:r>
+                      <a:pPr indent="0" marL="0">
+                        <a:buNone/>
+                      </a:pPr>
+                      <a:r>
+                        <a:rPr lang="en-US" sz="1200" b="1" dirty="0">
+                          <a:solidFill>
+                            <a:schemeClr val="accent4"/>
+                          </a:solidFill>
+                        </a:rPr>
+                        <a:t>[지점]</a:t>
+                      </a:r>
+                      <a:endParaRPr lang="en-US" sz="1200" dirty="0"/>
+                    </a:p>
+                  </a:txBody>
+                  <a:tcPr marL="91440" marR="54864" marT="27432" marB="27432" anchor="ctr">
+                    <a:lnL w="9525" cap="flat" cmpd="sng" algn="ctr">
+                      <a:solidFill>
+                        <a:srgbClr val="D6E2F5"/>
+                      </a:solidFill>
+                      <a:prstDash val="solid"/>
+                      <a:round/>
+                      <a:headEnd type="none" w="med" len="med"/>
+                      <a:tailEnd type="none" w="med" len="med"/>
+                    </a:lnL>
+                    <a:lnR w="9525" cap="flat" cmpd="sng" algn="ctr">
+                      <a:solidFill>
+                        <a:srgbClr val="D6E2F5"/>
+                      </a:solidFill>
+                      <a:prstDash val="solid"/>
+                      <a:round/>
+                      <a:headEnd type="none" w="med" len="med"/>
+                      <a:tailEnd type="none" w="med" len="med"/>
+                    </a:lnR>
+                    <a:lnT w="9525" cap="flat" cmpd="sng" algn="ctr">
+                      <a:solidFill>
+                        <a:srgbClr val="D6E2F5"/>
+                      </a:solidFill>
+                      <a:prstDash val="solid"/>
+                      <a:round/>
+                      <a:headEnd type="none" w="med" len="med"/>
+                      <a:tailEnd type="none" w="med" len="med"/>
+                    </a:lnT>
+                    <a:lnB w="9525" cap="flat" cmpd="sng" algn="ctr">
+                      <a:solidFill>
+                        <a:srgbClr val="D6E2F5"/>
+                      </a:solidFill>
+                      <a:prstDash val="solid"/>
+                      <a:round/>
+                      <a:headEnd type="none" w="med" len="med"/>
+                      <a:tailEnd type="none" w="med" len="med"/>
+                    </a:lnB>
+                  </a:tcPr>
+                </a:tc>
+              </a:tr>
+              <a:tr h="713232">
+                <a:tc>
+                  <a:txBody>
+                    <a:bodyPr/>
+                    <a:lstStyle/>
+                    <a:p>
+                      <a:pPr indent="0" marL="0">
+                        <a:buNone/>
+                      </a:pPr>
+                      <a:r>
+                        <a:rPr lang="en-US" sz="1200" b="1" dirty="0">
+                          <a:solidFill>
+                            <a:schemeClr val="tx2"/>
+                          </a:solidFill>
+                        </a:rPr>
+                        <a:t>담당</a:t>
+                      </a:r>
+                      <a:endParaRPr lang="en-US" sz="1200" dirty="0"/>
+                    </a:p>
+                  </a:txBody>
+                  <a:tcPr marL="91440" marR="54864" marT="27432" marB="27432" anchor="ctr">
+                    <a:lnL w="9525" cap="flat" cmpd="sng" algn="ctr">
+                      <a:solidFill>
+                        <a:srgbClr val="D6E2F5"/>
+                      </a:solidFill>
+                      <a:prstDash val="solid"/>
+                      <a:round/>
+                      <a:headEnd type="none" w="med" len="med"/>
+                      <a:tailEnd type="none" w="med" len="med"/>
+                    </a:lnL>
+                    <a:lnR w="9525" cap="flat" cmpd="sng" algn="ctr">
+                      <a:solidFill>
+                        <a:srgbClr val="D6E2F5"/>
+                      </a:solidFill>
+                      <a:prstDash val="solid"/>
+                      <a:round/>
+                      <a:headEnd type="none" w="med" len="med"/>
+                      <a:tailEnd type="none" w="med" len="med"/>
+                    </a:lnR>
+                    <a:lnT w="9525" cap="flat" cmpd="sng" algn="ctr">
+                      <a:solidFill>
+                        <a:srgbClr val="D6E2F5"/>
+                      </a:solidFill>
+                      <a:prstDash val="solid"/>
+                      <a:round/>
+                      <a:headEnd type="none" w="med" len="med"/>
+                      <a:tailEnd type="none" w="med" len="med"/>
+                    </a:lnT>
+                    <a:lnB w="9525" cap="flat" cmpd="sng" algn="ctr">
+                      <a:solidFill>
+                        <a:srgbClr val="D6E2F5"/>
+                      </a:solidFill>
+                      <a:prstDash val="solid"/>
+                      <a:round/>
+                      <a:headEnd type="none" w="med" len="med"/>
+                      <a:tailEnd type="none" w="med" len="med"/>
+                    </a:lnB>
+                    <a:solidFill>
+                      <a:schemeClr val="bg2"/>
+                    </a:solidFill>
+                  </a:tcPr>
+                </a:tc>
+                <a:tc>
+                  <a:txBody>
+                    <a:bodyPr/>
+                    <a:lstStyle/>
+                    <a:p>
+                      <a:pPr indent="0" marL="0">
+                        <a:buNone/>
+                      </a:pPr>
+                      <a:r>
+                        <a:rPr lang="en-US" sz="1200" dirty="0">
+                          <a:solidFill>
+                            <a:schemeClr val="tx1"/>
+                          </a:solidFill>
+                        </a:rPr>
+                        <a:t>신호시간: 전현규</a:t>
+                      </a:r>
+                      <a:endParaRPr lang="en-US" sz="1200" dirty="0"/>
+                    </a:p>
+                    <a:p>
+                      <a:pPr indent="0" marL="0">
+                        <a:buNone/>
+                      </a:pPr>
+                      <a:r>
+                        <a:rPr lang="en-US" sz="1200" dirty="0">
+                          <a:solidFill>
+                            <a:schemeClr val="tx1"/>
+                          </a:solidFill>
+                        </a:rPr>
+                        <a:t>차로·표지·사진: 송동석 </a:t>
+                      </a:r>
+                      <a:pPr indent="0" marL="0">
+                        <a:buNone/>
+                      </a:pPr>
+                      <a:r>
+                        <a:rPr lang="en-US" sz="1200" b="1" dirty="0">
+                          <a:solidFill>
+                            <a:schemeClr val="accent4"/>
+                          </a:solidFill>
+                        </a:rPr>
+                        <a:t>[확인]</a:t>
+                      </a:r>
+                      <a:endParaRPr lang="en-US" sz="1200" dirty="0"/>
+                    </a:p>
+                  </a:txBody>
+                  <a:tcPr marL="91440" marR="54864" marT="27432" marB="27432" anchor="ctr">
+                    <a:lnL w="9525" cap="flat" cmpd="sng" algn="ctr">
+                      <a:solidFill>
+                        <a:srgbClr val="D6E2F5"/>
+                      </a:solidFill>
+                      <a:prstDash val="solid"/>
+                      <a:round/>
+                      <a:headEnd type="none" w="med" len="med"/>
+                      <a:tailEnd type="none" w="med" len="med"/>
+                    </a:lnL>
+                    <a:lnR w="9525" cap="flat" cmpd="sng" algn="ctr">
+                      <a:solidFill>
+                        <a:srgbClr val="D6E2F5"/>
+                      </a:solidFill>
+                      <a:prstDash val="solid"/>
+                      <a:round/>
+                      <a:headEnd type="none" w="med" len="med"/>
+                      <a:tailEnd type="none" w="med" len="med"/>
+                    </a:lnR>
+                    <a:lnT w="9525" cap="flat" cmpd="sng" algn="ctr">
+                      <a:solidFill>
+                        <a:srgbClr val="D6E2F5"/>
+                      </a:solidFill>
+                      <a:prstDash val="solid"/>
+                      <a:round/>
+                      <a:headEnd type="none" w="med" len="med"/>
+                      <a:tailEnd type="none" w="med" len="med"/>
+                    </a:lnT>
+                    <a:lnB w="9525" cap="flat" cmpd="sng" algn="ctr">
+                      <a:solidFill>
+                        <a:srgbClr val="D6E2F5"/>
+                      </a:solidFill>
+                      <a:prstDash val="solid"/>
+                      <a:round/>
+                      <a:headEnd type="none" w="med" len="med"/>
+                      <a:tailEnd type="none" w="med" len="med"/>
+                    </a:lnB>
+                  </a:tcPr>
+                </a:tc>
+              </a:tr>
+              <a:tr h="566928">
+                <a:tc>
+                  <a:txBody>
+                    <a:bodyPr/>
+                    <a:lstStyle/>
+                    <a:p>
+                      <a:pPr indent="0" marL="0">
+                        <a:buNone/>
+                      </a:pPr>
+                      <a:r>
+                        <a:rPr lang="en-US" sz="1200" b="1" dirty="0">
+                          <a:solidFill>
+                            <a:schemeClr val="tx2"/>
+                          </a:solidFill>
+                        </a:rPr>
+                        <a:t>기록 방식</a:t>
+                      </a:r>
+                      <a:endParaRPr lang="en-US" sz="1200" dirty="0"/>
+                    </a:p>
+                  </a:txBody>
+                  <a:tcPr marL="91440" marR="54864" marT="27432" marB="27432" anchor="ctr">
+                    <a:lnL w="9525" cap="flat" cmpd="sng" algn="ctr">
+                      <a:solidFill>
+                        <a:srgbClr val="D6E2F5"/>
+                      </a:solidFill>
+                      <a:prstDash val="solid"/>
+                      <a:round/>
+                      <a:headEnd type="none" w="med" len="med"/>
+                      <a:tailEnd type="none" w="med" len="med"/>
+                    </a:lnL>
+                    <a:lnR w="9525" cap="flat" cmpd="sng" algn="ctr">
+                      <a:solidFill>
+                        <a:srgbClr val="D6E2F5"/>
+                      </a:solidFill>
+                      <a:prstDash val="solid"/>
+                      <a:round/>
+                      <a:headEnd type="none" w="med" len="med"/>
+                      <a:tailEnd type="none" w="med" len="med"/>
+                    </a:lnR>
+                    <a:lnT w="9525" cap="flat" cmpd="sng" algn="ctr">
+                      <a:solidFill>
+                        <a:srgbClr val="D6E2F5"/>
+                      </a:solidFill>
+                      <a:prstDash val="solid"/>
+                      <a:round/>
+                      <a:headEnd type="none" w="med" len="med"/>
+                      <a:tailEnd type="none" w="med" len="med"/>
+                    </a:lnT>
+                    <a:lnB w="9525" cap="flat" cmpd="sng" algn="ctr">
+                      <a:solidFill>
+                        <a:srgbClr val="D6E2F5"/>
+                      </a:solidFill>
+                      <a:prstDash val="solid"/>
+                      <a:round/>
+                      <a:headEnd type="none" w="med" len="med"/>
+                      <a:tailEnd type="none" w="med" len="med"/>
+                    </a:lnB>
+                    <a:solidFill>
+                      <a:schemeClr val="bg2"/>
+                    </a:solidFill>
+                  </a:tcPr>
+                </a:tc>
+                <a:tc>
+                  <a:txBody>
+                    <a:bodyPr/>
+                    <a:lstStyle/>
+                    <a:p>
+                      <a:pPr indent="0" marL="0">
+                        <a:buNone/>
+                      </a:pPr>
+                      <a:r>
+                        <a:rPr lang="en-US" sz="1200" dirty="0">
+                          <a:solidFill>
+                            <a:schemeClr val="tx1"/>
+                          </a:solidFill>
+                        </a:rPr>
+                        <a:t>현시별 기록지 + 스톱워치, 사진·영상</a:t>
+                      </a:r>
+                      <a:endParaRPr lang="en-US" sz="1200" dirty="0"/>
+                    </a:p>
+                  </a:txBody>
+                  <a:tcPr marL="91440" marR="54864" marT="27432" marB="27432" anchor="ctr">
+                    <a:lnL w="9525" cap="flat" cmpd="sng" algn="ctr">
+                      <a:solidFill>
+                        <a:srgbClr val="D6E2F5"/>
+                      </a:solidFill>
+                      <a:prstDash val="solid"/>
+                      <a:round/>
+                      <a:headEnd type="none" w="med" len="med"/>
+                      <a:tailEnd type="none" w="med" len="med"/>
+                    </a:lnL>
+                    <a:lnR w="9525" cap="flat" cmpd="sng" algn="ctr">
+                      <a:solidFill>
+                        <a:srgbClr val="D6E2F5"/>
+                      </a:solidFill>
+                      <a:prstDash val="solid"/>
+                      <a:round/>
+                      <a:headEnd type="none" w="med" len="med"/>
+                      <a:tailEnd type="none" w="med" len="med"/>
+                    </a:lnR>
+                    <a:lnT w="9525" cap="flat" cmpd="sng" algn="ctr">
+                      <a:solidFill>
+                        <a:srgbClr val="D6E2F5"/>
+                      </a:solidFill>
+                      <a:prstDash val="solid"/>
+                      <a:round/>
+                      <a:headEnd type="none" w="med" len="med"/>
+                      <a:tailEnd type="none" w="med" len="med"/>
+                    </a:lnT>
+                    <a:lnB w="9525" cap="flat" cmpd="sng" algn="ctr">
+                      <a:solidFill>
+                        <a:srgbClr val="D6E2F5"/>
+                      </a:solidFill>
+                      <a:prstDash val="solid"/>
+                      <a:round/>
+                      <a:headEnd type="none" w="med" len="med"/>
+                      <a:tailEnd type="none" w="med" len="med"/>
+                    </a:lnB>
+                  </a:tcPr>
+                </a:tc>
+              </a:tr>
+            </a:tbl>
+          </a:graphicData>
+        </a:graphic>
+      </p:graphicFrame>
+      <p:sp>
+        <p:nvSpPr>
+          <p:cNvPr id="8" name="Text 5"/>
           <p:cNvSpPr txBox="1"/>
           <p:nvPr/>
         </p:nvSpPr>
         <p:spPr>
           <a:xfrm>
-            <a:off x="777240" y="2286000"/>
-            <a:ext cx="4251960" cy="2926080"/>
+            <a:off x="4937760" y="4892040"/>
+            <a:ext cx="3657600" cy="502920"/>
           </a:xfrm>
           <a:prstGeom prst="rect">
             <a:avLst/>
@@ -10224,134 +11431,42 @@
           <a:bodyPr wrap="square" lIns="0" tIns="0" rIns="0" bIns="0" rtlCol="0" anchor="t"/>
           <a:lstStyle/>
           <a:p>
-            <a:pPr marL="177800" indent="-177800">
-              <a:spcAft>
-                <a:spcPts val="900"/>
-              </a:spcAft>
-              <a:buSzPct val="100000"/>
-              <a:buChar char="•"/>
-            </a:pPr>
-            <a:r>
-              <a:rPr lang="en-US" sz="1400" dirty="0">
+            <a:pPr indent="0" marL="0">
+              <a:buNone/>
+            </a:pPr>
+            <a:r>
+              <a:rPr lang="en-US" sz="1200" b="1" dirty="0">
+                <a:solidFill>
+                  <a:schemeClr val="accent1"/>
+                </a:solidFill>
+              </a:rPr>
+              <a:t>고속도로  </a:t>
+            </a:r>
+            <a:pPr indent="0" marL="0">
+              <a:buNone/>
+            </a:pPr>
+            <a:r>
+              <a:rPr lang="en-US" sz="1200" dirty="0">
                 <a:solidFill>
                   <a:schemeClr val="tx1"/>
                 </a:solidFill>
               </a:rPr>
-              <a:t>차로 수·회전 구성·버스전용차로·유턴 표지 확인</a:t>
-            </a:r>
-            <a:endParaRPr lang="en-US" sz="1400" dirty="0"/>
-          </a:p>
-          <a:p>
-            <a:pPr marL="177800" indent="-177800">
-              <a:spcAft>
-                <a:spcPts val="900"/>
-              </a:spcAft>
-              <a:buSzPct val="100000"/>
-              <a:buChar char="•"/>
-            </a:pPr>
-            <a:r>
-              <a:rPr lang="en-US" sz="1400" dirty="0">
-                <a:solidFill>
-                  <a:schemeClr val="tx1"/>
-                </a:solidFill>
-              </a:rPr>
-              <a:t>신호주기·현시 순서·현시별 녹색 및 황색시간 기록</a:t>
-            </a:r>
-            <a:endParaRPr lang="en-US" sz="1400" dirty="0"/>
-          </a:p>
-          <a:p>
-            <a:pPr marL="177800" indent="-177800">
-              <a:spcAft>
-                <a:spcPts val="900"/>
-              </a:spcAft>
-              <a:buSzPct val="100000"/>
-              <a:buChar char="•"/>
-            </a:pPr>
-            <a:r>
-              <a:rPr lang="en-US" sz="1400" dirty="0">
-                <a:solidFill>
-                  <a:schemeClr val="tx1"/>
-                </a:solidFill>
-              </a:rPr>
-              <a:t>신호 3~5주기 반복 관측 → 변동 여부 확인</a:t>
-            </a:r>
-            <a:endParaRPr lang="en-US" sz="1400" dirty="0"/>
-          </a:p>
-          <a:p>
-            <a:pPr marL="177800" indent="-177800">
-              <a:spcAft>
-                <a:spcPts val="900"/>
-              </a:spcAft>
-              <a:buSzPct val="100000"/>
-              <a:buChar char="•"/>
-            </a:pPr>
-            <a:r>
-              <a:rPr lang="en-US" sz="1400" dirty="0">
-                <a:solidFill>
-                  <a:schemeClr val="tx1"/>
-                </a:solidFill>
-              </a:rPr>
-              <a:t>조사 날짜·시간과 사진 기록</a:t>
-            </a:r>
-            <a:endParaRPr lang="en-US" sz="1400" dirty="0"/>
-          </a:p>
-          <a:p>
-            <a:pPr marL="177800" indent="-177800">
-              <a:spcAft>
-                <a:spcPts val="900"/>
-              </a:spcAft>
-              <a:buSzPct val="100000"/>
-              <a:buChar char="•"/>
-            </a:pPr>
-            <a:r>
-              <a:rPr lang="en-US" sz="1400" dirty="0">
-                <a:solidFill>
-                  <a:schemeClr val="tx1"/>
-                </a:solidFill>
-              </a:rPr>
-              <a:t>보도 등 안전한 관측 위치에서 조사</a:t>
-            </a:r>
-            <a:endParaRPr lang="en-US" sz="1400" dirty="0"/>
+              <a:t>공개자료·기관 문의로 도로 조건·중차량 구성비·VDS 설치정보 보완 (3장)</a:t>
+            </a:r>
+            <a:endParaRPr lang="en-US" sz="1200" dirty="0"/>
           </a:p>
         </p:txBody>
       </p:sp>
       <p:sp>
         <p:nvSpPr>
-          <p:cNvPr id="8" name="card-43"/>
-          <p:cNvSpPr/>
+          <p:cNvPr id="9" name="head-43"/>
+          <p:cNvSpPr txBox="1"/>
           <p:nvPr/>
         </p:nvSpPr>
         <p:spPr>
           <a:xfrm>
-            <a:off x="5486400" y="1234440"/>
-            <a:ext cx="2971800" cy="1828800"/>
-          </a:xfrm>
-          <a:prstGeom prst="roundRect">
-            <a:avLst>
-              <a:gd name="adj" fmla="val 4000"/>
-            </a:avLst>
-          </a:prstGeom>
-          <a:solidFill>
-            <a:schemeClr val="bg2"/>
-          </a:solidFill>
-          <a:ln w="12700">
-            <a:solidFill>
-              <a:schemeClr val="bg2"/>
-            </a:solidFill>
-            <a:prstDash val="solid"/>
-          </a:ln>
-        </p:spPr>
-      </p:sp>
-      <p:sp>
-        <p:nvSpPr>
-          <p:cNvPr id="9" name="head-44"/>
-          <p:cNvSpPr txBox="1"/>
-          <p:nvPr/>
-        </p:nvSpPr>
-        <p:spPr>
-          <a:xfrm>
-            <a:off x="5715000" y="1371600"/>
-            <a:ext cx="2514600" cy="365760"/>
+            <a:off x="8823960" y="1234440"/>
+            <a:ext cx="2816352" cy="365760"/>
           </a:xfrm>
           <a:prstGeom prst="rect">
             <a:avLst/>
@@ -10372,7 +11487,7 @@
                   <a:schemeClr val="tx2"/>
                 </a:solidFill>
               </a:rPr>
-              <a:t>고속도로 추가 조사</a:t>
+              <a:t>향후 분석</a:t>
             </a:r>
             <a:endParaRPr lang="en-US" sz="1600" dirty="0"/>
           </a:p>
@@ -10380,195 +11495,14 @@
       </p:sp>
       <p:sp>
         <p:nvSpPr>
-          <p:cNvPr id="10" name="Text 8"/>
+          <p:cNvPr id="10" name="step-num-44"/>
           <p:cNvSpPr txBox="1"/>
           <p:nvPr/>
         </p:nvSpPr>
         <p:spPr>
           <a:xfrm>
-            <a:off x="5715000" y="1828800"/>
-            <a:ext cx="2560320" cy="1097280"/>
-          </a:xfrm>
-          <a:prstGeom prst="rect">
-            <a:avLst/>
-          </a:prstGeom>
-          <a:noFill/>
-          <a:ln/>
-        </p:spPr>
-        <p:txBody>
-          <a:bodyPr wrap="square" lIns="0" tIns="0" rIns="0" bIns="0" rtlCol="0" anchor="t"/>
-          <a:lstStyle/>
-          <a:p>
-            <a:pPr indent="0" marL="0">
-              <a:spcAft>
-                <a:spcPts val="800"/>
-              </a:spcAft>
-              <a:buNone/>
-            </a:pPr>
-            <a:r>
-              <a:rPr lang="en-US" sz="1400" dirty="0">
-                <a:solidFill>
-                  <a:schemeClr val="tx1"/>
-                </a:solidFill>
-              </a:rPr>
-              <a:t>공개자료와 기관 문의 중심으로 보완</a:t>
-            </a:r>
-            <a:endParaRPr lang="en-US" sz="1400" dirty="0"/>
-          </a:p>
-          <a:p>
-            <a:pPr indent="0" marL="0">
-              <a:spcAft>
-                <a:spcPts val="800"/>
-              </a:spcAft>
-              <a:buNone/>
-            </a:pPr>
-            <a:r>
-              <a:rPr lang="en-US" sz="1400" b="1" dirty="0">
-                <a:solidFill>
-                  <a:schemeClr val="tx2"/>
-                </a:solidFill>
-              </a:rPr>
-              <a:t>도로 조건 · 중차량 구성비 · VDS 설치정보</a:t>
-            </a:r>
-            <a:endParaRPr lang="en-US" sz="1400" dirty="0"/>
-          </a:p>
-        </p:txBody>
-      </p:sp>
-      <p:sp>
-        <p:nvSpPr>
-          <p:cNvPr id="11" name="image-slot-45"/>
-          <p:cNvSpPr/>
-          <p:nvPr/>
-        </p:nvSpPr>
-        <p:spPr>
-          <a:xfrm>
-            <a:off x="5486400" y="3291840"/>
-            <a:ext cx="2971800" cy="2057400"/>
-          </a:xfrm>
-          <a:prstGeom prst="rect">
-            <a:avLst/>
-          </a:prstGeom>
-          <a:solidFill>
-            <a:schemeClr val="bg2"/>
-          </a:solidFill>
-          <a:ln w="19050">
-            <a:solidFill>
-              <a:schemeClr val="accent3"/>
-            </a:solidFill>
-            <a:prstDash val="dash"/>
-          </a:ln>
-        </p:spPr>
-      </p:sp>
-      <p:sp>
-        <p:nvSpPr>
-          <p:cNvPr id="12" name="image-slot-label-46"/>
-          <p:cNvSpPr txBox="1"/>
-          <p:nvPr/>
-        </p:nvSpPr>
-        <p:spPr>
-          <a:xfrm>
-            <a:off x="5669280" y="3474720"/>
-            <a:ext cx="2606040" cy="1691640"/>
-          </a:xfrm>
-          <a:prstGeom prst="rect">
-            <a:avLst/>
-          </a:prstGeom>
-          <a:noFill/>
-          <a:ln/>
-        </p:spPr>
-        <p:txBody>
-          <a:bodyPr wrap="square" lIns="0" tIns="0" rIns="0" bIns="0" rtlCol="0" anchor="ctr"/>
-          <a:lstStyle/>
-          <a:p>
-            <a:pPr algn="ctr" indent="0" marL="0">
-              <a:buNone/>
-            </a:pPr>
-            <a:r>
-              <a:rPr lang="en-US" sz="1600" b="1" dirty="0">
-                <a:solidFill>
-                  <a:schemeClr val="accent1"/>
-                </a:solidFill>
-              </a:rPr>
-              <a:t>현장사진 삽입 위치</a:t>
-            </a:r>
-            <a:endParaRPr lang="en-US" sz="1600" dirty="0"/>
-          </a:p>
-          <a:p>
-            <a:pPr algn="ctr" indent="0" marL="0">
-              <a:buNone/>
-            </a:pPr>
-            <a:r>
-              <a:rPr lang="en-US" sz="800" dirty="0">
-                <a:solidFill>
-                  <a:srgbClr val="000000"/>
-                </a:solidFill>
-              </a:rPr>
-              <a:t> </a:t>
-            </a:r>
-            <a:endParaRPr lang="en-US" sz="1600" dirty="0"/>
-          </a:p>
-          <a:p>
-            <a:pPr algn="ctr" indent="0" marL="0">
-              <a:buNone/>
-            </a:pPr>
-            <a:r>
-              <a:rPr lang="en-US" sz="1200" dirty="0">
-                <a:solidFill>
-                  <a:schemeClr val="accent5"/>
-                </a:solidFill>
-              </a:rPr>
-              <a:t>현장조사 후 추가</a:t>
-            </a:r>
-            <a:endParaRPr lang="en-US" sz="1600" dirty="0"/>
-          </a:p>
-        </p:txBody>
-      </p:sp>
-      <p:sp>
-        <p:nvSpPr>
-          <p:cNvPr id="13" name="head-47"/>
-          <p:cNvSpPr txBox="1"/>
-          <p:nvPr/>
-        </p:nvSpPr>
-        <p:spPr>
-          <a:xfrm>
-            <a:off x="8732520" y="1234440"/>
-            <a:ext cx="2907792" cy="365760"/>
-          </a:xfrm>
-          <a:prstGeom prst="rect">
-            <a:avLst/>
-          </a:prstGeom>
-          <a:noFill/>
-          <a:ln/>
-        </p:spPr>
-        <p:txBody>
-          <a:bodyPr wrap="square" lIns="0" tIns="0" rIns="0" bIns="0" rtlCol="0" anchor="ctr"/>
-          <a:lstStyle/>
-          <a:p>
-            <a:pPr indent="0" marL="0">
-              <a:buNone/>
-            </a:pPr>
-            <a:r>
-              <a:rPr lang="en-US" sz="1600" b="1" dirty="0">
-                <a:solidFill>
-                  <a:schemeClr val="tx2"/>
-                </a:solidFill>
-              </a:rPr>
-              <a:t>향후 분석</a:t>
-            </a:r>
-            <a:endParaRPr lang="en-US" sz="1600" dirty="0"/>
-          </a:p>
-        </p:txBody>
-      </p:sp>
-      <p:sp>
-        <p:nvSpPr>
-          <p:cNvPr id="14" name="step-num-48"/>
-          <p:cNvSpPr txBox="1"/>
-          <p:nvPr/>
-        </p:nvSpPr>
-        <p:spPr>
-          <a:xfrm>
-            <a:off x="8732520" y="1801368"/>
-            <a:ext cx="411480" cy="411480"/>
+            <a:off x="8823960" y="1874520"/>
+            <a:ext cx="384048" cy="384048"/>
           </a:xfrm>
           <a:prstGeom prst="ellipse">
             <a:avLst/>
@@ -10590,27 +11524,27 @@
               <a:buNone/>
             </a:pPr>
             <a:r>
-              <a:rPr lang="en-US" sz="1400" b="1" dirty="0">
+              <a:rPr lang="en-US" sz="1300" b="1" dirty="0">
                 <a:solidFill>
                   <a:schemeClr val="bg1"/>
                 </a:solidFill>
               </a:rPr>
               <a:t>1</a:t>
             </a:r>
-            <a:endParaRPr lang="en-US" sz="1400" dirty="0"/>
+            <a:endParaRPr lang="en-US" sz="1300" dirty="0"/>
           </a:p>
         </p:txBody>
       </p:sp>
       <p:sp>
         <p:nvSpPr>
-          <p:cNvPr id="15" name="Text 13"/>
+          <p:cNvPr id="11" name="Text 8"/>
           <p:cNvSpPr txBox="1"/>
           <p:nvPr/>
         </p:nvSpPr>
         <p:spPr>
           <a:xfrm>
-            <a:off x="9281160" y="1691640"/>
-            <a:ext cx="2359152" cy="640080"/>
+            <a:off x="9326880" y="1737360"/>
+            <a:ext cx="2313432" cy="685800"/>
           </a:xfrm>
           <a:prstGeom prst="rect">
             <a:avLst/>
@@ -10626,27 +11560,27 @@
               <a:buNone/>
             </a:pPr>
             <a:r>
-              <a:rPr lang="en-US" sz="1400" dirty="0">
+              <a:rPr lang="en-US" sz="1300" dirty="0">
                 <a:solidFill>
                   <a:schemeClr val="tx1"/>
                 </a:solidFill>
               </a:rPr>
               <a:t>현장조사 결과와 기존 자료 대조</a:t>
             </a:r>
-            <a:endParaRPr lang="en-US" sz="1400" dirty="0"/>
+            <a:endParaRPr lang="en-US" sz="1300" dirty="0"/>
           </a:p>
         </p:txBody>
       </p:sp>
       <p:sp>
         <p:nvSpPr>
-          <p:cNvPr id="16" name="step-num-49"/>
+          <p:cNvPr id="12" name="step-num-45"/>
           <p:cNvSpPr txBox="1"/>
           <p:nvPr/>
         </p:nvSpPr>
         <p:spPr>
           <a:xfrm>
-            <a:off x="8732520" y="2715768"/>
-            <a:ext cx="411480" cy="411480"/>
+            <a:off x="8823960" y="2788920"/>
+            <a:ext cx="384048" cy="384048"/>
           </a:xfrm>
           <a:prstGeom prst="ellipse">
             <a:avLst/>
@@ -10668,27 +11602,27 @@
               <a:buNone/>
             </a:pPr>
             <a:r>
-              <a:rPr lang="en-US" sz="1400" b="1" dirty="0">
+              <a:rPr lang="en-US" sz="1300" b="1" dirty="0">
                 <a:solidFill>
                   <a:schemeClr val="bg1"/>
                 </a:solidFill>
               </a:rPr>
               <a:t>2</a:t>
             </a:r>
-            <a:endParaRPr lang="en-US" sz="1400" dirty="0"/>
+            <a:endParaRPr lang="en-US" sz="1300" dirty="0"/>
           </a:p>
         </p:txBody>
       </p:sp>
       <p:sp>
         <p:nvSpPr>
-          <p:cNvPr id="17" name="Text 15"/>
+          <p:cNvPr id="13" name="Text 10"/>
           <p:cNvSpPr txBox="1"/>
           <p:nvPr/>
         </p:nvSpPr>
         <p:spPr>
           <a:xfrm>
-            <a:off x="9281160" y="2606040"/>
-            <a:ext cx="2359152" cy="640080"/>
+            <a:off x="9326880" y="2651760"/>
+            <a:ext cx="2313432" cy="685800"/>
           </a:xfrm>
           <a:prstGeom prst="rect">
             <a:avLst/>
@@ -10704,27 +11638,27 @@
               <a:buNone/>
             </a:pPr>
             <a:r>
-              <a:rPr lang="en-US" sz="1400" dirty="0">
+              <a:rPr lang="en-US" sz="1300" b="1" dirty="0">
                 <a:solidFill>
                   <a:schemeClr val="tx1"/>
                 </a:solidFill>
               </a:rPr>
-              <a:t>최종 분석용 교통량과 신호 운영의 시간대 일치</a:t>
-            </a:r>
-            <a:endParaRPr lang="en-US" sz="1400" dirty="0"/>
+              <a:t>분석 교통량(오후 첨두)과 관측 신호의 시간대·운영조건 일치 확인</a:t>
+            </a:r>
+            <a:endParaRPr lang="en-US" sz="1300" dirty="0"/>
           </a:p>
         </p:txBody>
       </p:sp>
       <p:sp>
         <p:nvSpPr>
-          <p:cNvPr id="18" name="step-num-50"/>
+          <p:cNvPr id="14" name="step-num-46"/>
           <p:cNvSpPr txBox="1"/>
           <p:nvPr/>
         </p:nvSpPr>
         <p:spPr>
           <a:xfrm>
-            <a:off x="8732520" y="3630168"/>
-            <a:ext cx="411480" cy="411480"/>
+            <a:off x="8823960" y="3703320"/>
+            <a:ext cx="384048" cy="384048"/>
           </a:xfrm>
           <a:prstGeom prst="ellipse">
             <a:avLst/>
@@ -10746,27 +11680,27 @@
               <a:buNone/>
             </a:pPr>
             <a:r>
-              <a:rPr lang="en-US" sz="1400" b="1" dirty="0">
+              <a:rPr lang="en-US" sz="1300" b="1" dirty="0">
                 <a:solidFill>
                   <a:schemeClr val="bg1"/>
                 </a:solidFill>
               </a:rPr>
               <a:t>3</a:t>
             </a:r>
-            <a:endParaRPr lang="en-US" sz="1400" dirty="0"/>
+            <a:endParaRPr lang="en-US" sz="1300" dirty="0"/>
           </a:p>
         </p:txBody>
       </p:sp>
       <p:sp>
         <p:nvSpPr>
-          <p:cNvPr id="19" name="Text 17"/>
+          <p:cNvPr id="15" name="Text 12"/>
           <p:cNvSpPr txBox="1"/>
           <p:nvPr/>
         </p:nvSpPr>
         <p:spPr>
           <a:xfrm>
-            <a:off x="9281160" y="3520440"/>
-            <a:ext cx="2359152" cy="640080"/>
+            <a:off x="9326880" y="3566160"/>
+            <a:ext cx="2313432" cy="685800"/>
           </a:xfrm>
           <a:prstGeom prst="rect">
             <a:avLst/>
@@ -10782,27 +11716,27 @@
               <a:buNone/>
             </a:pPr>
             <a:r>
-              <a:rPr lang="en-US" sz="1400" dirty="0">
+              <a:rPr lang="en-US" sz="1300" dirty="0">
                 <a:solidFill>
                   <a:schemeClr val="tx1"/>
                 </a:solidFill>
               </a:rPr>
-              <a:t>용량·서비스수준 산정에 필요한 추가 항목 확인</a:t>
-            </a:r>
-            <a:endParaRPr lang="en-US" sz="1400" dirty="0"/>
+              <a:t>용량·서비스수준 산정 필요 항목 확인</a:t>
+            </a:r>
+            <a:endParaRPr lang="en-US" sz="1300" dirty="0"/>
           </a:p>
         </p:txBody>
       </p:sp>
       <p:sp>
         <p:nvSpPr>
-          <p:cNvPr id="20" name="step-num-51"/>
+          <p:cNvPr id="16" name="step-num-47"/>
           <p:cNvSpPr txBox="1"/>
           <p:nvPr/>
         </p:nvSpPr>
         <p:spPr>
           <a:xfrm>
-            <a:off x="8732520" y="4544568"/>
-            <a:ext cx="411480" cy="411480"/>
+            <a:off x="8823960" y="4617720"/>
+            <a:ext cx="384048" cy="384048"/>
           </a:xfrm>
           <a:prstGeom prst="ellipse">
             <a:avLst/>
@@ -10824,27 +11758,27 @@
               <a:buNone/>
             </a:pPr>
             <a:r>
-              <a:rPr lang="en-US" sz="1400" b="1" dirty="0">
+              <a:rPr lang="en-US" sz="1300" b="1" dirty="0">
                 <a:solidFill>
                   <a:schemeClr val="bg1"/>
                 </a:solidFill>
               </a:rPr>
               <a:t>4</a:t>
             </a:r>
-            <a:endParaRPr lang="en-US" sz="1400" dirty="0"/>
+            <a:endParaRPr lang="en-US" sz="1300" dirty="0"/>
           </a:p>
         </p:txBody>
       </p:sp>
       <p:sp>
         <p:nvSpPr>
-          <p:cNvPr id="21" name="Text 19"/>
+          <p:cNvPr id="17" name="Text 14"/>
           <p:cNvSpPr txBox="1"/>
           <p:nvPr/>
         </p:nvSpPr>
         <p:spPr>
           <a:xfrm>
-            <a:off x="9281160" y="4434840"/>
-            <a:ext cx="2359152" cy="640080"/>
+            <a:off x="9326880" y="4480560"/>
+            <a:ext cx="2313432" cy="685800"/>
           </a:xfrm>
           <a:prstGeom prst="rect">
             <a:avLst/>
@@ -10860,20 +11794,34 @@
               <a:buNone/>
             </a:pPr>
             <a:r>
-              <a:rPr lang="en-US" sz="1400" b="1" dirty="0">
+              <a:rPr lang="en-US" sz="1300" b="1" dirty="0">
                 <a:solidFill>
                   <a:schemeClr val="tx1"/>
                 </a:solidFill>
               </a:rPr>
-              <a:t>입력자료 확보 후 용량·서비스수준 분석</a:t>
-            </a:r>
-            <a:endParaRPr lang="en-US" sz="1400" dirty="0"/>
+              <a:t>입력자료 확보 후</a:t>
+            </a:r>
+            <a:endParaRPr lang="en-US" sz="1300" dirty="0"/>
+          </a:p>
+          <a:p>
+            <a:pPr indent="0" marL="0">
+              <a:buNone/>
+            </a:pPr>
+            <a:r>
+              <a:rPr lang="en-US" sz="1300" b="1" dirty="0">
+                <a:solidFill>
+                  <a:schemeClr val="tx1"/>
+                </a:solidFill>
+              </a:rPr>
+              <a:t>용량·서비스수준 분석</a:t>
+            </a:r>
+            <a:endParaRPr lang="en-US" sz="1300" dirty="0"/>
           </a:p>
         </p:txBody>
       </p:sp>
       <p:sp>
         <p:nvSpPr>
-          <p:cNvPr id="22" name="notes-52"/>
+          <p:cNvPr id="18" name="notes-48"/>
           <p:cNvSpPr txBox="1"/>
           <p:nvPr/>
         </p:nvSpPr>
@@ -10904,7 +11852,7 @@
                   <a:schemeClr val="accent5"/>
                 </a:solidFill>
               </a:rPr>
-              <a:t>※ 주말에 관측한 신호시간을 평일 첨두 교통량에 그대로 적용하지 않음</a:t>
+              <a:t>※ 다른 시간대·주말에 관측한 신호시간은 오후 첨두와 신호운영계획이 같은지 확인한 뒤에만 적용</a:t>
             </a:r>
             <a:endParaRPr lang="en-US" sz="1200" dirty="0"/>
           </a:p>
